--- a/260418_add/ppt/SuppFig_forest_immune3_detailed_native_editable.pptx
+++ b/260418_add/ppt/SuppFig_forest_immune3_detailed_native_editable.pptx
@@ -3249,7 +3249,7 @@
         <p:spPr>
           <a:xfrm>
             <a:off x="137160" y="411480"/>
-            <a:ext cx="2743200" cy="1016812"/>
+            <a:ext cx="2743200" cy="1525219"/>
           </a:xfrm>
           <a:prstGeom prst="rect">
             <a:avLst/>
@@ -3292,7 +3292,7 @@
         </p:nvSpPr>
         <p:spPr>
           <a:xfrm>
-            <a:off x="137160" y="1428292"/>
+            <a:off x="137160" y="1936699"/>
             <a:ext cx="2743200" cy="762609"/>
           </a:xfrm>
           <a:prstGeom prst="rect">
@@ -3336,7 +3336,7 @@
         </p:nvSpPr>
         <p:spPr>
           <a:xfrm>
-            <a:off x="137160" y="2190902"/>
+            <a:off x="137160" y="2699308"/>
             <a:ext cx="2743200" cy="254203"/>
           </a:xfrm>
           <a:prstGeom prst="rect">
@@ -3380,8 +3380,8 @@
         </p:nvSpPr>
         <p:spPr>
           <a:xfrm>
-            <a:off x="137160" y="2445105"/>
-            <a:ext cx="2743200" cy="508406"/>
+            <a:off x="137160" y="2953512"/>
+            <a:ext cx="2743200" cy="762609"/>
           </a:xfrm>
           <a:prstGeom prst="rect">
             <a:avLst/>
@@ -3424,7 +3424,7 @@
         </p:nvSpPr>
         <p:spPr>
           <a:xfrm>
-            <a:off x="137160" y="2953512"/>
+            <a:off x="137160" y="3716121"/>
             <a:ext cx="2743200" cy="762609"/>
           </a:xfrm>
           <a:prstGeom prst="rect">
@@ -3468,7 +3468,7 @@
         </p:nvSpPr>
         <p:spPr>
           <a:xfrm>
-            <a:off x="137160" y="3716121"/>
+            <a:off x="137160" y="4478731"/>
             <a:ext cx="2743200" cy="508406"/>
           </a:xfrm>
           <a:prstGeom prst="rect">
@@ -3512,7 +3512,7 @@
         </p:nvSpPr>
         <p:spPr>
           <a:xfrm>
-            <a:off x="137160" y="4224528"/>
+            <a:off x="137160" y="4987137"/>
             <a:ext cx="2743200" cy="1016812"/>
           </a:xfrm>
           <a:prstGeom prst="rect">
@@ -3556,7 +3556,7 @@
         </p:nvSpPr>
         <p:spPr>
           <a:xfrm>
-            <a:off x="137160" y="5241340"/>
+            <a:off x="137160" y="6003950"/>
             <a:ext cx="2743200" cy="254203"/>
           </a:xfrm>
           <a:prstGeom prst="rect">
@@ -3600,7 +3600,7 @@
         </p:nvSpPr>
         <p:spPr>
           <a:xfrm>
-            <a:off x="137160" y="5495544"/>
+            <a:off x="137160" y="6258153"/>
             <a:ext cx="2743200" cy="508406"/>
           </a:xfrm>
           <a:prstGeom prst="rect">
@@ -3636,53 +3636,9 @@
           </a:p>
         </p:txBody>
       </p:sp>
-      <p:sp>
-        <p:nvSpPr>
-          <p:cNvPr id="15" name="Rectangle 14"/>
-          <p:cNvSpPr/>
-          <p:nvPr/>
-        </p:nvSpPr>
-        <p:spPr>
-          <a:xfrm>
-            <a:off x="137160" y="6003950"/>
-            <a:ext cx="2743200" cy="762609"/>
-          </a:xfrm>
-          <a:prstGeom prst="rect">
-            <a:avLst/>
-          </a:prstGeom>
-          <a:solidFill>
-            <a:srgbClr val="FAF2D6"/>
-          </a:solidFill>
-          <a:ln>
-            <a:noFill/>
-          </a:ln>
-          <a:effectLst/>
-        </p:spPr>
-        <p:style>
-          <a:lnRef idx="1">
-            <a:schemeClr val="accent1"/>
-          </a:lnRef>
-          <a:fillRef idx="3">
-            <a:schemeClr val="accent1"/>
-          </a:fillRef>
-          <a:effectRef idx="2">
-            <a:schemeClr val="accent1"/>
-          </a:effectRef>
-          <a:fontRef idx="minor">
-            <a:schemeClr val="lt1"/>
-          </a:fontRef>
-        </p:style>
-        <p:txBody>
-          <a:bodyPr rtlCol="0" anchor="ctr"/>
-          <a:lstStyle/>
-          <a:p>
-            <a:pPr algn="ctr"/>
-          </a:p>
-        </p:txBody>
-      </p:sp>
       <p:cxnSp>
         <p:nvCxnSpPr>
-          <p:cNvPr id="16" name="Connector 15"/>
+          <p:cNvPr id="15" name="Connector 14"/>
           <p:cNvCxnSpPr/>
           <p:nvPr/>
         </p:nvCxnSpPr>
@@ -3718,7 +3674,7 @@
       </p:cxnSp>
       <p:sp>
         <p:nvSpPr>
-          <p:cNvPr id="17" name="TextBox 16"/>
+          <p:cNvPr id="16" name="TextBox 15"/>
           <p:cNvSpPr txBox="1"/>
           <p:nvPr/>
         </p:nvSpPr>
@@ -3754,7 +3710,7 @@
       </p:sp>
       <p:cxnSp>
         <p:nvCxnSpPr>
-          <p:cNvPr id="18" name="Connector 17"/>
+          <p:cNvPr id="17" name="Connector 16"/>
           <p:cNvCxnSpPr/>
           <p:nvPr/>
         </p:nvCxnSpPr>
@@ -3790,7 +3746,7 @@
       </p:cxnSp>
       <p:sp>
         <p:nvSpPr>
-          <p:cNvPr id="19" name="TextBox 18"/>
+          <p:cNvPr id="18" name="TextBox 17"/>
           <p:cNvSpPr txBox="1"/>
           <p:nvPr/>
         </p:nvSpPr>
@@ -3826,7 +3782,7 @@
       </p:sp>
       <p:cxnSp>
         <p:nvCxnSpPr>
-          <p:cNvPr id="20" name="Connector 19"/>
+          <p:cNvPr id="19" name="Connector 18"/>
           <p:cNvCxnSpPr/>
           <p:nvPr/>
         </p:nvCxnSpPr>
@@ -3862,7 +3818,7 @@
       </p:cxnSp>
       <p:sp>
         <p:nvSpPr>
-          <p:cNvPr id="21" name="TextBox 20"/>
+          <p:cNvPr id="20" name="TextBox 19"/>
           <p:cNvSpPr txBox="1"/>
           <p:nvPr/>
         </p:nvSpPr>
@@ -3898,7 +3854,7 @@
       </p:sp>
       <p:cxnSp>
         <p:nvCxnSpPr>
-          <p:cNvPr id="22" name="Connector 21"/>
+          <p:cNvPr id="21" name="Connector 20"/>
           <p:cNvCxnSpPr/>
           <p:nvPr/>
         </p:nvCxnSpPr>
@@ -3934,7 +3890,7 @@
       </p:cxnSp>
       <p:sp>
         <p:nvSpPr>
-          <p:cNvPr id="23" name="TextBox 22"/>
+          <p:cNvPr id="22" name="TextBox 21"/>
           <p:cNvSpPr txBox="1"/>
           <p:nvPr/>
         </p:nvSpPr>
@@ -3970,7 +3926,7 @@
       </p:sp>
       <p:cxnSp>
         <p:nvCxnSpPr>
-          <p:cNvPr id="24" name="Connector 23"/>
+          <p:cNvPr id="23" name="Connector 22"/>
           <p:cNvCxnSpPr/>
           <p:nvPr/>
         </p:nvCxnSpPr>
@@ -4006,7 +3962,7 @@
       </p:cxnSp>
       <p:sp>
         <p:nvSpPr>
-          <p:cNvPr id="25" name="TextBox 24"/>
+          <p:cNvPr id="24" name="TextBox 23"/>
           <p:cNvSpPr txBox="1"/>
           <p:nvPr/>
         </p:nvSpPr>
@@ -4042,7 +3998,7 @@
       </p:sp>
       <p:sp>
         <p:nvSpPr>
-          <p:cNvPr id="26" name="TextBox 25"/>
+          <p:cNvPr id="25" name="TextBox 24"/>
           <p:cNvSpPr txBox="1"/>
           <p:nvPr/>
         </p:nvSpPr>
@@ -4078,7 +4034,7 @@
       </p:sp>
       <p:sp>
         <p:nvSpPr>
-          <p:cNvPr id="27" name="TextBox 26"/>
+          <p:cNvPr id="26" name="TextBox 25"/>
           <p:cNvSpPr txBox="1"/>
           <p:nvPr/>
         </p:nvSpPr>
@@ -4114,7 +4070,7 @@
       </p:sp>
       <p:sp>
         <p:nvSpPr>
-          <p:cNvPr id="28" name="TextBox 27"/>
+          <p:cNvPr id="27" name="TextBox 26"/>
           <p:cNvSpPr txBox="1"/>
           <p:nvPr/>
         </p:nvSpPr>
@@ -4150,7 +4106,7 @@
       </p:sp>
       <p:sp>
         <p:nvSpPr>
-          <p:cNvPr id="29" name="TextBox 28"/>
+          <p:cNvPr id="28" name="TextBox 27"/>
           <p:cNvSpPr txBox="1"/>
           <p:nvPr/>
         </p:nvSpPr>
@@ -4186,7 +4142,7 @@
       </p:sp>
       <p:sp>
         <p:nvSpPr>
-          <p:cNvPr id="30" name="TextBox 29"/>
+          <p:cNvPr id="29" name="TextBox 28"/>
           <p:cNvSpPr txBox="1"/>
           <p:nvPr/>
         </p:nvSpPr>
@@ -4222,7 +4178,7 @@
       </p:sp>
       <p:sp>
         <p:nvSpPr>
-          <p:cNvPr id="31" name="TextBox 30"/>
+          <p:cNvPr id="30" name="TextBox 29"/>
           <p:cNvSpPr txBox="1"/>
           <p:nvPr/>
         </p:nvSpPr>
@@ -4258,7 +4214,7 @@
       </p:sp>
       <p:cxnSp>
         <p:nvCxnSpPr>
-          <p:cNvPr id="32" name="Connector 31"/>
+          <p:cNvPr id="31" name="Connector 30"/>
           <p:cNvCxnSpPr/>
           <p:nvPr/>
         </p:nvCxnSpPr>
@@ -4294,7 +4250,7 @@
       </p:cxnSp>
       <p:sp>
         <p:nvSpPr>
-          <p:cNvPr id="33" name="Rectangle 32"/>
+          <p:cNvPr id="32" name="Rectangle 31"/>
           <p:cNvSpPr/>
           <p:nvPr/>
         </p:nvSpPr>
@@ -4338,7 +4294,7 @@
       </p:sp>
       <p:sp>
         <p:nvSpPr>
-          <p:cNvPr id="34" name="TextBox 33"/>
+          <p:cNvPr id="33" name="TextBox 32"/>
           <p:cNvSpPr txBox="1"/>
           <p:nvPr/>
         </p:nvSpPr>
@@ -4374,7 +4330,7 @@
       </p:sp>
       <p:sp>
         <p:nvSpPr>
-          <p:cNvPr id="35" name="TextBox 34"/>
+          <p:cNvPr id="34" name="TextBox 33"/>
           <p:cNvSpPr txBox="1"/>
           <p:nvPr/>
         </p:nvSpPr>
@@ -4410,7 +4366,7 @@
       </p:sp>
       <p:cxnSp>
         <p:nvCxnSpPr>
-          <p:cNvPr id="36" name="Connector 35"/>
+          <p:cNvPr id="35" name="Connector 34"/>
           <p:cNvCxnSpPr/>
           <p:nvPr/>
         </p:nvCxnSpPr>
@@ -4446,7 +4402,7 @@
       </p:cxnSp>
       <p:sp>
         <p:nvSpPr>
-          <p:cNvPr id="37" name="Oval 36"/>
+          <p:cNvPr id="36" name="Oval 35"/>
           <p:cNvSpPr/>
           <p:nvPr/>
         </p:nvSpPr>
@@ -4492,7 +4448,7 @@
       </p:sp>
       <p:sp>
         <p:nvSpPr>
-          <p:cNvPr id="38" name="TextBox 37"/>
+          <p:cNvPr id="37" name="TextBox 36"/>
           <p:cNvSpPr txBox="1"/>
           <p:nvPr/>
         </p:nvSpPr>
@@ -4528,7 +4484,7 @@
       </p:sp>
       <p:sp>
         <p:nvSpPr>
-          <p:cNvPr id="39" name="TextBox 38"/>
+          <p:cNvPr id="38" name="TextBox 37"/>
           <p:cNvSpPr txBox="1"/>
           <p:nvPr/>
         </p:nvSpPr>
@@ -4564,7 +4520,7 @@
       </p:sp>
       <p:sp>
         <p:nvSpPr>
-          <p:cNvPr id="40" name="TextBox 39"/>
+          <p:cNvPr id="39" name="TextBox 38"/>
           <p:cNvSpPr txBox="1"/>
           <p:nvPr/>
         </p:nvSpPr>
@@ -4600,7 +4556,7 @@
       </p:sp>
       <p:sp>
         <p:nvSpPr>
-          <p:cNvPr id="41" name="TextBox 40"/>
+          <p:cNvPr id="40" name="TextBox 39"/>
           <p:cNvSpPr txBox="1"/>
           <p:nvPr/>
         </p:nvSpPr>
@@ -4636,7 +4592,7 @@
       </p:sp>
       <p:sp>
         <p:nvSpPr>
-          <p:cNvPr id="42" name="TextBox 41"/>
+          <p:cNvPr id="41" name="TextBox 40"/>
           <p:cNvSpPr txBox="1"/>
           <p:nvPr/>
         </p:nvSpPr>
@@ -4672,7 +4628,7 @@
       </p:sp>
       <p:sp>
         <p:nvSpPr>
-          <p:cNvPr id="43" name="TextBox 42"/>
+          <p:cNvPr id="42" name="TextBox 41"/>
           <p:cNvSpPr txBox="1"/>
           <p:nvPr/>
         </p:nvSpPr>
@@ -4697,7 +4653,7 @@
             <a:r>
               <a:rPr sz="700" b="1" i="0">
                 <a:solidFill>
-                  <a:srgbClr val="B58900"/>
+                  <a:srgbClr val="222222"/>
                 </a:solidFill>
                 <a:latin typeface="Arial"/>
               </a:rPr>
@@ -4708,7 +4664,7 @@
       </p:sp>
       <p:sp>
         <p:nvSpPr>
-          <p:cNvPr id="44" name="Rectangle 43"/>
+          <p:cNvPr id="43" name="Rectangle 42"/>
           <p:cNvSpPr/>
           <p:nvPr/>
         </p:nvSpPr>
@@ -4752,7 +4708,7 @@
       </p:sp>
       <p:sp>
         <p:nvSpPr>
-          <p:cNvPr id="45" name="TextBox 44"/>
+          <p:cNvPr id="44" name="TextBox 43"/>
           <p:cNvSpPr txBox="1"/>
           <p:nvPr/>
         </p:nvSpPr>
@@ -4788,7 +4744,7 @@
       </p:sp>
       <p:cxnSp>
         <p:nvCxnSpPr>
-          <p:cNvPr id="46" name="Connector 45"/>
+          <p:cNvPr id="45" name="Connector 44"/>
           <p:cNvCxnSpPr/>
           <p:nvPr/>
         </p:nvCxnSpPr>
@@ -4824,7 +4780,7 @@
       </p:cxnSp>
       <p:sp>
         <p:nvSpPr>
-          <p:cNvPr id="47" name="Oval 46"/>
+          <p:cNvPr id="46" name="Oval 45"/>
           <p:cNvSpPr/>
           <p:nvPr/>
         </p:nvSpPr>
@@ -4870,7 +4826,7 @@
       </p:sp>
       <p:sp>
         <p:nvSpPr>
-          <p:cNvPr id="48" name="TextBox 47"/>
+          <p:cNvPr id="47" name="TextBox 46"/>
           <p:cNvSpPr txBox="1"/>
           <p:nvPr/>
         </p:nvSpPr>
@@ -4906,7 +4862,7 @@
       </p:sp>
       <p:sp>
         <p:nvSpPr>
-          <p:cNvPr id="49" name="TextBox 48"/>
+          <p:cNvPr id="48" name="TextBox 47"/>
           <p:cNvSpPr txBox="1"/>
           <p:nvPr/>
         </p:nvSpPr>
@@ -4942,7 +4898,7 @@
       </p:sp>
       <p:sp>
         <p:nvSpPr>
-          <p:cNvPr id="50" name="TextBox 49"/>
+          <p:cNvPr id="49" name="TextBox 48"/>
           <p:cNvSpPr txBox="1"/>
           <p:nvPr/>
         </p:nvSpPr>
@@ -4978,7 +4934,7 @@
       </p:sp>
       <p:sp>
         <p:nvSpPr>
-          <p:cNvPr id="51" name="TextBox 50"/>
+          <p:cNvPr id="50" name="TextBox 49"/>
           <p:cNvSpPr txBox="1"/>
           <p:nvPr/>
         </p:nvSpPr>
@@ -5014,7 +4970,7 @@
       </p:sp>
       <p:sp>
         <p:nvSpPr>
-          <p:cNvPr id="52" name="TextBox 51"/>
+          <p:cNvPr id="51" name="TextBox 50"/>
           <p:cNvSpPr txBox="1"/>
           <p:nvPr/>
         </p:nvSpPr>
@@ -5050,7 +5006,7 @@
       </p:sp>
       <p:sp>
         <p:nvSpPr>
-          <p:cNvPr id="53" name="Rectangle 52"/>
+          <p:cNvPr id="52" name="Rectangle 51"/>
           <p:cNvSpPr/>
           <p:nvPr/>
         </p:nvSpPr>
@@ -5094,7 +5050,7 @@
       </p:sp>
       <p:sp>
         <p:nvSpPr>
-          <p:cNvPr id="54" name="TextBox 53"/>
+          <p:cNvPr id="53" name="TextBox 52"/>
           <p:cNvSpPr txBox="1"/>
           <p:nvPr/>
         </p:nvSpPr>
@@ -5130,7 +5086,7 @@
       </p:sp>
       <p:cxnSp>
         <p:nvCxnSpPr>
-          <p:cNvPr id="55" name="Connector 54"/>
+          <p:cNvPr id="54" name="Connector 53"/>
           <p:cNvCxnSpPr/>
           <p:nvPr/>
         </p:nvCxnSpPr>
@@ -5166,7 +5122,7 @@
       </p:cxnSp>
       <p:sp>
         <p:nvSpPr>
-          <p:cNvPr id="56" name="Oval 55"/>
+          <p:cNvPr id="55" name="Oval 54"/>
           <p:cNvSpPr/>
           <p:nvPr/>
         </p:nvSpPr>
@@ -5212,7 +5168,7 @@
       </p:sp>
       <p:sp>
         <p:nvSpPr>
-          <p:cNvPr id="57" name="TextBox 56"/>
+          <p:cNvPr id="56" name="TextBox 55"/>
           <p:cNvSpPr txBox="1"/>
           <p:nvPr/>
         </p:nvSpPr>
@@ -5248,7 +5204,7 @@
       </p:sp>
       <p:sp>
         <p:nvSpPr>
-          <p:cNvPr id="58" name="TextBox 57"/>
+          <p:cNvPr id="57" name="TextBox 56"/>
           <p:cNvSpPr txBox="1"/>
           <p:nvPr/>
         </p:nvSpPr>
@@ -5284,7 +5240,7 @@
       </p:sp>
       <p:sp>
         <p:nvSpPr>
-          <p:cNvPr id="59" name="TextBox 58"/>
+          <p:cNvPr id="58" name="TextBox 57"/>
           <p:cNvSpPr txBox="1"/>
           <p:nvPr/>
         </p:nvSpPr>
@@ -5320,7 +5276,7 @@
       </p:sp>
       <p:sp>
         <p:nvSpPr>
-          <p:cNvPr id="60" name="TextBox 59"/>
+          <p:cNvPr id="59" name="TextBox 58"/>
           <p:cNvSpPr txBox="1"/>
           <p:nvPr/>
         </p:nvSpPr>
@@ -5356,7 +5312,7 @@
       </p:sp>
       <p:sp>
         <p:nvSpPr>
-          <p:cNvPr id="61" name="TextBox 60"/>
+          <p:cNvPr id="60" name="TextBox 59"/>
           <p:cNvSpPr txBox="1"/>
           <p:nvPr/>
         </p:nvSpPr>
@@ -5392,7 +5348,7 @@
       </p:sp>
       <p:sp>
         <p:nvSpPr>
-          <p:cNvPr id="62" name="Rectangle 61"/>
+          <p:cNvPr id="61" name="Rectangle 60"/>
           <p:cNvSpPr/>
           <p:nvPr/>
         </p:nvSpPr>
@@ -5436,7 +5392,7 @@
       </p:sp>
       <p:sp>
         <p:nvSpPr>
-          <p:cNvPr id="63" name="TextBox 62"/>
+          <p:cNvPr id="62" name="TextBox 61"/>
           <p:cNvSpPr txBox="1"/>
           <p:nvPr/>
         </p:nvSpPr>
@@ -5465,28 +5421,28 @@
                 </a:solidFill>
                 <a:latin typeface="Arial"/>
               </a:rPr>
-              <a:t>CD8 activation</a:t>
+              <a:t>CD8 cytotoxic</a:t>
             </a:r>
           </a:p>
         </p:txBody>
       </p:sp>
       <p:cxnSp>
         <p:nvCxnSpPr>
-          <p:cNvPr id="64" name="Connector 63"/>
+          <p:cNvPr id="63" name="Connector 62"/>
           <p:cNvCxnSpPr/>
           <p:nvPr/>
         </p:nvCxnSpPr>
         <p:spPr>
           <a:xfrm>
-            <a:off x="4046377" y="1301191"/>
-            <a:ext cx="1914338" cy="0"/>
+            <a:off x="3643146" y="1301191"/>
+            <a:ext cx="2598347" cy="0"/>
           </a:xfrm>
           <a:prstGeom prst="line">
             <a:avLst/>
           </a:prstGeom>
           <a:ln w="17780">
             <a:solidFill>
-              <a:srgbClr val="0A7D6E"/>
+              <a:srgbClr val="C53E1F"/>
             </a:solidFill>
           </a:ln>
           <a:effectLst/>
@@ -5508,13 +5464,355 @@
       </p:cxnSp>
       <p:sp>
         <p:nvSpPr>
-          <p:cNvPr id="65" name="Oval 64"/>
+          <p:cNvPr id="64" name="Oval 63"/>
           <p:cNvSpPr/>
           <p:nvPr/>
         </p:nvSpPr>
         <p:spPr>
           <a:xfrm>
-            <a:off x="4931661" y="1277191"/>
+            <a:off x="4863825" y="1277191"/>
+            <a:ext cx="48000" cy="48000"/>
+          </a:xfrm>
+          <a:prstGeom prst="ellipse">
+            <a:avLst/>
+          </a:prstGeom>
+          <a:solidFill>
+            <a:srgbClr val="C53E1F"/>
+          </a:solidFill>
+          <a:ln w="10160">
+            <a:solidFill>
+              <a:srgbClr val="FFFFFF"/>
+            </a:solidFill>
+          </a:ln>
+          <a:effectLst/>
+        </p:spPr>
+        <p:style>
+          <a:lnRef idx="1">
+            <a:schemeClr val="accent1"/>
+          </a:lnRef>
+          <a:fillRef idx="3">
+            <a:schemeClr val="accent1"/>
+          </a:fillRef>
+          <a:effectRef idx="2">
+            <a:schemeClr val="accent1"/>
+          </a:effectRef>
+          <a:fontRef idx="minor">
+            <a:schemeClr val="lt1"/>
+          </a:fontRef>
+        </p:style>
+        <p:txBody>
+          <a:bodyPr rtlCol="0" anchor="ctr"/>
+          <a:lstStyle/>
+          <a:p>
+            <a:pPr algn="ctr"/>
+          </a:p>
+        </p:txBody>
+      </p:sp>
+      <p:sp>
+        <p:nvSpPr>
+          <p:cNvPr id="65" name="TextBox 64"/>
+          <p:cNvSpPr txBox="1"/>
+          <p:nvPr/>
+        </p:nvSpPr>
+        <p:spPr>
+          <a:xfrm>
+            <a:off x="7086600" y="1218895"/>
+            <a:ext cx="457200" cy="164592"/>
+          </a:xfrm>
+          <a:prstGeom prst="rect">
+            <a:avLst/>
+          </a:prstGeom>
+          <a:noFill/>
+          <a:effectLst/>
+        </p:spPr>
+        <p:txBody>
+          <a:bodyPr wrap="square" lIns="0" rIns="0" tIns="0" bIns="0" anchor="ctr">
+            <a:spAutoFit/>
+          </a:bodyPr>
+          <a:lstStyle/>
+          <a:p>
+            <a:pPr algn="ctr"/>
+            <a:r>
+              <a:rPr sz="700" b="0" i="0">
+                <a:solidFill>
+                  <a:srgbClr val="222222"/>
+                </a:solidFill>
+                <a:latin typeface="Arial"/>
+              </a:rPr>
+              <a:t>-0.01</a:t>
+            </a:r>
+          </a:p>
+        </p:txBody>
+      </p:sp>
+      <p:sp>
+        <p:nvSpPr>
+          <p:cNvPr id="66" name="TextBox 65"/>
+          <p:cNvSpPr txBox="1"/>
+          <p:nvPr/>
+        </p:nvSpPr>
+        <p:spPr>
+          <a:xfrm>
+            <a:off x="7589520" y="1218895"/>
+            <a:ext cx="868680" cy="164592"/>
+          </a:xfrm>
+          <a:prstGeom prst="rect">
+            <a:avLst/>
+          </a:prstGeom>
+          <a:noFill/>
+          <a:effectLst/>
+        </p:spPr>
+        <p:txBody>
+          <a:bodyPr wrap="square" lIns="0" rIns="0" tIns="0" bIns="0" anchor="ctr">
+            <a:spAutoFit/>
+          </a:bodyPr>
+          <a:lstStyle/>
+          <a:p>
+            <a:pPr algn="ctr"/>
+            <a:r>
+              <a:rPr sz="700" b="0" i="0">
+                <a:solidFill>
+                  <a:srgbClr val="222222"/>
+                </a:solidFill>
+                <a:latin typeface="Arial"/>
+              </a:rPr>
+              <a:t>[-0.73, +0.77]</a:t>
+            </a:r>
+          </a:p>
+        </p:txBody>
+      </p:sp>
+      <p:sp>
+        <p:nvSpPr>
+          <p:cNvPr id="67" name="TextBox 66"/>
+          <p:cNvSpPr txBox="1"/>
+          <p:nvPr/>
+        </p:nvSpPr>
+        <p:spPr>
+          <a:xfrm>
+            <a:off x="8458200" y="1218895"/>
+            <a:ext cx="365760" cy="164592"/>
+          </a:xfrm>
+          <a:prstGeom prst="rect">
+            <a:avLst/>
+          </a:prstGeom>
+          <a:noFill/>
+          <a:effectLst/>
+        </p:spPr>
+        <p:txBody>
+          <a:bodyPr wrap="square" lIns="0" rIns="0" tIns="0" bIns="0" anchor="ctr">
+            <a:spAutoFit/>
+          </a:bodyPr>
+          <a:lstStyle/>
+          <a:p>
+            <a:pPr algn="ctr"/>
+            <a:r>
+              <a:rPr sz="700" b="0" i="0">
+                <a:solidFill>
+                  <a:srgbClr val="222222"/>
+                </a:solidFill>
+                <a:latin typeface="Arial"/>
+              </a:rPr>
+              <a:t>142</a:t>
+            </a:r>
+          </a:p>
+        </p:txBody>
+      </p:sp>
+      <p:sp>
+        <p:nvSpPr>
+          <p:cNvPr id="68" name="TextBox 67"/>
+          <p:cNvSpPr txBox="1"/>
+          <p:nvPr/>
+        </p:nvSpPr>
+        <p:spPr>
+          <a:xfrm>
+            <a:off x="8823959" y="1218895"/>
+            <a:ext cx="594360" cy="164592"/>
+          </a:xfrm>
+          <a:prstGeom prst="rect">
+            <a:avLst/>
+          </a:prstGeom>
+          <a:noFill/>
+          <a:effectLst/>
+        </p:spPr>
+        <p:txBody>
+          <a:bodyPr wrap="square" lIns="0" rIns="0" tIns="0" bIns="0" anchor="ctr">
+            <a:spAutoFit/>
+          </a:bodyPr>
+          <a:lstStyle/>
+          <a:p>
+            <a:pPr algn="ctr"/>
+            <a:r>
+              <a:rPr sz="700" b="0" i="0">
+                <a:solidFill>
+                  <a:srgbClr val="222222"/>
+                </a:solidFill>
+                <a:latin typeface="Arial"/>
+              </a:rPr>
+              <a:t>0.843</a:t>
+            </a:r>
+          </a:p>
+        </p:txBody>
+      </p:sp>
+      <p:sp>
+        <p:nvSpPr>
+          <p:cNvPr id="69" name="TextBox 68"/>
+          <p:cNvSpPr txBox="1"/>
+          <p:nvPr/>
+        </p:nvSpPr>
+        <p:spPr>
+          <a:xfrm>
+            <a:off x="9418320" y="1218895"/>
+            <a:ext cx="502920" cy="164592"/>
+          </a:xfrm>
+          <a:prstGeom prst="rect">
+            <a:avLst/>
+          </a:prstGeom>
+          <a:noFill/>
+          <a:effectLst/>
+        </p:spPr>
+        <p:txBody>
+          <a:bodyPr wrap="square" lIns="0" rIns="0" tIns="0" bIns="0" anchor="ctr">
+            <a:spAutoFit/>
+          </a:bodyPr>
+          <a:lstStyle/>
+          <a:p>
+            <a:pPr algn="ctr"/>
+            <a:r>
+              <a:rPr sz="700" b="0" i="0">
+                <a:solidFill>
+                  <a:srgbClr val="222222"/>
+                </a:solidFill>
+                <a:latin typeface="Arial"/>
+              </a:rPr>
+              <a:t>0.957</a:t>
+            </a:r>
+          </a:p>
+        </p:txBody>
+      </p:sp>
+      <p:sp>
+        <p:nvSpPr>
+          <p:cNvPr id="70" name="Rectangle 69"/>
+          <p:cNvSpPr/>
+          <p:nvPr/>
+        </p:nvSpPr>
+        <p:spPr>
+          <a:xfrm>
+            <a:off x="164592" y="1500530"/>
+            <a:ext cx="109728" cy="109728"/>
+          </a:xfrm>
+          <a:prstGeom prst="rect">
+            <a:avLst/>
+          </a:prstGeom>
+          <a:solidFill>
+            <a:srgbClr val="057A64"/>
+          </a:solidFill>
+          <a:ln>
+            <a:noFill/>
+          </a:ln>
+          <a:effectLst/>
+        </p:spPr>
+        <p:style>
+          <a:lnRef idx="1">
+            <a:schemeClr val="accent1"/>
+          </a:lnRef>
+          <a:fillRef idx="3">
+            <a:schemeClr val="accent1"/>
+          </a:fillRef>
+          <a:effectRef idx="2">
+            <a:schemeClr val="accent1"/>
+          </a:effectRef>
+          <a:fontRef idx="minor">
+            <a:schemeClr val="lt1"/>
+          </a:fontRef>
+        </p:style>
+        <p:txBody>
+          <a:bodyPr rtlCol="0" anchor="ctr"/>
+          <a:lstStyle/>
+          <a:p>
+            <a:pPr algn="ctr"/>
+          </a:p>
+        </p:txBody>
+      </p:sp>
+      <p:sp>
+        <p:nvSpPr>
+          <p:cNvPr id="71" name="TextBox 70"/>
+          <p:cNvSpPr txBox="1"/>
+          <p:nvPr/>
+        </p:nvSpPr>
+        <p:spPr>
+          <a:xfrm>
+            <a:off x="1353312" y="1473098"/>
+            <a:ext cx="1508760" cy="164592"/>
+          </a:xfrm>
+          <a:prstGeom prst="rect">
+            <a:avLst/>
+          </a:prstGeom>
+          <a:noFill/>
+          <a:effectLst/>
+        </p:spPr>
+        <p:txBody>
+          <a:bodyPr wrap="square" lIns="0" rIns="0" tIns="0" bIns="0" anchor="ctr">
+            <a:spAutoFit/>
+          </a:bodyPr>
+          <a:lstStyle/>
+          <a:p>
+            <a:pPr algn="r"/>
+            <a:r>
+              <a:rPr sz="800" b="0" i="0">
+                <a:solidFill>
+                  <a:srgbClr val="222222"/>
+                </a:solidFill>
+                <a:latin typeface="Arial"/>
+              </a:rPr>
+              <a:t>CD8 activation</a:t>
+            </a:r>
+          </a:p>
+        </p:txBody>
+      </p:sp>
+      <p:cxnSp>
+        <p:nvCxnSpPr>
+          <p:cNvPr id="72" name="Connector 71"/>
+          <p:cNvCxnSpPr/>
+          <p:nvPr/>
+        </p:nvCxnSpPr>
+        <p:spPr>
+          <a:xfrm>
+            <a:off x="4046377" y="1555394"/>
+            <a:ext cx="1914338" cy="0"/>
+          </a:xfrm>
+          <a:prstGeom prst="line">
+            <a:avLst/>
+          </a:prstGeom>
+          <a:ln w="17780">
+            <a:solidFill>
+              <a:srgbClr val="0A7D6E"/>
+            </a:solidFill>
+          </a:ln>
+          <a:effectLst/>
+        </p:spPr>
+        <p:style>
+          <a:lnRef idx="2">
+            <a:schemeClr val="accent1"/>
+          </a:lnRef>
+          <a:fillRef idx="0">
+            <a:schemeClr val="accent1"/>
+          </a:fillRef>
+          <a:effectRef idx="1">
+            <a:schemeClr val="accent1"/>
+          </a:effectRef>
+          <a:fontRef idx="minor">
+            <a:schemeClr val="tx1"/>
+          </a:fontRef>
+        </p:style>
+      </p:cxnSp>
+      <p:sp>
+        <p:nvSpPr>
+          <p:cNvPr id="73" name="Oval 72"/>
+          <p:cNvSpPr/>
+          <p:nvPr/>
+        </p:nvSpPr>
+        <p:spPr>
+          <a:xfrm>
+            <a:off x="4931661" y="1531394"/>
             <a:ext cx="48000" cy="48000"/>
           </a:xfrm>
           <a:prstGeom prst="ellipse">
@@ -5554,13 +5852,13 @@
       </p:sp>
       <p:sp>
         <p:nvSpPr>
-          <p:cNvPr id="66" name="TextBox 65"/>
-          <p:cNvSpPr txBox="1"/>
-          <p:nvPr/>
-        </p:nvSpPr>
-        <p:spPr>
-          <a:xfrm>
-            <a:off x="7086600" y="1218895"/>
+          <p:cNvPr id="74" name="TextBox 73"/>
+          <p:cNvSpPr txBox="1"/>
+          <p:nvPr/>
+        </p:nvSpPr>
+        <p:spPr>
+          <a:xfrm>
+            <a:off x="7086600" y="1473098"/>
             <a:ext cx="457200" cy="164592"/>
           </a:xfrm>
           <a:prstGeom prst="rect">
@@ -5590,13 +5888,13 @@
       </p:sp>
       <p:sp>
         <p:nvSpPr>
-          <p:cNvPr id="67" name="TextBox 66"/>
-          <p:cNvSpPr txBox="1"/>
-          <p:nvPr/>
-        </p:nvSpPr>
-        <p:spPr>
-          <a:xfrm>
-            <a:off x="7589520" y="1218895"/>
+          <p:cNvPr id="75" name="TextBox 74"/>
+          <p:cNvSpPr txBox="1"/>
+          <p:nvPr/>
+        </p:nvSpPr>
+        <p:spPr>
+          <a:xfrm>
+            <a:off x="7589520" y="1473098"/>
             <a:ext cx="868680" cy="164592"/>
           </a:xfrm>
           <a:prstGeom prst="rect">
@@ -5626,13 +5924,13 @@
       </p:sp>
       <p:sp>
         <p:nvSpPr>
-          <p:cNvPr id="68" name="TextBox 67"/>
-          <p:cNvSpPr txBox="1"/>
-          <p:nvPr/>
-        </p:nvSpPr>
-        <p:spPr>
-          <a:xfrm>
-            <a:off x="8458200" y="1218895"/>
+          <p:cNvPr id="76" name="TextBox 75"/>
+          <p:cNvSpPr txBox="1"/>
+          <p:nvPr/>
+        </p:nvSpPr>
+        <p:spPr>
+          <a:xfrm>
+            <a:off x="8458200" y="1473098"/>
             <a:ext cx="365760" cy="164592"/>
           </a:xfrm>
           <a:prstGeom prst="rect">
@@ -5662,13 +5960,13 @@
       </p:sp>
       <p:sp>
         <p:nvSpPr>
-          <p:cNvPr id="69" name="TextBox 68"/>
-          <p:cNvSpPr txBox="1"/>
-          <p:nvPr/>
-        </p:nvSpPr>
-        <p:spPr>
-          <a:xfrm>
-            <a:off x="8823959" y="1218895"/>
+          <p:cNvPr id="77" name="TextBox 76"/>
+          <p:cNvSpPr txBox="1"/>
+          <p:nvPr/>
+        </p:nvSpPr>
+        <p:spPr>
+          <a:xfrm>
+            <a:off x="8823959" y="1473098"/>
             <a:ext cx="594360" cy="164592"/>
           </a:xfrm>
           <a:prstGeom prst="rect">
@@ -5698,13 +5996,13 @@
       </p:sp>
       <p:sp>
         <p:nvSpPr>
-          <p:cNvPr id="70" name="TextBox 69"/>
-          <p:cNvSpPr txBox="1"/>
-          <p:nvPr/>
-        </p:nvSpPr>
-        <p:spPr>
-          <a:xfrm>
-            <a:off x="9418320" y="1218895"/>
+          <p:cNvPr id="78" name="TextBox 77"/>
+          <p:cNvSpPr txBox="1"/>
+          <p:nvPr/>
+        </p:nvSpPr>
+        <p:spPr>
+          <a:xfrm>
+            <a:off x="9418320" y="1473098"/>
             <a:ext cx="502920" cy="164592"/>
           </a:xfrm>
           <a:prstGeom prst="rect">
@@ -5734,13 +6032,355 @@
       </p:sp>
       <p:sp>
         <p:nvSpPr>
-          <p:cNvPr id="71" name="Rectangle 70"/>
+          <p:cNvPr id="79" name="Rectangle 78"/>
           <p:cNvSpPr/>
           <p:nvPr/>
         </p:nvSpPr>
         <p:spPr>
           <a:xfrm>
-            <a:off x="164592" y="1500530"/>
+            <a:off x="164592" y="1754733"/>
+            <a:ext cx="109728" cy="109728"/>
+          </a:xfrm>
+          <a:prstGeom prst="rect">
+            <a:avLst/>
+          </a:prstGeom>
+          <a:solidFill>
+            <a:srgbClr val="057A64"/>
+          </a:solidFill>
+          <a:ln>
+            <a:noFill/>
+          </a:ln>
+          <a:effectLst/>
+        </p:spPr>
+        <p:style>
+          <a:lnRef idx="1">
+            <a:schemeClr val="accent1"/>
+          </a:lnRef>
+          <a:fillRef idx="3">
+            <a:schemeClr val="accent1"/>
+          </a:fillRef>
+          <a:effectRef idx="2">
+            <a:schemeClr val="accent1"/>
+          </a:effectRef>
+          <a:fontRef idx="minor">
+            <a:schemeClr val="lt1"/>
+          </a:fontRef>
+        </p:style>
+        <p:txBody>
+          <a:bodyPr rtlCol="0" anchor="ctr"/>
+          <a:lstStyle/>
+          <a:p>
+            <a:pPr algn="ctr"/>
+          </a:p>
+        </p:txBody>
+      </p:sp>
+      <p:sp>
+        <p:nvSpPr>
+          <p:cNvPr id="80" name="TextBox 79"/>
+          <p:cNvSpPr txBox="1"/>
+          <p:nvPr/>
+        </p:nvSpPr>
+        <p:spPr>
+          <a:xfrm>
+            <a:off x="1353312" y="1727301"/>
+            <a:ext cx="1508760" cy="164592"/>
+          </a:xfrm>
+          <a:prstGeom prst="rect">
+            <a:avLst/>
+          </a:prstGeom>
+          <a:noFill/>
+          <a:effectLst/>
+        </p:spPr>
+        <p:txBody>
+          <a:bodyPr wrap="square" lIns="0" rIns="0" tIns="0" bIns="0" anchor="ctr">
+            <a:spAutoFit/>
+          </a:bodyPr>
+          <a:lstStyle/>
+          <a:p>
+            <a:pPr algn="r"/>
+            <a:r>
+              <a:rPr sz="800" b="0" i="0">
+                <a:solidFill>
+                  <a:srgbClr val="222222"/>
+                </a:solidFill>
+                <a:latin typeface="Arial"/>
+              </a:rPr>
+              <a:t>T-cell infiltration</a:t>
+            </a:r>
+          </a:p>
+        </p:txBody>
+      </p:sp>
+      <p:cxnSp>
+        <p:nvCxnSpPr>
+          <p:cNvPr id="81" name="Connector 80"/>
+          <p:cNvCxnSpPr/>
+          <p:nvPr/>
+        </p:nvCxnSpPr>
+        <p:spPr>
+          <a:xfrm>
+            <a:off x="3843771" y="1809597"/>
+            <a:ext cx="2212471" cy="0"/>
+          </a:xfrm>
+          <a:prstGeom prst="line">
+            <a:avLst/>
+          </a:prstGeom>
+          <a:ln w="17780">
+            <a:solidFill>
+              <a:srgbClr val="0A7D6E"/>
+            </a:solidFill>
+          </a:ln>
+          <a:effectLst/>
+        </p:spPr>
+        <p:style>
+          <a:lnRef idx="2">
+            <a:schemeClr val="accent1"/>
+          </a:lnRef>
+          <a:fillRef idx="0">
+            <a:schemeClr val="accent1"/>
+          </a:fillRef>
+          <a:effectRef idx="1">
+            <a:schemeClr val="accent1"/>
+          </a:effectRef>
+          <a:fontRef idx="minor">
+            <a:schemeClr val="tx1"/>
+          </a:fontRef>
+        </p:style>
+      </p:cxnSp>
+      <p:sp>
+        <p:nvSpPr>
+          <p:cNvPr id="82" name="Oval 81"/>
+          <p:cNvSpPr/>
+          <p:nvPr/>
+        </p:nvSpPr>
+        <p:spPr>
+          <a:xfrm>
+            <a:off x="4893669" y="1785597"/>
+            <a:ext cx="48000" cy="48000"/>
+          </a:xfrm>
+          <a:prstGeom prst="ellipse">
+            <a:avLst/>
+          </a:prstGeom>
+          <a:solidFill>
+            <a:srgbClr val="0A7D6E"/>
+          </a:solidFill>
+          <a:ln w="10160">
+            <a:solidFill>
+              <a:srgbClr val="FFFFFF"/>
+            </a:solidFill>
+          </a:ln>
+          <a:effectLst/>
+        </p:spPr>
+        <p:style>
+          <a:lnRef idx="1">
+            <a:schemeClr val="accent1"/>
+          </a:lnRef>
+          <a:fillRef idx="3">
+            <a:schemeClr val="accent1"/>
+          </a:fillRef>
+          <a:effectRef idx="2">
+            <a:schemeClr val="accent1"/>
+          </a:effectRef>
+          <a:fontRef idx="minor">
+            <a:schemeClr val="lt1"/>
+          </a:fontRef>
+        </p:style>
+        <p:txBody>
+          <a:bodyPr rtlCol="0" anchor="ctr"/>
+          <a:lstStyle/>
+          <a:p>
+            <a:pPr algn="ctr"/>
+          </a:p>
+        </p:txBody>
+      </p:sp>
+      <p:sp>
+        <p:nvSpPr>
+          <p:cNvPr id="83" name="TextBox 82"/>
+          <p:cNvSpPr txBox="1"/>
+          <p:nvPr/>
+        </p:nvSpPr>
+        <p:spPr>
+          <a:xfrm>
+            <a:off x="7086600" y="1727301"/>
+            <a:ext cx="457200" cy="164592"/>
+          </a:xfrm>
+          <a:prstGeom prst="rect">
+            <a:avLst/>
+          </a:prstGeom>
+          <a:noFill/>
+          <a:effectLst/>
+        </p:spPr>
+        <p:txBody>
+          <a:bodyPr wrap="square" lIns="0" rIns="0" tIns="0" bIns="0" anchor="ctr">
+            <a:spAutoFit/>
+          </a:bodyPr>
+          <a:lstStyle/>
+          <a:p>
+            <a:pPr algn="ctr"/>
+            <a:r>
+              <a:rPr sz="700" b="0" i="0">
+                <a:solidFill>
+                  <a:srgbClr val="222222"/>
+                </a:solidFill>
+                <a:latin typeface="Arial"/>
+              </a:rPr>
+              <a:t>+0.00</a:t>
+            </a:r>
+          </a:p>
+        </p:txBody>
+      </p:sp>
+      <p:sp>
+        <p:nvSpPr>
+          <p:cNvPr id="84" name="TextBox 83"/>
+          <p:cNvSpPr txBox="1"/>
+          <p:nvPr/>
+        </p:nvSpPr>
+        <p:spPr>
+          <a:xfrm>
+            <a:off x="7589520" y="1727301"/>
+            <a:ext cx="868680" cy="164592"/>
+          </a:xfrm>
+          <a:prstGeom prst="rect">
+            <a:avLst/>
+          </a:prstGeom>
+          <a:noFill/>
+          <a:effectLst/>
+        </p:spPr>
+        <p:txBody>
+          <a:bodyPr wrap="square" lIns="0" rIns="0" tIns="0" bIns="0" anchor="ctr">
+            <a:spAutoFit/>
+          </a:bodyPr>
+          <a:lstStyle/>
+          <a:p>
+            <a:pPr algn="ctr"/>
+            <a:r>
+              <a:rPr sz="700" b="0" i="0">
+                <a:solidFill>
+                  <a:srgbClr val="222222"/>
+                </a:solidFill>
+                <a:latin typeface="Arial"/>
+              </a:rPr>
+              <a:t>[-0.61, +0.66]</a:t>
+            </a:r>
+          </a:p>
+        </p:txBody>
+      </p:sp>
+      <p:sp>
+        <p:nvSpPr>
+          <p:cNvPr id="85" name="TextBox 84"/>
+          <p:cNvSpPr txBox="1"/>
+          <p:nvPr/>
+        </p:nvSpPr>
+        <p:spPr>
+          <a:xfrm>
+            <a:off x="8458200" y="1727301"/>
+            <a:ext cx="365760" cy="164592"/>
+          </a:xfrm>
+          <a:prstGeom prst="rect">
+            <a:avLst/>
+          </a:prstGeom>
+          <a:noFill/>
+          <a:effectLst/>
+        </p:spPr>
+        <p:txBody>
+          <a:bodyPr wrap="square" lIns="0" rIns="0" tIns="0" bIns="0" anchor="ctr">
+            <a:spAutoFit/>
+          </a:bodyPr>
+          <a:lstStyle/>
+          <a:p>
+            <a:pPr algn="ctr"/>
+            <a:r>
+              <a:rPr sz="700" b="0" i="0">
+                <a:solidFill>
+                  <a:srgbClr val="222222"/>
+                </a:solidFill>
+                <a:latin typeface="Arial"/>
+              </a:rPr>
+              <a:t>134</a:t>
+            </a:r>
+          </a:p>
+        </p:txBody>
+      </p:sp>
+      <p:sp>
+        <p:nvSpPr>
+          <p:cNvPr id="86" name="TextBox 85"/>
+          <p:cNvSpPr txBox="1"/>
+          <p:nvPr/>
+        </p:nvSpPr>
+        <p:spPr>
+          <a:xfrm>
+            <a:off x="8823959" y="1727301"/>
+            <a:ext cx="594360" cy="164592"/>
+          </a:xfrm>
+          <a:prstGeom prst="rect">
+            <a:avLst/>
+          </a:prstGeom>
+          <a:noFill/>
+          <a:effectLst/>
+        </p:spPr>
+        <p:txBody>
+          <a:bodyPr wrap="square" lIns="0" rIns="0" tIns="0" bIns="0" anchor="ctr">
+            <a:spAutoFit/>
+          </a:bodyPr>
+          <a:lstStyle/>
+          <a:p>
+            <a:pPr algn="ctr"/>
+            <a:r>
+              <a:rPr sz="700" b="0" i="0">
+                <a:solidFill>
+                  <a:srgbClr val="222222"/>
+                </a:solidFill>
+                <a:latin typeface="Arial"/>
+              </a:rPr>
+              <a:t>0.957</a:t>
+            </a:r>
+          </a:p>
+        </p:txBody>
+      </p:sp>
+      <p:sp>
+        <p:nvSpPr>
+          <p:cNvPr id="87" name="TextBox 86"/>
+          <p:cNvSpPr txBox="1"/>
+          <p:nvPr/>
+        </p:nvSpPr>
+        <p:spPr>
+          <a:xfrm>
+            <a:off x="9418320" y="1727301"/>
+            <a:ext cx="502920" cy="164592"/>
+          </a:xfrm>
+          <a:prstGeom prst="rect">
+            <a:avLst/>
+          </a:prstGeom>
+          <a:noFill/>
+          <a:effectLst/>
+        </p:spPr>
+        <p:txBody>
+          <a:bodyPr wrap="square" lIns="0" rIns="0" tIns="0" bIns="0" anchor="ctr">
+            <a:spAutoFit/>
+          </a:bodyPr>
+          <a:lstStyle/>
+          <a:p>
+            <a:pPr algn="ctr"/>
+            <a:r>
+              <a:rPr sz="700" b="0" i="0">
+                <a:solidFill>
+                  <a:srgbClr val="222222"/>
+                </a:solidFill>
+                <a:latin typeface="Arial"/>
+              </a:rPr>
+              <a:t>0.957</a:t>
+            </a:r>
+          </a:p>
+        </p:txBody>
+      </p:sp>
+      <p:sp>
+        <p:nvSpPr>
+          <p:cNvPr id="88" name="Rectangle 87"/>
+          <p:cNvSpPr/>
+          <p:nvPr/>
+        </p:nvSpPr>
+        <p:spPr>
+          <a:xfrm>
+            <a:off x="164592" y="2008936"/>
             <a:ext cx="109728" cy="109728"/>
           </a:xfrm>
           <a:prstGeom prst="rect">
@@ -5778,13 +6418,13 @@
       </p:sp>
       <p:sp>
         <p:nvSpPr>
-          <p:cNvPr id="72" name="TextBox 71"/>
-          <p:cNvSpPr txBox="1"/>
-          <p:nvPr/>
-        </p:nvSpPr>
-        <p:spPr>
-          <a:xfrm>
-            <a:off x="320040" y="1473098"/>
+          <p:cNvPr id="89" name="TextBox 88"/>
+          <p:cNvSpPr txBox="1"/>
+          <p:nvPr/>
+        </p:nvSpPr>
+        <p:spPr>
+          <a:xfrm>
+            <a:off x="320040" y="1981504"/>
             <a:ext cx="1005840" cy="164592"/>
           </a:xfrm>
           <a:prstGeom prst="rect">
@@ -5814,13 +6454,13 @@
       </p:sp>
       <p:sp>
         <p:nvSpPr>
-          <p:cNvPr id="73" name="TextBox 72"/>
-          <p:cNvSpPr txBox="1"/>
-          <p:nvPr/>
-        </p:nvSpPr>
-        <p:spPr>
-          <a:xfrm>
-            <a:off x="1353312" y="1473098"/>
+          <p:cNvPr id="90" name="TextBox 89"/>
+          <p:cNvSpPr txBox="1"/>
+          <p:nvPr/>
+        </p:nvSpPr>
+        <p:spPr>
+          <a:xfrm>
+            <a:off x="1353312" y="1981504"/>
             <a:ext cx="1508760" cy="164592"/>
           </a:xfrm>
           <a:prstGeom prst="rect">
@@ -5850,13 +6490,13 @@
       </p:sp>
       <p:cxnSp>
         <p:nvCxnSpPr>
-          <p:cNvPr id="74" name="Connector 73"/>
+          <p:cNvPr id="91" name="Connector 90"/>
           <p:cNvCxnSpPr/>
           <p:nvPr/>
         </p:nvCxnSpPr>
         <p:spPr>
           <a:xfrm>
-            <a:off x="3065053" y="1555394"/>
+            <a:off x="3065053" y="2063800"/>
             <a:ext cx="1953042" cy="0"/>
           </a:xfrm>
           <a:prstGeom prst="line">
@@ -5886,13 +6526,13 @@
       </p:cxnSp>
       <p:sp>
         <p:nvSpPr>
-          <p:cNvPr id="75" name="Oval 74"/>
+          <p:cNvPr id="92" name="Oval 91"/>
           <p:cNvSpPr/>
           <p:nvPr/>
         </p:nvSpPr>
         <p:spPr>
           <a:xfrm>
-            <a:off x="3946411" y="1531394"/>
+            <a:off x="3946411" y="2039800"/>
             <a:ext cx="48000" cy="48000"/>
           </a:xfrm>
           <a:prstGeom prst="ellipse">
@@ -5932,13 +6572,13 @@
       </p:sp>
       <p:sp>
         <p:nvSpPr>
-          <p:cNvPr id="76" name="TextBox 75"/>
-          <p:cNvSpPr txBox="1"/>
-          <p:nvPr/>
-        </p:nvSpPr>
-        <p:spPr>
-          <a:xfrm>
-            <a:off x="7086600" y="1473098"/>
+          <p:cNvPr id="93" name="TextBox 92"/>
+          <p:cNvSpPr txBox="1"/>
+          <p:nvPr/>
+        </p:nvSpPr>
+        <p:spPr>
+          <a:xfrm>
+            <a:off x="7086600" y="1981504"/>
             <a:ext cx="457200" cy="164592"/>
           </a:xfrm>
           <a:prstGeom prst="rect">
@@ -5968,13 +6608,13 @@
       </p:sp>
       <p:sp>
         <p:nvSpPr>
-          <p:cNvPr id="77" name="TextBox 76"/>
-          <p:cNvSpPr txBox="1"/>
-          <p:nvPr/>
-        </p:nvSpPr>
-        <p:spPr>
-          <a:xfrm>
-            <a:off x="7589520" y="1473098"/>
+          <p:cNvPr id="94" name="TextBox 93"/>
+          <p:cNvSpPr txBox="1"/>
+          <p:nvPr/>
+        </p:nvSpPr>
+        <p:spPr>
+          <a:xfrm>
+            <a:off x="7589520" y="1981504"/>
             <a:ext cx="868680" cy="164592"/>
           </a:xfrm>
           <a:prstGeom prst="rect">
@@ -6004,13 +6644,13 @@
       </p:sp>
       <p:sp>
         <p:nvSpPr>
-          <p:cNvPr id="78" name="TextBox 77"/>
-          <p:cNvSpPr txBox="1"/>
-          <p:nvPr/>
-        </p:nvSpPr>
-        <p:spPr>
-          <a:xfrm>
-            <a:off x="8458200" y="1473098"/>
+          <p:cNvPr id="95" name="TextBox 94"/>
+          <p:cNvSpPr txBox="1"/>
+          <p:nvPr/>
+        </p:nvSpPr>
+        <p:spPr>
+          <a:xfrm>
+            <a:off x="8458200" y="1981504"/>
             <a:ext cx="365760" cy="164592"/>
           </a:xfrm>
           <a:prstGeom prst="rect">
@@ -6040,13 +6680,13 @@
       </p:sp>
       <p:sp>
         <p:nvSpPr>
-          <p:cNvPr id="79" name="TextBox 78"/>
-          <p:cNvSpPr txBox="1"/>
-          <p:nvPr/>
-        </p:nvSpPr>
-        <p:spPr>
-          <a:xfrm>
-            <a:off x="8823959" y="1473098"/>
+          <p:cNvPr id="96" name="TextBox 95"/>
+          <p:cNvSpPr txBox="1"/>
+          <p:nvPr/>
+        </p:nvSpPr>
+        <p:spPr>
+          <a:xfrm>
+            <a:off x="8823959" y="1981504"/>
             <a:ext cx="594360" cy="164592"/>
           </a:xfrm>
           <a:prstGeom prst="rect">
@@ -6076,13 +6716,13 @@
       </p:sp>
       <p:sp>
         <p:nvSpPr>
-          <p:cNvPr id="80" name="TextBox 79"/>
-          <p:cNvSpPr txBox="1"/>
-          <p:nvPr/>
-        </p:nvSpPr>
-        <p:spPr>
-          <a:xfrm>
-            <a:off x="9418320" y="1473098"/>
+          <p:cNvPr id="97" name="TextBox 96"/>
+          <p:cNvSpPr txBox="1"/>
+          <p:nvPr/>
+        </p:nvSpPr>
+        <p:spPr>
+          <a:xfrm>
+            <a:off x="9418320" y="1981504"/>
             <a:ext cx="502920" cy="164592"/>
           </a:xfrm>
           <a:prstGeom prst="rect">
@@ -6112,13 +6752,13 @@
       </p:sp>
       <p:sp>
         <p:nvSpPr>
-          <p:cNvPr id="81" name="Rectangle 80"/>
+          <p:cNvPr id="98" name="Rectangle 97"/>
           <p:cNvSpPr/>
           <p:nvPr/>
         </p:nvSpPr>
         <p:spPr>
           <a:xfrm>
-            <a:off x="164592" y="1754733"/>
+            <a:off x="164592" y="2263140"/>
             <a:ext cx="109728" cy="109728"/>
           </a:xfrm>
           <a:prstGeom prst="rect">
@@ -6156,13 +6796,13 @@
       </p:sp>
       <p:sp>
         <p:nvSpPr>
-          <p:cNvPr id="82" name="TextBox 81"/>
-          <p:cNvSpPr txBox="1"/>
-          <p:nvPr/>
-        </p:nvSpPr>
-        <p:spPr>
-          <a:xfrm>
-            <a:off x="1353312" y="1727301"/>
+          <p:cNvPr id="99" name="TextBox 98"/>
+          <p:cNvSpPr txBox="1"/>
+          <p:nvPr/>
+        </p:nvSpPr>
+        <p:spPr>
+          <a:xfrm>
+            <a:off x="1353312" y="2235708"/>
             <a:ext cx="1508760" cy="164592"/>
           </a:xfrm>
           <a:prstGeom prst="rect">
@@ -6192,13 +6832,13 @@
       </p:sp>
       <p:cxnSp>
         <p:nvCxnSpPr>
-          <p:cNvPr id="83" name="Connector 82"/>
+          <p:cNvPr id="100" name="Connector 99"/>
           <p:cNvCxnSpPr/>
           <p:nvPr/>
         </p:nvCxnSpPr>
         <p:spPr>
           <a:xfrm>
-            <a:off x="4155506" y="1809597"/>
+            <a:off x="4155506" y="2318004"/>
             <a:ext cx="1747952" cy="0"/>
           </a:xfrm>
           <a:prstGeom prst="line">
@@ -6228,13 +6868,13 @@
       </p:cxnSp>
       <p:sp>
         <p:nvSpPr>
-          <p:cNvPr id="84" name="Oval 83"/>
+          <p:cNvPr id="101" name="Oval 100"/>
           <p:cNvSpPr/>
           <p:nvPr/>
         </p:nvSpPr>
         <p:spPr>
           <a:xfrm>
-            <a:off x="4936421" y="1785597"/>
+            <a:off x="4936421" y="2294004"/>
             <a:ext cx="48000" cy="48000"/>
           </a:xfrm>
           <a:prstGeom prst="ellipse">
@@ -6274,13 +6914,13 @@
       </p:sp>
       <p:sp>
         <p:nvSpPr>
-          <p:cNvPr id="85" name="TextBox 84"/>
-          <p:cNvSpPr txBox="1"/>
-          <p:nvPr/>
-        </p:nvSpPr>
-        <p:spPr>
-          <a:xfrm>
-            <a:off x="7086600" y="1727301"/>
+          <p:cNvPr id="102" name="TextBox 101"/>
+          <p:cNvSpPr txBox="1"/>
+          <p:nvPr/>
+        </p:nvSpPr>
+        <p:spPr>
+          <a:xfrm>
+            <a:off x="7086600" y="2235708"/>
             <a:ext cx="457200" cy="164592"/>
           </a:xfrm>
           <a:prstGeom prst="rect">
@@ -6310,13 +6950,13 @@
       </p:sp>
       <p:sp>
         <p:nvSpPr>
-          <p:cNvPr id="86" name="TextBox 85"/>
-          <p:cNvSpPr txBox="1"/>
-          <p:nvPr/>
-        </p:nvSpPr>
-        <p:spPr>
-          <a:xfrm>
-            <a:off x="7589520" y="1727301"/>
+          <p:cNvPr id="103" name="TextBox 102"/>
+          <p:cNvSpPr txBox="1"/>
+          <p:nvPr/>
+        </p:nvSpPr>
+        <p:spPr>
+          <a:xfrm>
+            <a:off x="7589520" y="2235708"/>
             <a:ext cx="868680" cy="164592"/>
           </a:xfrm>
           <a:prstGeom prst="rect">
@@ -6346,13 +6986,13 @@
       </p:sp>
       <p:sp>
         <p:nvSpPr>
-          <p:cNvPr id="87" name="TextBox 86"/>
-          <p:cNvSpPr txBox="1"/>
-          <p:nvPr/>
-        </p:nvSpPr>
-        <p:spPr>
-          <a:xfrm>
-            <a:off x="8458200" y="1727301"/>
+          <p:cNvPr id="104" name="TextBox 103"/>
+          <p:cNvSpPr txBox="1"/>
+          <p:nvPr/>
+        </p:nvSpPr>
+        <p:spPr>
+          <a:xfrm>
+            <a:off x="8458200" y="2235708"/>
             <a:ext cx="365760" cy="164592"/>
           </a:xfrm>
           <a:prstGeom prst="rect">
@@ -6382,13 +7022,13 @@
       </p:sp>
       <p:sp>
         <p:nvSpPr>
-          <p:cNvPr id="88" name="TextBox 87"/>
-          <p:cNvSpPr txBox="1"/>
-          <p:nvPr/>
-        </p:nvSpPr>
-        <p:spPr>
-          <a:xfrm>
-            <a:off x="8823959" y="1727301"/>
+          <p:cNvPr id="105" name="TextBox 104"/>
+          <p:cNvSpPr txBox="1"/>
+          <p:nvPr/>
+        </p:nvSpPr>
+        <p:spPr>
+          <a:xfrm>
+            <a:off x="8823959" y="2235708"/>
             <a:ext cx="594360" cy="164592"/>
           </a:xfrm>
           <a:prstGeom prst="rect">
@@ -6418,13 +7058,13 @@
       </p:sp>
       <p:sp>
         <p:nvSpPr>
-          <p:cNvPr id="89" name="TextBox 88"/>
-          <p:cNvSpPr txBox="1"/>
-          <p:nvPr/>
-        </p:nvSpPr>
-        <p:spPr>
-          <a:xfrm>
-            <a:off x="9418320" y="1727301"/>
+          <p:cNvPr id="106" name="TextBox 105"/>
+          <p:cNvSpPr txBox="1"/>
+          <p:nvPr/>
+        </p:nvSpPr>
+        <p:spPr>
+          <a:xfrm>
+            <a:off x="9418320" y="2235708"/>
             <a:ext cx="502920" cy="164592"/>
           </a:xfrm>
           <a:prstGeom prst="rect">
@@ -6454,13 +7094,13 @@
       </p:sp>
       <p:sp>
         <p:nvSpPr>
-          <p:cNvPr id="90" name="Rectangle 89"/>
+          <p:cNvPr id="107" name="Rectangle 106"/>
           <p:cNvSpPr/>
           <p:nvPr/>
         </p:nvSpPr>
         <p:spPr>
           <a:xfrm>
-            <a:off x="164592" y="2008936"/>
+            <a:off x="164592" y="2517343"/>
             <a:ext cx="109728" cy="109728"/>
           </a:xfrm>
           <a:prstGeom prst="rect">
@@ -6498,13 +7138,13 @@
       </p:sp>
       <p:sp>
         <p:nvSpPr>
-          <p:cNvPr id="91" name="TextBox 90"/>
-          <p:cNvSpPr txBox="1"/>
-          <p:nvPr/>
-        </p:nvSpPr>
-        <p:spPr>
-          <a:xfrm>
-            <a:off x="1353312" y="1981504"/>
+          <p:cNvPr id="108" name="TextBox 107"/>
+          <p:cNvSpPr txBox="1"/>
+          <p:nvPr/>
+        </p:nvSpPr>
+        <p:spPr>
+          <a:xfrm>
+            <a:off x="1353312" y="2489911"/>
             <a:ext cx="1508760" cy="164592"/>
           </a:xfrm>
           <a:prstGeom prst="rect">
@@ -6534,13 +7174,13 @@
       </p:sp>
       <p:cxnSp>
         <p:nvCxnSpPr>
-          <p:cNvPr id="92" name="Connector 91"/>
+          <p:cNvPr id="109" name="Connector 108"/>
           <p:cNvCxnSpPr/>
           <p:nvPr/>
         </p:nvCxnSpPr>
         <p:spPr>
           <a:xfrm>
-            <a:off x="4339089" y="2063800"/>
+            <a:off x="4339089" y="2572207"/>
             <a:ext cx="1357229" cy="0"/>
           </a:xfrm>
           <a:prstGeom prst="line">
@@ -6570,13 +7210,13 @@
       </p:cxnSp>
       <p:sp>
         <p:nvSpPr>
-          <p:cNvPr id="93" name="Oval 92"/>
+          <p:cNvPr id="110" name="Oval 109"/>
           <p:cNvSpPr/>
           <p:nvPr/>
         </p:nvSpPr>
         <p:spPr>
           <a:xfrm>
-            <a:off x="4967725" y="2039800"/>
+            <a:off x="4967725" y="2548207"/>
             <a:ext cx="48000" cy="48000"/>
           </a:xfrm>
           <a:prstGeom prst="ellipse">
@@ -6616,13 +7256,13 @@
       </p:sp>
       <p:sp>
         <p:nvSpPr>
-          <p:cNvPr id="94" name="TextBox 93"/>
-          <p:cNvSpPr txBox="1"/>
-          <p:nvPr/>
-        </p:nvSpPr>
-        <p:spPr>
-          <a:xfrm>
-            <a:off x="7086600" y="1981504"/>
+          <p:cNvPr id="111" name="TextBox 110"/>
+          <p:cNvSpPr txBox="1"/>
+          <p:nvPr/>
+        </p:nvSpPr>
+        <p:spPr>
+          <a:xfrm>
+            <a:off x="7086600" y="2489911"/>
             <a:ext cx="457200" cy="164592"/>
           </a:xfrm>
           <a:prstGeom prst="rect">
@@ -6652,13 +7292,13 @@
       </p:sp>
       <p:sp>
         <p:nvSpPr>
-          <p:cNvPr id="95" name="TextBox 94"/>
-          <p:cNvSpPr txBox="1"/>
-          <p:nvPr/>
-        </p:nvSpPr>
-        <p:spPr>
-          <a:xfrm>
-            <a:off x="7589520" y="1981504"/>
+          <p:cNvPr id="112" name="TextBox 111"/>
+          <p:cNvSpPr txBox="1"/>
+          <p:nvPr/>
+        </p:nvSpPr>
+        <p:spPr>
+          <a:xfrm>
+            <a:off x="7589520" y="2489911"/>
             <a:ext cx="868680" cy="164592"/>
           </a:xfrm>
           <a:prstGeom prst="rect">
@@ -6688,13 +7328,13 @@
       </p:sp>
       <p:sp>
         <p:nvSpPr>
-          <p:cNvPr id="96" name="TextBox 95"/>
-          <p:cNvSpPr txBox="1"/>
-          <p:nvPr/>
-        </p:nvSpPr>
-        <p:spPr>
-          <a:xfrm>
-            <a:off x="8458200" y="1981504"/>
+          <p:cNvPr id="113" name="TextBox 112"/>
+          <p:cNvSpPr txBox="1"/>
+          <p:nvPr/>
+        </p:nvSpPr>
+        <p:spPr>
+          <a:xfrm>
+            <a:off x="8458200" y="2489911"/>
             <a:ext cx="365760" cy="164592"/>
           </a:xfrm>
           <a:prstGeom prst="rect">
@@ -6724,13 +7364,13 @@
       </p:sp>
       <p:sp>
         <p:nvSpPr>
-          <p:cNvPr id="97" name="TextBox 96"/>
-          <p:cNvSpPr txBox="1"/>
-          <p:nvPr/>
-        </p:nvSpPr>
-        <p:spPr>
-          <a:xfrm>
-            <a:off x="8823959" y="1981504"/>
+          <p:cNvPr id="114" name="TextBox 113"/>
+          <p:cNvSpPr txBox="1"/>
+          <p:nvPr/>
+        </p:nvSpPr>
+        <p:spPr>
+          <a:xfrm>
+            <a:off x="8823959" y="2489911"/>
             <a:ext cx="594360" cy="164592"/>
           </a:xfrm>
           <a:prstGeom prst="rect">
@@ -6760,13 +7400,13 @@
       </p:sp>
       <p:sp>
         <p:nvSpPr>
-          <p:cNvPr id="98" name="TextBox 97"/>
-          <p:cNvSpPr txBox="1"/>
-          <p:nvPr/>
-        </p:nvSpPr>
-        <p:spPr>
-          <a:xfrm>
-            <a:off x="9418320" y="1981504"/>
+          <p:cNvPr id="115" name="TextBox 114"/>
+          <p:cNvSpPr txBox="1"/>
+          <p:nvPr/>
+        </p:nvSpPr>
+        <p:spPr>
+          <a:xfrm>
+            <a:off x="9418320" y="2489911"/>
             <a:ext cx="502920" cy="164592"/>
           </a:xfrm>
           <a:prstGeom prst="rect">
@@ -6796,13 +7436,13 @@
       </p:sp>
       <p:sp>
         <p:nvSpPr>
-          <p:cNvPr id="99" name="Rectangle 98"/>
+          <p:cNvPr id="116" name="Rectangle 115"/>
           <p:cNvSpPr/>
           <p:nvPr/>
         </p:nvSpPr>
         <p:spPr>
           <a:xfrm>
-            <a:off x="164592" y="2263140"/>
+            <a:off x="164592" y="2771546"/>
             <a:ext cx="109728" cy="109728"/>
           </a:xfrm>
           <a:prstGeom prst="rect">
@@ -6840,13 +7480,13 @@
       </p:sp>
       <p:sp>
         <p:nvSpPr>
-          <p:cNvPr id="100" name="TextBox 99"/>
-          <p:cNvSpPr txBox="1"/>
-          <p:nvPr/>
-        </p:nvSpPr>
-        <p:spPr>
-          <a:xfrm>
-            <a:off x="320040" y="2235708"/>
+          <p:cNvPr id="117" name="TextBox 116"/>
+          <p:cNvSpPr txBox="1"/>
+          <p:nvPr/>
+        </p:nvSpPr>
+        <p:spPr>
+          <a:xfrm>
+            <a:off x="320040" y="2744114"/>
             <a:ext cx="1005840" cy="164592"/>
           </a:xfrm>
           <a:prstGeom prst="rect">
@@ -6876,13 +7516,13 @@
       </p:sp>
       <p:sp>
         <p:nvSpPr>
-          <p:cNvPr id="101" name="TextBox 100"/>
-          <p:cNvSpPr txBox="1"/>
-          <p:nvPr/>
-        </p:nvSpPr>
-        <p:spPr>
-          <a:xfrm>
-            <a:off x="1353312" y="2235708"/>
+          <p:cNvPr id="118" name="TextBox 117"/>
+          <p:cNvSpPr txBox="1"/>
+          <p:nvPr/>
+        </p:nvSpPr>
+        <p:spPr>
+          <a:xfrm>
+            <a:off x="1353312" y="2744114"/>
             <a:ext cx="1508760" cy="164592"/>
           </a:xfrm>
           <a:prstGeom prst="rect">
@@ -6912,13 +7552,13 @@
       </p:sp>
       <p:cxnSp>
         <p:nvCxnSpPr>
-          <p:cNvPr id="102" name="Connector 101"/>
+          <p:cNvPr id="119" name="Connector 118"/>
           <p:cNvCxnSpPr/>
           <p:nvPr/>
         </p:nvCxnSpPr>
         <p:spPr>
           <a:xfrm>
-            <a:off x="3933965" y="2318004"/>
+            <a:off x="3933965" y="2826410"/>
             <a:ext cx="1826125" cy="0"/>
           </a:xfrm>
           <a:prstGeom prst="line">
@@ -6948,13 +7588,13 @@
       </p:cxnSp>
       <p:sp>
         <p:nvSpPr>
-          <p:cNvPr id="103" name="Oval 102"/>
+          <p:cNvPr id="120" name="Oval 119"/>
           <p:cNvSpPr/>
           <p:nvPr/>
         </p:nvSpPr>
         <p:spPr>
           <a:xfrm>
-            <a:off x="4758049" y="2294004"/>
+            <a:off x="4758049" y="2802410"/>
             <a:ext cx="48000" cy="48000"/>
           </a:xfrm>
           <a:prstGeom prst="ellipse">
@@ -6994,13 +7634,13 @@
       </p:sp>
       <p:sp>
         <p:nvSpPr>
-          <p:cNvPr id="104" name="TextBox 103"/>
-          <p:cNvSpPr txBox="1"/>
-          <p:nvPr/>
-        </p:nvSpPr>
-        <p:spPr>
-          <a:xfrm>
-            <a:off x="7086600" y="2235708"/>
+          <p:cNvPr id="121" name="TextBox 120"/>
+          <p:cNvSpPr txBox="1"/>
+          <p:nvPr/>
+        </p:nvSpPr>
+        <p:spPr>
+          <a:xfrm>
+            <a:off x="7086600" y="2744114"/>
             <a:ext cx="457200" cy="164592"/>
           </a:xfrm>
           <a:prstGeom prst="rect">
@@ -7030,13 +7670,13 @@
       </p:sp>
       <p:sp>
         <p:nvSpPr>
-          <p:cNvPr id="105" name="TextBox 104"/>
-          <p:cNvSpPr txBox="1"/>
-          <p:nvPr/>
-        </p:nvSpPr>
-        <p:spPr>
-          <a:xfrm>
-            <a:off x="7589520" y="2235708"/>
+          <p:cNvPr id="122" name="TextBox 121"/>
+          <p:cNvSpPr txBox="1"/>
+          <p:nvPr/>
+        </p:nvSpPr>
+        <p:spPr>
+          <a:xfrm>
+            <a:off x="7589520" y="2744114"/>
             <a:ext cx="868680" cy="164592"/>
           </a:xfrm>
           <a:prstGeom prst="rect">
@@ -7066,13 +7706,13 @@
       </p:sp>
       <p:sp>
         <p:nvSpPr>
-          <p:cNvPr id="106" name="TextBox 105"/>
-          <p:cNvSpPr txBox="1"/>
-          <p:nvPr/>
-        </p:nvSpPr>
-        <p:spPr>
-          <a:xfrm>
-            <a:off x="8458200" y="2235708"/>
+          <p:cNvPr id="123" name="TextBox 122"/>
+          <p:cNvSpPr txBox="1"/>
+          <p:nvPr/>
+        </p:nvSpPr>
+        <p:spPr>
+          <a:xfrm>
+            <a:off x="8458200" y="2744114"/>
             <a:ext cx="365760" cy="164592"/>
           </a:xfrm>
           <a:prstGeom prst="rect">
@@ -7102,13 +7742,13 @@
       </p:sp>
       <p:sp>
         <p:nvSpPr>
-          <p:cNvPr id="107" name="TextBox 106"/>
-          <p:cNvSpPr txBox="1"/>
-          <p:nvPr/>
-        </p:nvSpPr>
-        <p:spPr>
-          <a:xfrm>
-            <a:off x="8823959" y="2235708"/>
+          <p:cNvPr id="124" name="TextBox 123"/>
+          <p:cNvSpPr txBox="1"/>
+          <p:nvPr/>
+        </p:nvSpPr>
+        <p:spPr>
+          <a:xfrm>
+            <a:off x="8823959" y="2744114"/>
             <a:ext cx="594360" cy="164592"/>
           </a:xfrm>
           <a:prstGeom prst="rect">
@@ -7138,13 +7778,13 @@
       </p:sp>
       <p:sp>
         <p:nvSpPr>
-          <p:cNvPr id="108" name="TextBox 107"/>
-          <p:cNvSpPr txBox="1"/>
-          <p:nvPr/>
-        </p:nvSpPr>
-        <p:spPr>
-          <a:xfrm>
-            <a:off x="9418320" y="2235708"/>
+          <p:cNvPr id="125" name="TextBox 124"/>
+          <p:cNvSpPr txBox="1"/>
+          <p:nvPr/>
+        </p:nvSpPr>
+        <p:spPr>
+          <a:xfrm>
+            <a:off x="9418320" y="2744114"/>
             <a:ext cx="502920" cy="164592"/>
           </a:xfrm>
           <a:prstGeom prst="rect">
@@ -7174,13 +7814,13 @@
       </p:sp>
       <p:sp>
         <p:nvSpPr>
-          <p:cNvPr id="109" name="Rectangle 108"/>
+          <p:cNvPr id="126" name="Rectangle 125"/>
           <p:cNvSpPr/>
           <p:nvPr/>
         </p:nvSpPr>
         <p:spPr>
           <a:xfrm>
-            <a:off x="164592" y="2517343"/>
+            <a:off x="164592" y="3025749"/>
             <a:ext cx="109728" cy="109728"/>
           </a:xfrm>
           <a:prstGeom prst="rect">
@@ -7218,13 +7858,13 @@
       </p:sp>
       <p:sp>
         <p:nvSpPr>
-          <p:cNvPr id="110" name="TextBox 109"/>
-          <p:cNvSpPr txBox="1"/>
-          <p:nvPr/>
-        </p:nvSpPr>
-        <p:spPr>
-          <a:xfrm>
-            <a:off x="320040" y="2489911"/>
+          <p:cNvPr id="127" name="TextBox 126"/>
+          <p:cNvSpPr txBox="1"/>
+          <p:nvPr/>
+        </p:nvSpPr>
+        <p:spPr>
+          <a:xfrm>
+            <a:off x="320040" y="2998317"/>
             <a:ext cx="1005840" cy="164592"/>
           </a:xfrm>
           <a:prstGeom prst="rect">
@@ -7254,13 +7894,13 @@
       </p:sp>
       <p:sp>
         <p:nvSpPr>
-          <p:cNvPr id="111" name="TextBox 110"/>
-          <p:cNvSpPr txBox="1"/>
-          <p:nvPr/>
-        </p:nvSpPr>
-        <p:spPr>
-          <a:xfrm>
-            <a:off x="1353312" y="2489911"/>
+          <p:cNvPr id="128" name="TextBox 127"/>
+          <p:cNvSpPr txBox="1"/>
+          <p:nvPr/>
+        </p:nvSpPr>
+        <p:spPr>
+          <a:xfrm>
+            <a:off x="1353312" y="2998317"/>
             <a:ext cx="1508760" cy="164592"/>
           </a:xfrm>
           <a:prstGeom prst="rect">
@@ -7290,13 +7930,13 @@
       </p:sp>
       <p:cxnSp>
         <p:nvCxnSpPr>
-          <p:cNvPr id="112" name="Connector 111"/>
+          <p:cNvPr id="129" name="Connector 128"/>
           <p:cNvCxnSpPr/>
           <p:nvPr/>
         </p:nvCxnSpPr>
         <p:spPr>
           <a:xfrm>
-            <a:off x="4465815" y="2572207"/>
+            <a:off x="4465815" y="3080613"/>
             <a:ext cx="1596802" cy="0"/>
           </a:xfrm>
           <a:prstGeom prst="line">
@@ -7326,13 +7966,13 @@
       </p:cxnSp>
       <p:sp>
         <p:nvSpPr>
-          <p:cNvPr id="113" name="Oval 112"/>
+          <p:cNvPr id="130" name="Oval 129"/>
           <p:cNvSpPr/>
           <p:nvPr/>
         </p:nvSpPr>
         <p:spPr>
           <a:xfrm>
-            <a:off x="5252654" y="2548207"/>
+            <a:off x="5252654" y="3056613"/>
             <a:ext cx="48000" cy="48000"/>
           </a:xfrm>
           <a:prstGeom prst="ellipse">
@@ -7372,13 +8012,13 @@
       </p:sp>
       <p:sp>
         <p:nvSpPr>
-          <p:cNvPr id="114" name="TextBox 113"/>
-          <p:cNvSpPr txBox="1"/>
-          <p:nvPr/>
-        </p:nvSpPr>
-        <p:spPr>
-          <a:xfrm>
-            <a:off x="7086600" y="2489911"/>
+          <p:cNvPr id="131" name="TextBox 130"/>
+          <p:cNvSpPr txBox="1"/>
+          <p:nvPr/>
+        </p:nvSpPr>
+        <p:spPr>
+          <a:xfrm>
+            <a:off x="7086600" y="2998317"/>
             <a:ext cx="457200" cy="164592"/>
           </a:xfrm>
           <a:prstGeom prst="rect">
@@ -7408,13 +8048,13 @@
       </p:sp>
       <p:sp>
         <p:nvSpPr>
-          <p:cNvPr id="115" name="TextBox 114"/>
-          <p:cNvSpPr txBox="1"/>
-          <p:nvPr/>
-        </p:nvSpPr>
-        <p:spPr>
-          <a:xfrm>
-            <a:off x="7589520" y="2489911"/>
+          <p:cNvPr id="132" name="TextBox 131"/>
+          <p:cNvSpPr txBox="1"/>
+          <p:nvPr/>
+        </p:nvSpPr>
+        <p:spPr>
+          <a:xfrm>
+            <a:off x="7589520" y="2998317"/>
             <a:ext cx="868680" cy="164592"/>
           </a:xfrm>
           <a:prstGeom prst="rect">
@@ -7444,13 +8084,13 @@
       </p:sp>
       <p:sp>
         <p:nvSpPr>
-          <p:cNvPr id="116" name="TextBox 115"/>
-          <p:cNvSpPr txBox="1"/>
-          <p:nvPr/>
-        </p:nvSpPr>
-        <p:spPr>
-          <a:xfrm>
-            <a:off x="8458200" y="2489911"/>
+          <p:cNvPr id="133" name="TextBox 132"/>
+          <p:cNvSpPr txBox="1"/>
+          <p:nvPr/>
+        </p:nvSpPr>
+        <p:spPr>
+          <a:xfrm>
+            <a:off x="8458200" y="2998317"/>
             <a:ext cx="365760" cy="164592"/>
           </a:xfrm>
           <a:prstGeom prst="rect">
@@ -7480,13 +8120,13 @@
       </p:sp>
       <p:sp>
         <p:nvSpPr>
-          <p:cNvPr id="117" name="TextBox 116"/>
-          <p:cNvSpPr txBox="1"/>
-          <p:nvPr/>
-        </p:nvSpPr>
-        <p:spPr>
-          <a:xfrm>
-            <a:off x="8823959" y="2489911"/>
+          <p:cNvPr id="134" name="TextBox 133"/>
+          <p:cNvSpPr txBox="1"/>
+          <p:nvPr/>
+        </p:nvSpPr>
+        <p:spPr>
+          <a:xfrm>
+            <a:off x="8823959" y="2998317"/>
             <a:ext cx="594360" cy="164592"/>
           </a:xfrm>
           <a:prstGeom prst="rect">
@@ -7516,13 +8156,13 @@
       </p:sp>
       <p:sp>
         <p:nvSpPr>
-          <p:cNvPr id="118" name="TextBox 117"/>
-          <p:cNvSpPr txBox="1"/>
-          <p:nvPr/>
-        </p:nvSpPr>
-        <p:spPr>
-          <a:xfrm>
-            <a:off x="9418320" y="2489911"/>
+          <p:cNvPr id="135" name="TextBox 134"/>
+          <p:cNvSpPr txBox="1"/>
+          <p:nvPr/>
+        </p:nvSpPr>
+        <p:spPr>
+          <a:xfrm>
+            <a:off x="9418320" y="2998317"/>
             <a:ext cx="502920" cy="164592"/>
           </a:xfrm>
           <a:prstGeom prst="rect">
@@ -7552,13 +8192,13 @@
       </p:sp>
       <p:sp>
         <p:nvSpPr>
-          <p:cNvPr id="119" name="Rectangle 118"/>
+          <p:cNvPr id="136" name="Rectangle 135"/>
           <p:cNvSpPr/>
           <p:nvPr/>
         </p:nvSpPr>
         <p:spPr>
           <a:xfrm>
-            <a:off x="164592" y="2771546"/>
+            <a:off x="164592" y="3279952"/>
             <a:ext cx="109728" cy="109728"/>
           </a:xfrm>
           <a:prstGeom prst="rect">
@@ -7596,13 +8236,13 @@
       </p:sp>
       <p:sp>
         <p:nvSpPr>
-          <p:cNvPr id="120" name="TextBox 119"/>
-          <p:cNvSpPr txBox="1"/>
-          <p:nvPr/>
-        </p:nvSpPr>
-        <p:spPr>
-          <a:xfrm>
-            <a:off x="1353312" y="2744114"/>
+          <p:cNvPr id="137" name="TextBox 136"/>
+          <p:cNvSpPr txBox="1"/>
+          <p:nvPr/>
+        </p:nvSpPr>
+        <p:spPr>
+          <a:xfrm>
+            <a:off x="1353312" y="3252520"/>
             <a:ext cx="1508760" cy="164592"/>
           </a:xfrm>
           <a:prstGeom prst="rect">
@@ -7625,28 +8265,28 @@
                 </a:solidFill>
                 <a:latin typeface="Arial"/>
               </a:rPr>
-              <a:t>TLS (Cabrita)</a:t>
+              <a:t>B-cell infiltration</a:t>
             </a:r>
           </a:p>
         </p:txBody>
       </p:sp>
       <p:cxnSp>
         <p:nvCxnSpPr>
-          <p:cNvPr id="121" name="Connector 120"/>
+          <p:cNvPr id="138" name="Connector 137"/>
           <p:cNvCxnSpPr/>
           <p:nvPr/>
         </p:nvCxnSpPr>
         <p:spPr>
           <a:xfrm>
-            <a:off x="4063314" y="2826410"/>
-            <a:ext cx="1503360" cy="0"/>
+            <a:off x="4093107" y="3334816"/>
+            <a:ext cx="2282269" cy="0"/>
           </a:xfrm>
           <a:prstGeom prst="line">
             <a:avLst/>
           </a:prstGeom>
           <a:ln w="17780">
             <a:solidFill>
-              <a:srgbClr val="C53E1F"/>
+              <a:srgbClr val="0A7D6E"/>
             </a:solidFill>
           </a:ln>
           <a:effectLst/>
@@ -7668,13 +8308,355 @@
       </p:cxnSp>
       <p:sp>
         <p:nvSpPr>
-          <p:cNvPr id="122" name="Oval 121"/>
+          <p:cNvPr id="139" name="Oval 138"/>
           <p:cNvSpPr/>
           <p:nvPr/>
         </p:nvSpPr>
         <p:spPr>
           <a:xfrm>
-            <a:off x="4804032" y="2802410"/>
+            <a:off x="5204257" y="3310816"/>
+            <a:ext cx="48000" cy="48000"/>
+          </a:xfrm>
+          <a:prstGeom prst="ellipse">
+            <a:avLst/>
+          </a:prstGeom>
+          <a:solidFill>
+            <a:srgbClr val="0A7D6E"/>
+          </a:solidFill>
+          <a:ln w="10160">
+            <a:solidFill>
+              <a:srgbClr val="FFFFFF"/>
+            </a:solidFill>
+          </a:ln>
+          <a:effectLst/>
+        </p:spPr>
+        <p:style>
+          <a:lnRef idx="1">
+            <a:schemeClr val="accent1"/>
+          </a:lnRef>
+          <a:fillRef idx="3">
+            <a:schemeClr val="accent1"/>
+          </a:fillRef>
+          <a:effectRef idx="2">
+            <a:schemeClr val="accent1"/>
+          </a:effectRef>
+          <a:fontRef idx="minor">
+            <a:schemeClr val="lt1"/>
+          </a:fontRef>
+        </p:style>
+        <p:txBody>
+          <a:bodyPr rtlCol="0" anchor="ctr"/>
+          <a:lstStyle/>
+          <a:p>
+            <a:pPr algn="ctr"/>
+          </a:p>
+        </p:txBody>
+      </p:sp>
+      <p:sp>
+        <p:nvSpPr>
+          <p:cNvPr id="140" name="TextBox 139"/>
+          <p:cNvSpPr txBox="1"/>
+          <p:nvPr/>
+        </p:nvSpPr>
+        <p:spPr>
+          <a:xfrm>
+            <a:off x="7086600" y="3252520"/>
+            <a:ext cx="457200" cy="164592"/>
+          </a:xfrm>
+          <a:prstGeom prst="rect">
+            <a:avLst/>
+          </a:prstGeom>
+          <a:noFill/>
+          <a:effectLst/>
+        </p:spPr>
+        <p:txBody>
+          <a:bodyPr wrap="square" lIns="0" rIns="0" tIns="0" bIns="0" anchor="ctr">
+            <a:spAutoFit/>
+          </a:bodyPr>
+          <a:lstStyle/>
+          <a:p>
+            <a:pPr algn="ctr"/>
+            <a:r>
+              <a:rPr sz="700" b="0" i="0">
+                <a:solidFill>
+                  <a:srgbClr val="222222"/>
+                </a:solidFill>
+                <a:latin typeface="Arial"/>
+              </a:rPr>
+              <a:t>+0.18</a:t>
+            </a:r>
+          </a:p>
+        </p:txBody>
+      </p:sp>
+      <p:sp>
+        <p:nvSpPr>
+          <p:cNvPr id="141" name="TextBox 140"/>
+          <p:cNvSpPr txBox="1"/>
+          <p:nvPr/>
+        </p:nvSpPr>
+        <p:spPr>
+          <a:xfrm>
+            <a:off x="7589520" y="3252520"/>
+            <a:ext cx="868680" cy="164592"/>
+          </a:xfrm>
+          <a:prstGeom prst="rect">
+            <a:avLst/>
+          </a:prstGeom>
+          <a:noFill/>
+          <a:effectLst/>
+        </p:spPr>
+        <p:txBody>
+          <a:bodyPr wrap="square" lIns="0" rIns="0" tIns="0" bIns="0" anchor="ctr">
+            <a:spAutoFit/>
+          </a:bodyPr>
+          <a:lstStyle/>
+          <a:p>
+            <a:pPr algn="ctr"/>
+            <a:r>
+              <a:rPr sz="700" b="0" i="0">
+                <a:solidFill>
+                  <a:srgbClr val="222222"/>
+                </a:solidFill>
+                <a:latin typeface="Arial"/>
+              </a:rPr>
+              <a:t>[-0.47, +0.84]</a:t>
+            </a:r>
+          </a:p>
+        </p:txBody>
+      </p:sp>
+      <p:sp>
+        <p:nvSpPr>
+          <p:cNvPr id="142" name="TextBox 141"/>
+          <p:cNvSpPr txBox="1"/>
+          <p:nvPr/>
+        </p:nvSpPr>
+        <p:spPr>
+          <a:xfrm>
+            <a:off x="8458200" y="3252520"/>
+            <a:ext cx="365760" cy="164592"/>
+          </a:xfrm>
+          <a:prstGeom prst="rect">
+            <a:avLst/>
+          </a:prstGeom>
+          <a:noFill/>
+          <a:effectLst/>
+        </p:spPr>
+        <p:txBody>
+          <a:bodyPr wrap="square" lIns="0" rIns="0" tIns="0" bIns="0" anchor="ctr">
+            <a:spAutoFit/>
+          </a:bodyPr>
+          <a:lstStyle/>
+          <a:p>
+            <a:pPr algn="ctr"/>
+            <a:r>
+              <a:rPr sz="700" b="0" i="0">
+                <a:solidFill>
+                  <a:srgbClr val="222222"/>
+                </a:solidFill>
+                <a:latin typeface="Arial"/>
+              </a:rPr>
+              <a:t>155</a:t>
+            </a:r>
+          </a:p>
+        </p:txBody>
+      </p:sp>
+      <p:sp>
+        <p:nvSpPr>
+          <p:cNvPr id="143" name="TextBox 142"/>
+          <p:cNvSpPr txBox="1"/>
+          <p:nvPr/>
+        </p:nvSpPr>
+        <p:spPr>
+          <a:xfrm>
+            <a:off x="8823959" y="3252520"/>
+            <a:ext cx="594360" cy="164592"/>
+          </a:xfrm>
+          <a:prstGeom prst="rect">
+            <a:avLst/>
+          </a:prstGeom>
+          <a:noFill/>
+          <a:effectLst/>
+        </p:spPr>
+        <p:txBody>
+          <a:bodyPr wrap="square" lIns="0" rIns="0" tIns="0" bIns="0" anchor="ctr">
+            <a:spAutoFit/>
+          </a:bodyPr>
+          <a:lstStyle/>
+          <a:p>
+            <a:pPr algn="ctr"/>
+            <a:r>
+              <a:rPr sz="700" b="0" i="0">
+                <a:solidFill>
+                  <a:srgbClr val="222222"/>
+                </a:solidFill>
+                <a:latin typeface="Arial"/>
+              </a:rPr>
+              <a:t>0.505</a:t>
+            </a:r>
+          </a:p>
+        </p:txBody>
+      </p:sp>
+      <p:sp>
+        <p:nvSpPr>
+          <p:cNvPr id="144" name="TextBox 143"/>
+          <p:cNvSpPr txBox="1"/>
+          <p:nvPr/>
+        </p:nvSpPr>
+        <p:spPr>
+          <a:xfrm>
+            <a:off x="9418320" y="3252520"/>
+            <a:ext cx="502920" cy="164592"/>
+          </a:xfrm>
+          <a:prstGeom prst="rect">
+            <a:avLst/>
+          </a:prstGeom>
+          <a:noFill/>
+          <a:effectLst/>
+        </p:spPr>
+        <p:txBody>
+          <a:bodyPr wrap="square" lIns="0" rIns="0" tIns="0" bIns="0" anchor="ctr">
+            <a:spAutoFit/>
+          </a:bodyPr>
+          <a:lstStyle/>
+          <a:p>
+            <a:pPr algn="ctr"/>
+            <a:r>
+              <a:rPr sz="700" b="0" i="0">
+                <a:solidFill>
+                  <a:srgbClr val="222222"/>
+                </a:solidFill>
+                <a:latin typeface="Arial"/>
+              </a:rPr>
+              <a:t>0.902</a:t>
+            </a:r>
+          </a:p>
+        </p:txBody>
+      </p:sp>
+      <p:sp>
+        <p:nvSpPr>
+          <p:cNvPr id="145" name="Rectangle 144"/>
+          <p:cNvSpPr/>
+          <p:nvPr/>
+        </p:nvSpPr>
+        <p:spPr>
+          <a:xfrm>
+            <a:off x="164592" y="3534156"/>
+            <a:ext cx="109728" cy="109728"/>
+          </a:xfrm>
+          <a:prstGeom prst="rect">
+            <a:avLst/>
+          </a:prstGeom>
+          <a:solidFill>
+            <a:srgbClr val="D4A300"/>
+          </a:solidFill>
+          <a:ln>
+            <a:noFill/>
+          </a:ln>
+          <a:effectLst/>
+        </p:spPr>
+        <p:style>
+          <a:lnRef idx="1">
+            <a:schemeClr val="accent1"/>
+          </a:lnRef>
+          <a:fillRef idx="3">
+            <a:schemeClr val="accent1"/>
+          </a:fillRef>
+          <a:effectRef idx="2">
+            <a:schemeClr val="accent1"/>
+          </a:effectRef>
+          <a:fontRef idx="minor">
+            <a:schemeClr val="lt1"/>
+          </a:fontRef>
+        </p:style>
+        <p:txBody>
+          <a:bodyPr rtlCol="0" anchor="ctr"/>
+          <a:lstStyle/>
+          <a:p>
+            <a:pPr algn="ctr"/>
+          </a:p>
+        </p:txBody>
+      </p:sp>
+      <p:sp>
+        <p:nvSpPr>
+          <p:cNvPr id="146" name="TextBox 145"/>
+          <p:cNvSpPr txBox="1"/>
+          <p:nvPr/>
+        </p:nvSpPr>
+        <p:spPr>
+          <a:xfrm>
+            <a:off x="1353312" y="3506724"/>
+            <a:ext cx="1508760" cy="164592"/>
+          </a:xfrm>
+          <a:prstGeom prst="rect">
+            <a:avLst/>
+          </a:prstGeom>
+          <a:noFill/>
+          <a:effectLst/>
+        </p:spPr>
+        <p:txBody>
+          <a:bodyPr wrap="square" lIns="0" rIns="0" tIns="0" bIns="0" anchor="ctr">
+            <a:spAutoFit/>
+          </a:bodyPr>
+          <a:lstStyle/>
+          <a:p>
+            <a:pPr algn="r"/>
+            <a:r>
+              <a:rPr sz="800" b="0" i="0">
+                <a:solidFill>
+                  <a:srgbClr val="222222"/>
+                </a:solidFill>
+                <a:latin typeface="Arial"/>
+              </a:rPr>
+              <a:t>TLS (Cabrita)</a:t>
+            </a:r>
+          </a:p>
+        </p:txBody>
+      </p:sp>
+      <p:cxnSp>
+        <p:nvCxnSpPr>
+          <p:cNvPr id="147" name="Connector 146"/>
+          <p:cNvCxnSpPr/>
+          <p:nvPr/>
+        </p:nvCxnSpPr>
+        <p:spPr>
+          <a:xfrm>
+            <a:off x="4063314" y="3589020"/>
+            <a:ext cx="1503360" cy="0"/>
+          </a:xfrm>
+          <a:prstGeom prst="line">
+            <a:avLst/>
+          </a:prstGeom>
+          <a:ln w="17780">
+            <a:solidFill>
+              <a:srgbClr val="C53E1F"/>
+            </a:solidFill>
+          </a:ln>
+          <a:effectLst/>
+        </p:spPr>
+        <p:style>
+          <a:lnRef idx="2">
+            <a:schemeClr val="accent1"/>
+          </a:lnRef>
+          <a:fillRef idx="0">
+            <a:schemeClr val="accent1"/>
+          </a:fillRef>
+          <a:effectRef idx="1">
+            <a:schemeClr val="accent1"/>
+          </a:effectRef>
+          <a:fontRef idx="minor">
+            <a:schemeClr val="tx1"/>
+          </a:fontRef>
+        </p:style>
+      </p:cxnSp>
+      <p:sp>
+        <p:nvSpPr>
+          <p:cNvPr id="148" name="Oval 147"/>
+          <p:cNvSpPr/>
+          <p:nvPr/>
+        </p:nvSpPr>
+        <p:spPr>
+          <a:xfrm>
+            <a:off x="4804032" y="3565020"/>
             <a:ext cx="48000" cy="48000"/>
           </a:xfrm>
           <a:prstGeom prst="ellipse">
@@ -7714,13 +8696,13 @@
       </p:sp>
       <p:sp>
         <p:nvSpPr>
-          <p:cNvPr id="123" name="TextBox 122"/>
-          <p:cNvSpPr txBox="1"/>
-          <p:nvPr/>
-        </p:nvSpPr>
-        <p:spPr>
-          <a:xfrm>
-            <a:off x="7086600" y="2744114"/>
+          <p:cNvPr id="149" name="TextBox 148"/>
+          <p:cNvSpPr txBox="1"/>
+          <p:nvPr/>
+        </p:nvSpPr>
+        <p:spPr>
+          <a:xfrm>
+            <a:off x="7086600" y="3506724"/>
             <a:ext cx="457200" cy="164592"/>
           </a:xfrm>
           <a:prstGeom prst="rect">
@@ -7750,13 +8732,13 @@
       </p:sp>
       <p:sp>
         <p:nvSpPr>
-          <p:cNvPr id="124" name="TextBox 123"/>
-          <p:cNvSpPr txBox="1"/>
-          <p:nvPr/>
-        </p:nvSpPr>
-        <p:spPr>
-          <a:xfrm>
-            <a:off x="7589520" y="2744114"/>
+          <p:cNvPr id="150" name="TextBox 149"/>
+          <p:cNvSpPr txBox="1"/>
+          <p:nvPr/>
+        </p:nvSpPr>
+        <p:spPr>
+          <a:xfrm>
+            <a:off x="7589520" y="3506724"/>
             <a:ext cx="868680" cy="164592"/>
           </a:xfrm>
           <a:prstGeom prst="rect">
@@ -7786,13 +8768,13 @@
       </p:sp>
       <p:sp>
         <p:nvSpPr>
-          <p:cNvPr id="125" name="TextBox 124"/>
-          <p:cNvSpPr txBox="1"/>
-          <p:nvPr/>
-        </p:nvSpPr>
-        <p:spPr>
-          <a:xfrm>
-            <a:off x="8458200" y="2744114"/>
+          <p:cNvPr id="151" name="TextBox 150"/>
+          <p:cNvSpPr txBox="1"/>
+          <p:nvPr/>
+        </p:nvSpPr>
+        <p:spPr>
+          <a:xfrm>
+            <a:off x="8458200" y="3506724"/>
             <a:ext cx="365760" cy="164592"/>
           </a:xfrm>
           <a:prstGeom prst="rect">
@@ -7822,13 +8804,13 @@
       </p:sp>
       <p:sp>
         <p:nvSpPr>
-          <p:cNvPr id="126" name="TextBox 125"/>
-          <p:cNvSpPr txBox="1"/>
-          <p:nvPr/>
-        </p:nvSpPr>
-        <p:spPr>
-          <a:xfrm>
-            <a:off x="8823959" y="2744114"/>
+          <p:cNvPr id="152" name="TextBox 151"/>
+          <p:cNvSpPr txBox="1"/>
+          <p:nvPr/>
+        </p:nvSpPr>
+        <p:spPr>
+          <a:xfrm>
+            <a:off x="8823959" y="3506724"/>
             <a:ext cx="594360" cy="164592"/>
           </a:xfrm>
           <a:prstGeom prst="rect">
@@ -7858,13 +8840,13 @@
       </p:sp>
       <p:sp>
         <p:nvSpPr>
-          <p:cNvPr id="127" name="TextBox 126"/>
-          <p:cNvSpPr txBox="1"/>
-          <p:nvPr/>
-        </p:nvSpPr>
-        <p:spPr>
-          <a:xfrm>
-            <a:off x="9418320" y="2744114"/>
+          <p:cNvPr id="153" name="TextBox 152"/>
+          <p:cNvSpPr txBox="1"/>
+          <p:nvPr/>
+        </p:nvSpPr>
+        <p:spPr>
+          <a:xfrm>
+            <a:off x="9418320" y="3506724"/>
             <a:ext cx="502920" cy="164592"/>
           </a:xfrm>
           <a:prstGeom prst="rect">
@@ -7894,13 +8876,13 @@
       </p:sp>
       <p:sp>
         <p:nvSpPr>
-          <p:cNvPr id="128" name="Rectangle 127"/>
+          <p:cNvPr id="154" name="Rectangle 153"/>
           <p:cNvSpPr/>
           <p:nvPr/>
         </p:nvSpPr>
         <p:spPr>
           <a:xfrm>
-            <a:off x="164592" y="3025749"/>
+            <a:off x="164592" y="3788359"/>
             <a:ext cx="109728" cy="109728"/>
           </a:xfrm>
           <a:prstGeom prst="rect">
@@ -7938,13 +8920,13 @@
       </p:sp>
       <p:sp>
         <p:nvSpPr>
-          <p:cNvPr id="129" name="TextBox 128"/>
-          <p:cNvSpPr txBox="1"/>
-          <p:nvPr/>
-        </p:nvSpPr>
-        <p:spPr>
-          <a:xfrm>
-            <a:off x="320040" y="2998317"/>
+          <p:cNvPr id="155" name="TextBox 154"/>
+          <p:cNvSpPr txBox="1"/>
+          <p:nvPr/>
+        </p:nvSpPr>
+        <p:spPr>
+          <a:xfrm>
+            <a:off x="320040" y="3760927"/>
             <a:ext cx="1005840" cy="164592"/>
           </a:xfrm>
           <a:prstGeom prst="rect">
@@ -7974,13 +8956,13 @@
       </p:sp>
       <p:sp>
         <p:nvSpPr>
-          <p:cNvPr id="130" name="TextBox 129"/>
-          <p:cNvSpPr txBox="1"/>
-          <p:nvPr/>
-        </p:nvSpPr>
-        <p:spPr>
-          <a:xfrm>
-            <a:off x="1353312" y="2998317"/>
+          <p:cNvPr id="156" name="TextBox 155"/>
+          <p:cNvSpPr txBox="1"/>
+          <p:nvPr/>
+        </p:nvSpPr>
+        <p:spPr>
+          <a:xfrm>
+            <a:off x="1353312" y="3760927"/>
             <a:ext cx="1508760" cy="164592"/>
           </a:xfrm>
           <a:prstGeom prst="rect">
@@ -8010,13 +8992,13 @@
       </p:sp>
       <p:cxnSp>
         <p:nvCxnSpPr>
-          <p:cNvPr id="131" name="Connector 130"/>
+          <p:cNvPr id="157" name="Connector 156"/>
           <p:cNvCxnSpPr/>
           <p:nvPr/>
         </p:nvCxnSpPr>
         <p:spPr>
           <a:xfrm>
-            <a:off x="3565947" y="3080613"/>
+            <a:off x="3565947" y="3843223"/>
             <a:ext cx="1933429" cy="0"/>
           </a:xfrm>
           <a:prstGeom prst="line">
@@ -8046,13 +9028,13 @@
       </p:cxnSp>
       <p:sp>
         <p:nvSpPr>
-          <p:cNvPr id="132" name="Oval 131"/>
+          <p:cNvPr id="158" name="Oval 157"/>
           <p:cNvSpPr/>
           <p:nvPr/>
         </p:nvSpPr>
         <p:spPr>
           <a:xfrm>
-            <a:off x="4457467" y="3056613"/>
+            <a:off x="4457467" y="3819223"/>
             <a:ext cx="48000" cy="48000"/>
           </a:xfrm>
           <a:prstGeom prst="ellipse">
@@ -8092,13 +9074,13 @@
       </p:sp>
       <p:sp>
         <p:nvSpPr>
-          <p:cNvPr id="133" name="TextBox 132"/>
-          <p:cNvSpPr txBox="1"/>
-          <p:nvPr/>
-        </p:nvSpPr>
-        <p:spPr>
-          <a:xfrm>
-            <a:off x="7086600" y="2998317"/>
+          <p:cNvPr id="159" name="TextBox 158"/>
+          <p:cNvSpPr txBox="1"/>
+          <p:nvPr/>
+        </p:nvSpPr>
+        <p:spPr>
+          <a:xfrm>
+            <a:off x="7086600" y="3760927"/>
             <a:ext cx="457200" cy="164592"/>
           </a:xfrm>
           <a:prstGeom prst="rect">
@@ -8128,13 +9110,13 @@
       </p:sp>
       <p:sp>
         <p:nvSpPr>
-          <p:cNvPr id="134" name="TextBox 133"/>
-          <p:cNvSpPr txBox="1"/>
-          <p:nvPr/>
-        </p:nvSpPr>
-        <p:spPr>
-          <a:xfrm>
-            <a:off x="7589520" y="2998317"/>
+          <p:cNvPr id="160" name="TextBox 159"/>
+          <p:cNvSpPr txBox="1"/>
+          <p:nvPr/>
+        </p:nvSpPr>
+        <p:spPr>
+          <a:xfrm>
+            <a:off x="7589520" y="3760927"/>
             <a:ext cx="868680" cy="164592"/>
           </a:xfrm>
           <a:prstGeom prst="rect">
@@ -8164,13 +9146,13 @@
       </p:sp>
       <p:sp>
         <p:nvSpPr>
-          <p:cNvPr id="135" name="TextBox 134"/>
-          <p:cNvSpPr txBox="1"/>
-          <p:nvPr/>
-        </p:nvSpPr>
-        <p:spPr>
-          <a:xfrm>
-            <a:off x="8458200" y="2998317"/>
+          <p:cNvPr id="161" name="TextBox 160"/>
+          <p:cNvSpPr txBox="1"/>
+          <p:nvPr/>
+        </p:nvSpPr>
+        <p:spPr>
+          <a:xfrm>
+            <a:off x="8458200" y="3760927"/>
             <a:ext cx="365760" cy="164592"/>
           </a:xfrm>
           <a:prstGeom prst="rect">
@@ -8200,13 +9182,13 @@
       </p:sp>
       <p:sp>
         <p:nvSpPr>
-          <p:cNvPr id="136" name="TextBox 135"/>
-          <p:cNvSpPr txBox="1"/>
-          <p:nvPr/>
-        </p:nvSpPr>
-        <p:spPr>
-          <a:xfrm>
-            <a:off x="8823959" y="2998317"/>
+          <p:cNvPr id="162" name="TextBox 161"/>
+          <p:cNvSpPr txBox="1"/>
+          <p:nvPr/>
+        </p:nvSpPr>
+        <p:spPr>
+          <a:xfrm>
+            <a:off x="8823959" y="3760927"/>
             <a:ext cx="594360" cy="164592"/>
           </a:xfrm>
           <a:prstGeom prst="rect">
@@ -8236,13 +9218,13 @@
       </p:sp>
       <p:sp>
         <p:nvSpPr>
-          <p:cNvPr id="137" name="TextBox 136"/>
-          <p:cNvSpPr txBox="1"/>
-          <p:nvPr/>
-        </p:nvSpPr>
-        <p:spPr>
-          <a:xfrm>
-            <a:off x="9418320" y="2998317"/>
+          <p:cNvPr id="163" name="TextBox 162"/>
+          <p:cNvSpPr txBox="1"/>
+          <p:nvPr/>
+        </p:nvSpPr>
+        <p:spPr>
+          <a:xfrm>
+            <a:off x="9418320" y="3760927"/>
             <a:ext cx="502920" cy="164592"/>
           </a:xfrm>
           <a:prstGeom prst="rect">
@@ -8272,13 +9254,13 @@
       </p:sp>
       <p:sp>
         <p:nvSpPr>
-          <p:cNvPr id="138" name="Rectangle 137"/>
+          <p:cNvPr id="164" name="Rectangle 163"/>
           <p:cNvSpPr/>
           <p:nvPr/>
         </p:nvSpPr>
         <p:spPr>
           <a:xfrm>
-            <a:off x="164592" y="3279952"/>
+            <a:off x="164592" y="4042562"/>
             <a:ext cx="109728" cy="109728"/>
           </a:xfrm>
           <a:prstGeom prst="rect">
@@ -8316,13 +9298,13 @@
       </p:sp>
       <p:sp>
         <p:nvSpPr>
-          <p:cNvPr id="139" name="TextBox 138"/>
-          <p:cNvSpPr txBox="1"/>
-          <p:nvPr/>
-        </p:nvSpPr>
-        <p:spPr>
-          <a:xfrm>
-            <a:off x="1353312" y="3252520"/>
+          <p:cNvPr id="165" name="TextBox 164"/>
+          <p:cNvSpPr txBox="1"/>
+          <p:nvPr/>
+        </p:nvSpPr>
+        <p:spPr>
+          <a:xfrm>
+            <a:off x="1353312" y="4015130"/>
             <a:ext cx="1508760" cy="164592"/>
           </a:xfrm>
           <a:prstGeom prst="rect">
@@ -8352,13 +9334,13 @@
       </p:sp>
       <p:cxnSp>
         <p:nvCxnSpPr>
-          <p:cNvPr id="140" name="Connector 139"/>
+          <p:cNvPr id="166" name="Connector 165"/>
           <p:cNvCxnSpPr/>
           <p:nvPr/>
         </p:nvCxnSpPr>
         <p:spPr>
           <a:xfrm>
-            <a:off x="3678376" y="3334816"/>
+            <a:off x="3678376" y="4097426"/>
             <a:ext cx="1880620" cy="0"/>
           </a:xfrm>
           <a:prstGeom prst="line">
@@ -8388,13 +9370,13 @@
       </p:cxnSp>
       <p:sp>
         <p:nvSpPr>
-          <p:cNvPr id="141" name="Oval 140"/>
+          <p:cNvPr id="167" name="Oval 166"/>
           <p:cNvSpPr/>
           <p:nvPr/>
         </p:nvSpPr>
         <p:spPr>
           <a:xfrm>
-            <a:off x="4574361" y="3310816"/>
+            <a:off x="4574361" y="4073426"/>
             <a:ext cx="48000" cy="48000"/>
           </a:xfrm>
           <a:prstGeom prst="ellipse">
@@ -8434,13 +9416,13 @@
       </p:sp>
       <p:sp>
         <p:nvSpPr>
-          <p:cNvPr id="142" name="TextBox 141"/>
-          <p:cNvSpPr txBox="1"/>
-          <p:nvPr/>
-        </p:nvSpPr>
-        <p:spPr>
-          <a:xfrm>
-            <a:off x="7086600" y="3252520"/>
+          <p:cNvPr id="168" name="TextBox 167"/>
+          <p:cNvSpPr txBox="1"/>
+          <p:nvPr/>
+        </p:nvSpPr>
+        <p:spPr>
+          <a:xfrm>
+            <a:off x="7086600" y="4015130"/>
             <a:ext cx="457200" cy="164592"/>
           </a:xfrm>
           <a:prstGeom prst="rect">
@@ -8470,13 +9452,13 @@
       </p:sp>
       <p:sp>
         <p:nvSpPr>
-          <p:cNvPr id="143" name="TextBox 142"/>
-          <p:cNvSpPr txBox="1"/>
-          <p:nvPr/>
-        </p:nvSpPr>
-        <p:spPr>
-          <a:xfrm>
-            <a:off x="7589520" y="3252520"/>
+          <p:cNvPr id="169" name="TextBox 168"/>
+          <p:cNvSpPr txBox="1"/>
+          <p:nvPr/>
+        </p:nvSpPr>
+        <p:spPr>
+          <a:xfrm>
+            <a:off x="7589520" y="4015130"/>
             <a:ext cx="868680" cy="164592"/>
           </a:xfrm>
           <a:prstGeom prst="rect">
@@ -8506,13 +9488,13 @@
       </p:sp>
       <p:sp>
         <p:nvSpPr>
-          <p:cNvPr id="144" name="TextBox 143"/>
-          <p:cNvSpPr txBox="1"/>
-          <p:nvPr/>
-        </p:nvSpPr>
-        <p:spPr>
-          <a:xfrm>
-            <a:off x="8458200" y="3252520"/>
+          <p:cNvPr id="170" name="TextBox 169"/>
+          <p:cNvSpPr txBox="1"/>
+          <p:nvPr/>
+        </p:nvSpPr>
+        <p:spPr>
+          <a:xfrm>
+            <a:off x="8458200" y="4015130"/>
             <a:ext cx="365760" cy="164592"/>
           </a:xfrm>
           <a:prstGeom prst="rect">
@@ -8542,13 +9524,13 @@
       </p:sp>
       <p:sp>
         <p:nvSpPr>
-          <p:cNvPr id="145" name="TextBox 144"/>
-          <p:cNvSpPr txBox="1"/>
-          <p:nvPr/>
-        </p:nvSpPr>
-        <p:spPr>
-          <a:xfrm>
-            <a:off x="8823959" y="3252520"/>
+          <p:cNvPr id="171" name="TextBox 170"/>
+          <p:cNvSpPr txBox="1"/>
+          <p:nvPr/>
+        </p:nvSpPr>
+        <p:spPr>
+          <a:xfrm>
+            <a:off x="8823959" y="4015130"/>
             <a:ext cx="594360" cy="164592"/>
           </a:xfrm>
           <a:prstGeom prst="rect">
@@ -8578,13 +9560,13 @@
       </p:sp>
       <p:sp>
         <p:nvSpPr>
-          <p:cNvPr id="146" name="TextBox 145"/>
-          <p:cNvSpPr txBox="1"/>
-          <p:nvPr/>
-        </p:nvSpPr>
-        <p:spPr>
-          <a:xfrm>
-            <a:off x="9418320" y="3252520"/>
+          <p:cNvPr id="172" name="TextBox 171"/>
+          <p:cNvSpPr txBox="1"/>
+          <p:nvPr/>
+        </p:nvSpPr>
+        <p:spPr>
+          <a:xfrm>
+            <a:off x="9418320" y="4015130"/>
             <a:ext cx="502920" cy="164592"/>
           </a:xfrm>
           <a:prstGeom prst="rect">
@@ -8614,13 +9596,13 @@
       </p:sp>
       <p:sp>
         <p:nvSpPr>
-          <p:cNvPr id="147" name="Rectangle 146"/>
+          <p:cNvPr id="173" name="Rectangle 172"/>
           <p:cNvSpPr/>
           <p:nvPr/>
         </p:nvSpPr>
         <p:spPr>
           <a:xfrm>
-            <a:off x="164592" y="3534156"/>
+            <a:off x="164592" y="4296765"/>
             <a:ext cx="109728" cy="109728"/>
           </a:xfrm>
           <a:prstGeom prst="rect">
@@ -8658,13 +9640,13 @@
       </p:sp>
       <p:sp>
         <p:nvSpPr>
-          <p:cNvPr id="148" name="TextBox 147"/>
-          <p:cNvSpPr txBox="1"/>
-          <p:nvPr/>
-        </p:nvSpPr>
-        <p:spPr>
-          <a:xfrm>
-            <a:off x="1353312" y="3506724"/>
+          <p:cNvPr id="174" name="TextBox 173"/>
+          <p:cNvSpPr txBox="1"/>
+          <p:nvPr/>
+        </p:nvSpPr>
+        <p:spPr>
+          <a:xfrm>
+            <a:off x="1353312" y="4269333"/>
             <a:ext cx="1508760" cy="164592"/>
           </a:xfrm>
           <a:prstGeom prst="rect">
@@ -8694,13 +9676,13 @@
       </p:sp>
       <p:cxnSp>
         <p:nvCxnSpPr>
-          <p:cNvPr id="149" name="Connector 148"/>
+          <p:cNvPr id="175" name="Connector 174"/>
           <p:cNvCxnSpPr/>
           <p:nvPr/>
         </p:nvCxnSpPr>
         <p:spPr>
           <a:xfrm>
-            <a:off x="4109592" y="3589020"/>
+            <a:off x="4109592" y="4351629"/>
             <a:ext cx="1652113" cy="0"/>
           </a:xfrm>
           <a:prstGeom prst="line">
@@ -8730,13 +9712,13 @@
       </p:cxnSp>
       <p:sp>
         <p:nvSpPr>
-          <p:cNvPr id="150" name="Oval 149"/>
+          <p:cNvPr id="176" name="Oval 175"/>
           <p:cNvSpPr/>
           <p:nvPr/>
         </p:nvSpPr>
         <p:spPr>
           <a:xfrm>
-            <a:off x="4849754" y="3565020"/>
+            <a:off x="4849754" y="4327629"/>
             <a:ext cx="48000" cy="48000"/>
           </a:xfrm>
           <a:prstGeom prst="ellipse">
@@ -8776,13 +9758,13 @@
       </p:sp>
       <p:sp>
         <p:nvSpPr>
-          <p:cNvPr id="151" name="TextBox 150"/>
-          <p:cNvSpPr txBox="1"/>
-          <p:nvPr/>
-        </p:nvSpPr>
-        <p:spPr>
-          <a:xfrm>
-            <a:off x="7086600" y="3506724"/>
+          <p:cNvPr id="177" name="TextBox 176"/>
+          <p:cNvSpPr txBox="1"/>
+          <p:nvPr/>
+        </p:nvSpPr>
+        <p:spPr>
+          <a:xfrm>
+            <a:off x="7086600" y="4269333"/>
             <a:ext cx="457200" cy="164592"/>
           </a:xfrm>
           <a:prstGeom prst="rect">
@@ -8812,13 +9794,13 @@
       </p:sp>
       <p:sp>
         <p:nvSpPr>
-          <p:cNvPr id="152" name="TextBox 151"/>
-          <p:cNvSpPr txBox="1"/>
-          <p:nvPr/>
-        </p:nvSpPr>
-        <p:spPr>
-          <a:xfrm>
-            <a:off x="7589520" y="3506724"/>
+          <p:cNvPr id="178" name="TextBox 177"/>
+          <p:cNvSpPr txBox="1"/>
+          <p:nvPr/>
+        </p:nvSpPr>
+        <p:spPr>
+          <a:xfrm>
+            <a:off x="7589520" y="4269333"/>
             <a:ext cx="868680" cy="164592"/>
           </a:xfrm>
           <a:prstGeom prst="rect">
@@ -8848,13 +9830,13 @@
       </p:sp>
       <p:sp>
         <p:nvSpPr>
-          <p:cNvPr id="153" name="TextBox 152"/>
-          <p:cNvSpPr txBox="1"/>
-          <p:nvPr/>
-        </p:nvSpPr>
-        <p:spPr>
-          <a:xfrm>
-            <a:off x="8458200" y="3506724"/>
+          <p:cNvPr id="179" name="TextBox 178"/>
+          <p:cNvSpPr txBox="1"/>
+          <p:nvPr/>
+        </p:nvSpPr>
+        <p:spPr>
+          <a:xfrm>
+            <a:off x="8458200" y="4269333"/>
             <a:ext cx="365760" cy="164592"/>
           </a:xfrm>
           <a:prstGeom prst="rect">
@@ -8884,13 +9866,13 @@
       </p:sp>
       <p:sp>
         <p:nvSpPr>
-          <p:cNvPr id="154" name="TextBox 153"/>
-          <p:cNvSpPr txBox="1"/>
-          <p:nvPr/>
-        </p:nvSpPr>
-        <p:spPr>
-          <a:xfrm>
-            <a:off x="8823959" y="3506724"/>
+          <p:cNvPr id="180" name="TextBox 179"/>
+          <p:cNvSpPr txBox="1"/>
+          <p:nvPr/>
+        </p:nvSpPr>
+        <p:spPr>
+          <a:xfrm>
+            <a:off x="8823959" y="4269333"/>
             <a:ext cx="594360" cy="164592"/>
           </a:xfrm>
           <a:prstGeom prst="rect">
@@ -8920,13 +9902,13 @@
       </p:sp>
       <p:sp>
         <p:nvSpPr>
-          <p:cNvPr id="155" name="TextBox 154"/>
-          <p:cNvSpPr txBox="1"/>
-          <p:nvPr/>
-        </p:nvSpPr>
-        <p:spPr>
-          <a:xfrm>
-            <a:off x="9418320" y="3506724"/>
+          <p:cNvPr id="181" name="TextBox 180"/>
+          <p:cNvSpPr txBox="1"/>
+          <p:nvPr/>
+        </p:nvSpPr>
+        <p:spPr>
+          <a:xfrm>
+            <a:off x="9418320" y="4269333"/>
             <a:ext cx="502920" cy="164592"/>
           </a:xfrm>
           <a:prstGeom prst="rect">
@@ -8956,13 +9938,13 @@
       </p:sp>
       <p:sp>
         <p:nvSpPr>
-          <p:cNvPr id="156" name="Rectangle 155"/>
+          <p:cNvPr id="182" name="Rectangle 181"/>
           <p:cNvSpPr/>
           <p:nvPr/>
         </p:nvSpPr>
         <p:spPr>
           <a:xfrm>
-            <a:off x="164592" y="3788359"/>
+            <a:off x="164592" y="4550968"/>
             <a:ext cx="109728" cy="109728"/>
           </a:xfrm>
           <a:prstGeom prst="rect">
@@ -9000,13 +9982,13 @@
       </p:sp>
       <p:sp>
         <p:nvSpPr>
-          <p:cNvPr id="157" name="TextBox 156"/>
-          <p:cNvSpPr txBox="1"/>
-          <p:nvPr/>
-        </p:nvSpPr>
-        <p:spPr>
-          <a:xfrm>
-            <a:off x="320040" y="3760927"/>
+          <p:cNvPr id="183" name="TextBox 182"/>
+          <p:cNvSpPr txBox="1"/>
+          <p:nvPr/>
+        </p:nvSpPr>
+        <p:spPr>
+          <a:xfrm>
+            <a:off x="320040" y="4523536"/>
             <a:ext cx="1005840" cy="164592"/>
           </a:xfrm>
           <a:prstGeom prst="rect">
@@ -9036,13 +10018,13 @@
       </p:sp>
       <p:sp>
         <p:nvSpPr>
-          <p:cNvPr id="158" name="TextBox 157"/>
-          <p:cNvSpPr txBox="1"/>
-          <p:nvPr/>
-        </p:nvSpPr>
-        <p:spPr>
-          <a:xfrm>
-            <a:off x="1353312" y="3760927"/>
+          <p:cNvPr id="184" name="TextBox 183"/>
+          <p:cNvSpPr txBox="1"/>
+          <p:nvPr/>
+        </p:nvSpPr>
+        <p:spPr>
+          <a:xfrm>
+            <a:off x="1353312" y="4523536"/>
             <a:ext cx="1508760" cy="164592"/>
           </a:xfrm>
           <a:prstGeom prst="rect">
@@ -9072,13 +10054,13 @@
       </p:sp>
       <p:cxnSp>
         <p:nvCxnSpPr>
-          <p:cNvPr id="159" name="Connector 158"/>
+          <p:cNvPr id="185" name="Connector 184"/>
           <p:cNvCxnSpPr/>
           <p:nvPr/>
         </p:nvCxnSpPr>
         <p:spPr>
           <a:xfrm>
-            <a:off x="3940792" y="3843223"/>
+            <a:off x="3940792" y="4605832"/>
             <a:ext cx="1931414" cy="0"/>
           </a:xfrm>
           <a:prstGeom prst="line">
@@ -9108,13 +10090,13 @@
       </p:cxnSp>
       <p:sp>
         <p:nvSpPr>
-          <p:cNvPr id="160" name="Oval 159"/>
+          <p:cNvPr id="186" name="Oval 185"/>
           <p:cNvSpPr/>
           <p:nvPr/>
         </p:nvSpPr>
         <p:spPr>
           <a:xfrm>
-            <a:off x="4809920" y="3819223"/>
+            <a:off x="4809920" y="4581832"/>
             <a:ext cx="48000" cy="48000"/>
           </a:xfrm>
           <a:prstGeom prst="ellipse">
@@ -9154,13 +10136,13 @@
       </p:sp>
       <p:sp>
         <p:nvSpPr>
-          <p:cNvPr id="161" name="TextBox 160"/>
-          <p:cNvSpPr txBox="1"/>
-          <p:nvPr/>
-        </p:nvSpPr>
-        <p:spPr>
-          <a:xfrm>
-            <a:off x="7086600" y="3760927"/>
+          <p:cNvPr id="187" name="TextBox 186"/>
+          <p:cNvSpPr txBox="1"/>
+          <p:nvPr/>
+        </p:nvSpPr>
+        <p:spPr>
+          <a:xfrm>
+            <a:off x="7086600" y="4523536"/>
             <a:ext cx="457200" cy="164592"/>
           </a:xfrm>
           <a:prstGeom prst="rect">
@@ -9190,13 +10172,13 @@
       </p:sp>
       <p:sp>
         <p:nvSpPr>
-          <p:cNvPr id="162" name="TextBox 161"/>
-          <p:cNvSpPr txBox="1"/>
-          <p:nvPr/>
-        </p:nvSpPr>
-        <p:spPr>
-          <a:xfrm>
-            <a:off x="7589520" y="3760927"/>
+          <p:cNvPr id="188" name="TextBox 187"/>
+          <p:cNvSpPr txBox="1"/>
+          <p:nvPr/>
+        </p:nvSpPr>
+        <p:spPr>
+          <a:xfrm>
+            <a:off x="7589520" y="4523536"/>
             <a:ext cx="868680" cy="164592"/>
           </a:xfrm>
           <a:prstGeom prst="rect">
@@ -9226,13 +10208,13 @@
       </p:sp>
       <p:sp>
         <p:nvSpPr>
-          <p:cNvPr id="163" name="TextBox 162"/>
-          <p:cNvSpPr txBox="1"/>
-          <p:nvPr/>
-        </p:nvSpPr>
-        <p:spPr>
-          <a:xfrm>
-            <a:off x="8458200" y="3760927"/>
+          <p:cNvPr id="189" name="TextBox 188"/>
+          <p:cNvSpPr txBox="1"/>
+          <p:nvPr/>
+        </p:nvSpPr>
+        <p:spPr>
+          <a:xfrm>
+            <a:off x="8458200" y="4523536"/>
             <a:ext cx="365760" cy="164592"/>
           </a:xfrm>
           <a:prstGeom prst="rect">
@@ -9262,13 +10244,13 @@
       </p:sp>
       <p:sp>
         <p:nvSpPr>
-          <p:cNvPr id="164" name="TextBox 163"/>
-          <p:cNvSpPr txBox="1"/>
-          <p:nvPr/>
-        </p:nvSpPr>
-        <p:spPr>
-          <a:xfrm>
-            <a:off x="8823959" y="3760927"/>
+          <p:cNvPr id="190" name="TextBox 189"/>
+          <p:cNvSpPr txBox="1"/>
+          <p:nvPr/>
+        </p:nvSpPr>
+        <p:spPr>
+          <a:xfrm>
+            <a:off x="8823959" y="4523536"/>
             <a:ext cx="594360" cy="164592"/>
           </a:xfrm>
           <a:prstGeom prst="rect">
@@ -9298,13 +10280,13 @@
       </p:sp>
       <p:sp>
         <p:nvSpPr>
-          <p:cNvPr id="165" name="TextBox 164"/>
-          <p:cNvSpPr txBox="1"/>
-          <p:nvPr/>
-        </p:nvSpPr>
-        <p:spPr>
-          <a:xfrm>
-            <a:off x="9418320" y="3760927"/>
+          <p:cNvPr id="191" name="TextBox 190"/>
+          <p:cNvSpPr txBox="1"/>
+          <p:nvPr/>
+        </p:nvSpPr>
+        <p:spPr>
+          <a:xfrm>
+            <a:off x="9418320" y="4523536"/>
             <a:ext cx="502920" cy="164592"/>
           </a:xfrm>
           <a:prstGeom prst="rect">
@@ -9334,13 +10316,13 @@
       </p:sp>
       <p:sp>
         <p:nvSpPr>
-          <p:cNvPr id="166" name="Rectangle 165"/>
+          <p:cNvPr id="192" name="Rectangle 191"/>
           <p:cNvSpPr/>
           <p:nvPr/>
         </p:nvSpPr>
         <p:spPr>
           <a:xfrm>
-            <a:off x="164592" y="4042562"/>
+            <a:off x="164592" y="4805172"/>
             <a:ext cx="109728" cy="109728"/>
           </a:xfrm>
           <a:prstGeom prst="rect">
@@ -9378,13 +10360,13 @@
       </p:sp>
       <p:sp>
         <p:nvSpPr>
-          <p:cNvPr id="167" name="TextBox 166"/>
-          <p:cNvSpPr txBox="1"/>
-          <p:nvPr/>
-        </p:nvSpPr>
-        <p:spPr>
-          <a:xfrm>
-            <a:off x="1353312" y="4015130"/>
+          <p:cNvPr id="193" name="TextBox 192"/>
+          <p:cNvSpPr txBox="1"/>
+          <p:nvPr/>
+        </p:nvSpPr>
+        <p:spPr>
+          <a:xfrm>
+            <a:off x="1353312" y="4777740"/>
             <a:ext cx="1508760" cy="164592"/>
           </a:xfrm>
           <a:prstGeom prst="rect">
@@ -9414,13 +10396,13 @@
       </p:sp>
       <p:cxnSp>
         <p:nvCxnSpPr>
-          <p:cNvPr id="168" name="Connector 167"/>
+          <p:cNvPr id="194" name="Connector 193"/>
           <p:cNvCxnSpPr/>
           <p:nvPr/>
         </p:nvCxnSpPr>
         <p:spPr>
           <a:xfrm>
-            <a:off x="4170862" y="4097426"/>
+            <a:off x="4170862" y="4860036"/>
             <a:ext cx="1840126" cy="0"/>
           </a:xfrm>
           <a:prstGeom prst="line">
@@ -9450,13 +10432,13 @@
       </p:cxnSp>
       <p:sp>
         <p:nvSpPr>
-          <p:cNvPr id="169" name="Oval 168"/>
+          <p:cNvPr id="195" name="Oval 194"/>
           <p:cNvSpPr/>
           <p:nvPr/>
         </p:nvSpPr>
         <p:spPr>
           <a:xfrm>
-            <a:off x="5002086" y="4073426"/>
+            <a:off x="5002086" y="4836036"/>
             <a:ext cx="48000" cy="48000"/>
           </a:xfrm>
           <a:prstGeom prst="ellipse">
@@ -9496,13 +10478,13 @@
       </p:sp>
       <p:sp>
         <p:nvSpPr>
-          <p:cNvPr id="170" name="TextBox 169"/>
-          <p:cNvSpPr txBox="1"/>
-          <p:nvPr/>
-        </p:nvSpPr>
-        <p:spPr>
-          <a:xfrm>
-            <a:off x="7086600" y="4015130"/>
+          <p:cNvPr id="196" name="TextBox 195"/>
+          <p:cNvSpPr txBox="1"/>
+          <p:nvPr/>
+        </p:nvSpPr>
+        <p:spPr>
+          <a:xfrm>
+            <a:off x="7086600" y="4777740"/>
             <a:ext cx="457200" cy="164592"/>
           </a:xfrm>
           <a:prstGeom prst="rect">
@@ -9532,13 +10514,13 @@
       </p:sp>
       <p:sp>
         <p:nvSpPr>
-          <p:cNvPr id="171" name="TextBox 170"/>
-          <p:cNvSpPr txBox="1"/>
-          <p:nvPr/>
-        </p:nvSpPr>
-        <p:spPr>
-          <a:xfrm>
-            <a:off x="7589520" y="4015130"/>
+          <p:cNvPr id="197" name="TextBox 196"/>
+          <p:cNvSpPr txBox="1"/>
+          <p:nvPr/>
+        </p:nvSpPr>
+        <p:spPr>
+          <a:xfrm>
+            <a:off x="7589520" y="4777740"/>
             <a:ext cx="868680" cy="164592"/>
           </a:xfrm>
           <a:prstGeom prst="rect">
@@ -9568,13 +10550,13 @@
       </p:sp>
       <p:sp>
         <p:nvSpPr>
-          <p:cNvPr id="172" name="TextBox 171"/>
-          <p:cNvSpPr txBox="1"/>
-          <p:nvPr/>
-        </p:nvSpPr>
-        <p:spPr>
-          <a:xfrm>
-            <a:off x="8458200" y="4015130"/>
+          <p:cNvPr id="198" name="TextBox 197"/>
+          <p:cNvSpPr txBox="1"/>
+          <p:nvPr/>
+        </p:nvSpPr>
+        <p:spPr>
+          <a:xfrm>
+            <a:off x="8458200" y="4777740"/>
             <a:ext cx="365760" cy="164592"/>
           </a:xfrm>
           <a:prstGeom prst="rect">
@@ -9604,13 +10586,13 @@
       </p:sp>
       <p:sp>
         <p:nvSpPr>
-          <p:cNvPr id="173" name="TextBox 172"/>
-          <p:cNvSpPr txBox="1"/>
-          <p:nvPr/>
-        </p:nvSpPr>
-        <p:spPr>
-          <a:xfrm>
-            <a:off x="8823959" y="4015130"/>
+          <p:cNvPr id="199" name="TextBox 198"/>
+          <p:cNvSpPr txBox="1"/>
+          <p:nvPr/>
+        </p:nvSpPr>
+        <p:spPr>
+          <a:xfrm>
+            <a:off x="8823959" y="4777740"/>
             <a:ext cx="594360" cy="164592"/>
           </a:xfrm>
           <a:prstGeom prst="rect">
@@ -9640,13 +10622,13 @@
       </p:sp>
       <p:sp>
         <p:nvSpPr>
-          <p:cNvPr id="174" name="TextBox 173"/>
-          <p:cNvSpPr txBox="1"/>
-          <p:nvPr/>
-        </p:nvSpPr>
-        <p:spPr>
-          <a:xfrm>
-            <a:off x="9418320" y="4015130"/>
+          <p:cNvPr id="200" name="TextBox 199"/>
+          <p:cNvSpPr txBox="1"/>
+          <p:nvPr/>
+        </p:nvSpPr>
+        <p:spPr>
+          <a:xfrm>
+            <a:off x="9418320" y="4777740"/>
             <a:ext cx="502920" cy="164592"/>
           </a:xfrm>
           <a:prstGeom prst="rect">
@@ -9676,13 +10658,13 @@
       </p:sp>
       <p:sp>
         <p:nvSpPr>
-          <p:cNvPr id="175" name="Rectangle 174"/>
+          <p:cNvPr id="201" name="Rectangle 200"/>
           <p:cNvSpPr/>
           <p:nvPr/>
         </p:nvSpPr>
         <p:spPr>
           <a:xfrm>
-            <a:off x="164592" y="4296765"/>
+            <a:off x="164592" y="5059375"/>
             <a:ext cx="109728" cy="109728"/>
           </a:xfrm>
           <a:prstGeom prst="rect">
@@ -9720,13 +10702,13 @@
       </p:sp>
       <p:sp>
         <p:nvSpPr>
-          <p:cNvPr id="176" name="TextBox 175"/>
-          <p:cNvSpPr txBox="1"/>
-          <p:nvPr/>
-        </p:nvSpPr>
-        <p:spPr>
-          <a:xfrm>
-            <a:off x="320040" y="4269333"/>
+          <p:cNvPr id="202" name="TextBox 201"/>
+          <p:cNvSpPr txBox="1"/>
+          <p:nvPr/>
+        </p:nvSpPr>
+        <p:spPr>
+          <a:xfrm>
+            <a:off x="320040" y="5031943"/>
             <a:ext cx="1005840" cy="164592"/>
           </a:xfrm>
           <a:prstGeom prst="rect">
@@ -9756,13 +10738,13 @@
       </p:sp>
       <p:sp>
         <p:nvSpPr>
-          <p:cNvPr id="177" name="TextBox 176"/>
-          <p:cNvSpPr txBox="1"/>
-          <p:nvPr/>
-        </p:nvSpPr>
-        <p:spPr>
-          <a:xfrm>
-            <a:off x="1353312" y="4269333"/>
+          <p:cNvPr id="203" name="TextBox 202"/>
+          <p:cNvSpPr txBox="1"/>
+          <p:nvPr/>
+        </p:nvSpPr>
+        <p:spPr>
+          <a:xfrm>
+            <a:off x="1353312" y="5031943"/>
             <a:ext cx="1508760" cy="164592"/>
           </a:xfrm>
           <a:prstGeom prst="rect">
@@ -9792,13 +10774,13 @@
       </p:sp>
       <p:cxnSp>
         <p:nvCxnSpPr>
-          <p:cNvPr id="178" name="Connector 177"/>
+          <p:cNvPr id="204" name="Connector 203"/>
           <p:cNvCxnSpPr/>
           <p:nvPr/>
         </p:nvCxnSpPr>
         <p:spPr>
           <a:xfrm>
-            <a:off x="3545726" y="4351629"/>
+            <a:off x="3545726" y="5114239"/>
             <a:ext cx="1816188" cy="0"/>
           </a:xfrm>
           <a:prstGeom prst="line">
@@ -9828,13 +10810,13 @@
       </p:cxnSp>
       <p:sp>
         <p:nvSpPr>
-          <p:cNvPr id="179" name="Oval 178"/>
+          <p:cNvPr id="205" name="Oval 204"/>
           <p:cNvSpPr/>
           <p:nvPr/>
         </p:nvSpPr>
         <p:spPr>
           <a:xfrm>
-            <a:off x="4466240" y="4327629"/>
+            <a:off x="4466240" y="5090239"/>
             <a:ext cx="48000" cy="48000"/>
           </a:xfrm>
           <a:prstGeom prst="ellipse">
@@ -9874,13 +10856,13 @@
       </p:sp>
       <p:sp>
         <p:nvSpPr>
-          <p:cNvPr id="180" name="TextBox 179"/>
-          <p:cNvSpPr txBox="1"/>
-          <p:nvPr/>
-        </p:nvSpPr>
-        <p:spPr>
-          <a:xfrm>
-            <a:off x="7086600" y="4269333"/>
+          <p:cNvPr id="206" name="TextBox 205"/>
+          <p:cNvSpPr txBox="1"/>
+          <p:nvPr/>
+        </p:nvSpPr>
+        <p:spPr>
+          <a:xfrm>
+            <a:off x="7086600" y="5031943"/>
             <a:ext cx="457200" cy="164592"/>
           </a:xfrm>
           <a:prstGeom prst="rect">
@@ -9910,13 +10892,13 @@
       </p:sp>
       <p:sp>
         <p:nvSpPr>
-          <p:cNvPr id="181" name="TextBox 180"/>
-          <p:cNvSpPr txBox="1"/>
-          <p:nvPr/>
-        </p:nvSpPr>
-        <p:spPr>
-          <a:xfrm>
-            <a:off x="7589520" y="4269333"/>
+          <p:cNvPr id="207" name="TextBox 206"/>
+          <p:cNvSpPr txBox="1"/>
+          <p:nvPr/>
+        </p:nvSpPr>
+        <p:spPr>
+          <a:xfrm>
+            <a:off x="7589520" y="5031943"/>
             <a:ext cx="868680" cy="164592"/>
           </a:xfrm>
           <a:prstGeom prst="rect">
@@ -9946,13 +10928,13 @@
       </p:sp>
       <p:sp>
         <p:nvSpPr>
-          <p:cNvPr id="182" name="TextBox 181"/>
-          <p:cNvSpPr txBox="1"/>
-          <p:nvPr/>
-        </p:nvSpPr>
-        <p:spPr>
-          <a:xfrm>
-            <a:off x="8458200" y="4269333"/>
+          <p:cNvPr id="208" name="TextBox 207"/>
+          <p:cNvSpPr txBox="1"/>
+          <p:nvPr/>
+        </p:nvSpPr>
+        <p:spPr>
+          <a:xfrm>
+            <a:off x="8458200" y="5031943"/>
             <a:ext cx="365760" cy="164592"/>
           </a:xfrm>
           <a:prstGeom prst="rect">
@@ -9982,13 +10964,13 @@
       </p:sp>
       <p:sp>
         <p:nvSpPr>
-          <p:cNvPr id="183" name="TextBox 182"/>
-          <p:cNvSpPr txBox="1"/>
-          <p:nvPr/>
-        </p:nvSpPr>
-        <p:spPr>
-          <a:xfrm>
-            <a:off x="8823959" y="4269333"/>
+          <p:cNvPr id="209" name="TextBox 208"/>
+          <p:cNvSpPr txBox="1"/>
+          <p:nvPr/>
+        </p:nvSpPr>
+        <p:spPr>
+          <a:xfrm>
+            <a:off x="8823959" y="5031943"/>
             <a:ext cx="594360" cy="164592"/>
           </a:xfrm>
           <a:prstGeom prst="rect">
@@ -10018,13 +11000,13 @@
       </p:sp>
       <p:sp>
         <p:nvSpPr>
-          <p:cNvPr id="184" name="TextBox 183"/>
-          <p:cNvSpPr txBox="1"/>
-          <p:nvPr/>
-        </p:nvSpPr>
-        <p:spPr>
-          <a:xfrm>
-            <a:off x="9418320" y="4269333"/>
+          <p:cNvPr id="210" name="TextBox 209"/>
+          <p:cNvSpPr txBox="1"/>
+          <p:nvPr/>
+        </p:nvSpPr>
+        <p:spPr>
+          <a:xfrm>
+            <a:off x="9418320" y="5031943"/>
             <a:ext cx="502920" cy="164592"/>
           </a:xfrm>
           <a:prstGeom prst="rect">
@@ -10054,13 +11036,13 @@
       </p:sp>
       <p:sp>
         <p:nvSpPr>
-          <p:cNvPr id="185" name="Rectangle 184"/>
+          <p:cNvPr id="211" name="Rectangle 210"/>
           <p:cNvSpPr/>
           <p:nvPr/>
         </p:nvSpPr>
         <p:spPr>
           <a:xfrm>
-            <a:off x="164592" y="4550968"/>
+            <a:off x="164592" y="5313578"/>
             <a:ext cx="109728" cy="109728"/>
           </a:xfrm>
           <a:prstGeom prst="rect">
@@ -10098,13 +11080,13 @@
       </p:sp>
       <p:sp>
         <p:nvSpPr>
-          <p:cNvPr id="186" name="TextBox 185"/>
-          <p:cNvSpPr txBox="1"/>
-          <p:nvPr/>
-        </p:nvSpPr>
-        <p:spPr>
-          <a:xfrm>
-            <a:off x="1353312" y="4523536"/>
+          <p:cNvPr id="212" name="TextBox 211"/>
+          <p:cNvSpPr txBox="1"/>
+          <p:nvPr/>
+        </p:nvSpPr>
+        <p:spPr>
+          <a:xfrm>
+            <a:off x="1353312" y="5286146"/>
             <a:ext cx="1508760" cy="164592"/>
           </a:xfrm>
           <a:prstGeom prst="rect">
@@ -10134,13 +11116,13 @@
       </p:sp>
       <p:cxnSp>
         <p:nvCxnSpPr>
-          <p:cNvPr id="187" name="Connector 186"/>
+          <p:cNvPr id="213" name="Connector 212"/>
           <p:cNvCxnSpPr/>
           <p:nvPr/>
         </p:nvCxnSpPr>
         <p:spPr>
           <a:xfrm>
-            <a:off x="3879123" y="4605832"/>
+            <a:off x="3879123" y="5368442"/>
             <a:ext cx="1425135" cy="0"/>
           </a:xfrm>
           <a:prstGeom prst="line">
@@ -10170,13 +11152,13 @@
       </p:cxnSp>
       <p:sp>
         <p:nvSpPr>
-          <p:cNvPr id="188" name="Oval 187"/>
+          <p:cNvPr id="214" name="Oval 213"/>
           <p:cNvSpPr/>
           <p:nvPr/>
         </p:nvSpPr>
         <p:spPr>
           <a:xfrm>
-            <a:off x="4566544" y="4581832"/>
+            <a:off x="4566544" y="5344442"/>
             <a:ext cx="48000" cy="48000"/>
           </a:xfrm>
           <a:prstGeom prst="ellipse">
@@ -10216,13 +11198,13 @@
       </p:sp>
       <p:sp>
         <p:nvSpPr>
-          <p:cNvPr id="189" name="TextBox 188"/>
-          <p:cNvSpPr txBox="1"/>
-          <p:nvPr/>
-        </p:nvSpPr>
-        <p:spPr>
-          <a:xfrm>
-            <a:off x="7086600" y="4523536"/>
+          <p:cNvPr id="215" name="TextBox 214"/>
+          <p:cNvSpPr txBox="1"/>
+          <p:nvPr/>
+        </p:nvSpPr>
+        <p:spPr>
+          <a:xfrm>
+            <a:off x="7086600" y="5286146"/>
             <a:ext cx="457200" cy="164592"/>
           </a:xfrm>
           <a:prstGeom prst="rect">
@@ -10252,13 +11234,13 @@
       </p:sp>
       <p:sp>
         <p:nvSpPr>
-          <p:cNvPr id="190" name="TextBox 189"/>
-          <p:cNvSpPr txBox="1"/>
-          <p:nvPr/>
-        </p:nvSpPr>
-        <p:spPr>
-          <a:xfrm>
-            <a:off x="7589520" y="4523536"/>
+          <p:cNvPr id="216" name="TextBox 215"/>
+          <p:cNvSpPr txBox="1"/>
+          <p:nvPr/>
+        </p:nvSpPr>
+        <p:spPr>
+          <a:xfrm>
+            <a:off x="7589520" y="5286146"/>
             <a:ext cx="868680" cy="164592"/>
           </a:xfrm>
           <a:prstGeom prst="rect">
@@ -10288,13 +11270,13 @@
       </p:sp>
       <p:sp>
         <p:nvSpPr>
-          <p:cNvPr id="191" name="TextBox 190"/>
-          <p:cNvSpPr txBox="1"/>
-          <p:nvPr/>
-        </p:nvSpPr>
-        <p:spPr>
-          <a:xfrm>
-            <a:off x="8458200" y="4523536"/>
+          <p:cNvPr id="217" name="TextBox 216"/>
+          <p:cNvSpPr txBox="1"/>
+          <p:nvPr/>
+        </p:nvSpPr>
+        <p:spPr>
+          <a:xfrm>
+            <a:off x="8458200" y="5286146"/>
             <a:ext cx="365760" cy="164592"/>
           </a:xfrm>
           <a:prstGeom prst="rect">
@@ -10324,13 +11306,13 @@
       </p:sp>
       <p:sp>
         <p:nvSpPr>
-          <p:cNvPr id="192" name="TextBox 191"/>
-          <p:cNvSpPr txBox="1"/>
-          <p:nvPr/>
-        </p:nvSpPr>
-        <p:spPr>
-          <a:xfrm>
-            <a:off x="8823959" y="4523536"/>
+          <p:cNvPr id="218" name="TextBox 217"/>
+          <p:cNvSpPr txBox="1"/>
+          <p:nvPr/>
+        </p:nvSpPr>
+        <p:spPr>
+          <a:xfrm>
+            <a:off x="8823959" y="5286146"/>
             <a:ext cx="594360" cy="164592"/>
           </a:xfrm>
           <a:prstGeom prst="rect">
@@ -10360,13 +11342,13 @@
       </p:sp>
       <p:sp>
         <p:nvSpPr>
-          <p:cNvPr id="193" name="TextBox 192"/>
-          <p:cNvSpPr txBox="1"/>
-          <p:nvPr/>
-        </p:nvSpPr>
-        <p:spPr>
-          <a:xfrm>
-            <a:off x="9418320" y="4523536"/>
+          <p:cNvPr id="219" name="TextBox 218"/>
+          <p:cNvSpPr txBox="1"/>
+          <p:nvPr/>
+        </p:nvSpPr>
+        <p:spPr>
+          <a:xfrm>
+            <a:off x="9418320" y="5286146"/>
             <a:ext cx="502920" cy="164592"/>
           </a:xfrm>
           <a:prstGeom prst="rect">
@@ -10396,13 +11378,13 @@
       </p:sp>
       <p:sp>
         <p:nvSpPr>
-          <p:cNvPr id="194" name="Rectangle 193"/>
+          <p:cNvPr id="220" name="Rectangle 219"/>
           <p:cNvSpPr/>
           <p:nvPr/>
         </p:nvSpPr>
         <p:spPr>
           <a:xfrm>
-            <a:off x="164592" y="4805172"/>
+            <a:off x="164592" y="5567781"/>
             <a:ext cx="109728" cy="109728"/>
           </a:xfrm>
           <a:prstGeom prst="rect">
@@ -10440,13 +11422,13 @@
       </p:sp>
       <p:sp>
         <p:nvSpPr>
-          <p:cNvPr id="195" name="TextBox 194"/>
-          <p:cNvSpPr txBox="1"/>
-          <p:nvPr/>
-        </p:nvSpPr>
-        <p:spPr>
-          <a:xfrm>
-            <a:off x="1353312" y="4777740"/>
+          <p:cNvPr id="221" name="TextBox 220"/>
+          <p:cNvSpPr txBox="1"/>
+          <p:nvPr/>
+        </p:nvSpPr>
+        <p:spPr>
+          <a:xfrm>
+            <a:off x="1353312" y="5540349"/>
             <a:ext cx="1508760" cy="164592"/>
           </a:xfrm>
           <a:prstGeom prst="rect">
@@ -10476,13 +11458,13 @@
       </p:sp>
       <p:cxnSp>
         <p:nvCxnSpPr>
-          <p:cNvPr id="196" name="Connector 195"/>
+          <p:cNvPr id="222" name="Connector 221"/>
           <p:cNvCxnSpPr/>
           <p:nvPr/>
         </p:nvCxnSpPr>
         <p:spPr>
           <a:xfrm>
-            <a:off x="3591674" y="4860036"/>
+            <a:off x="3591674" y="5622645"/>
             <a:ext cx="1723736" cy="0"/>
           </a:xfrm>
           <a:prstGeom prst="line">
@@ -10512,13 +11494,13 @@
       </p:cxnSp>
       <p:sp>
         <p:nvSpPr>
-          <p:cNvPr id="197" name="Oval 196"/>
+          <p:cNvPr id="223" name="Oval 222"/>
           <p:cNvSpPr/>
           <p:nvPr/>
         </p:nvSpPr>
         <p:spPr>
           <a:xfrm>
-            <a:off x="4490230" y="4836036"/>
+            <a:off x="4490230" y="5598645"/>
             <a:ext cx="48000" cy="48000"/>
           </a:xfrm>
           <a:prstGeom prst="ellipse">
@@ -10558,13 +11540,13 @@
       </p:sp>
       <p:sp>
         <p:nvSpPr>
-          <p:cNvPr id="198" name="TextBox 197"/>
-          <p:cNvSpPr txBox="1"/>
-          <p:nvPr/>
-        </p:nvSpPr>
-        <p:spPr>
-          <a:xfrm>
-            <a:off x="7086600" y="4777740"/>
+          <p:cNvPr id="224" name="TextBox 223"/>
+          <p:cNvSpPr txBox="1"/>
+          <p:nvPr/>
+        </p:nvSpPr>
+        <p:spPr>
+          <a:xfrm>
+            <a:off x="7086600" y="5540349"/>
             <a:ext cx="457200" cy="164592"/>
           </a:xfrm>
           <a:prstGeom prst="rect">
@@ -10594,13 +11576,13 @@
       </p:sp>
       <p:sp>
         <p:nvSpPr>
-          <p:cNvPr id="199" name="TextBox 198"/>
-          <p:cNvSpPr txBox="1"/>
-          <p:nvPr/>
-        </p:nvSpPr>
-        <p:spPr>
-          <a:xfrm>
-            <a:off x="7589520" y="4777740"/>
+          <p:cNvPr id="225" name="TextBox 224"/>
+          <p:cNvSpPr txBox="1"/>
+          <p:nvPr/>
+        </p:nvSpPr>
+        <p:spPr>
+          <a:xfrm>
+            <a:off x="7589520" y="5540349"/>
             <a:ext cx="868680" cy="164592"/>
           </a:xfrm>
           <a:prstGeom prst="rect">
@@ -10630,13 +11612,13 @@
       </p:sp>
       <p:sp>
         <p:nvSpPr>
-          <p:cNvPr id="200" name="TextBox 199"/>
-          <p:cNvSpPr txBox="1"/>
-          <p:nvPr/>
-        </p:nvSpPr>
-        <p:spPr>
-          <a:xfrm>
-            <a:off x="8458200" y="4777740"/>
+          <p:cNvPr id="226" name="TextBox 225"/>
+          <p:cNvSpPr txBox="1"/>
+          <p:nvPr/>
+        </p:nvSpPr>
+        <p:spPr>
+          <a:xfrm>
+            <a:off x="8458200" y="5540349"/>
             <a:ext cx="365760" cy="164592"/>
           </a:xfrm>
           <a:prstGeom prst="rect">
@@ -10666,13 +11648,13 @@
       </p:sp>
       <p:sp>
         <p:nvSpPr>
-          <p:cNvPr id="201" name="TextBox 200"/>
-          <p:cNvSpPr txBox="1"/>
-          <p:nvPr/>
-        </p:nvSpPr>
-        <p:spPr>
-          <a:xfrm>
-            <a:off x="8823959" y="4777740"/>
+          <p:cNvPr id="227" name="TextBox 226"/>
+          <p:cNvSpPr txBox="1"/>
+          <p:nvPr/>
+        </p:nvSpPr>
+        <p:spPr>
+          <a:xfrm>
+            <a:off x="8823959" y="5540349"/>
             <a:ext cx="594360" cy="164592"/>
           </a:xfrm>
           <a:prstGeom prst="rect">
@@ -10702,13 +11684,13 @@
       </p:sp>
       <p:sp>
         <p:nvSpPr>
-          <p:cNvPr id="202" name="TextBox 201"/>
-          <p:cNvSpPr txBox="1"/>
-          <p:nvPr/>
-        </p:nvSpPr>
-        <p:spPr>
-          <a:xfrm>
-            <a:off x="9418320" y="4777740"/>
+          <p:cNvPr id="228" name="TextBox 227"/>
+          <p:cNvSpPr txBox="1"/>
+          <p:nvPr/>
+        </p:nvSpPr>
+        <p:spPr>
+          <a:xfrm>
+            <a:off x="9418320" y="5540349"/>
             <a:ext cx="502920" cy="164592"/>
           </a:xfrm>
           <a:prstGeom prst="rect">
@@ -10738,13 +11720,13 @@
       </p:sp>
       <p:sp>
         <p:nvSpPr>
-          <p:cNvPr id="203" name="Rectangle 202"/>
+          <p:cNvPr id="229" name="Rectangle 228"/>
           <p:cNvSpPr/>
           <p:nvPr/>
         </p:nvSpPr>
         <p:spPr>
           <a:xfrm>
-            <a:off x="164592" y="5059375"/>
+            <a:off x="164592" y="5821984"/>
             <a:ext cx="109728" cy="109728"/>
           </a:xfrm>
           <a:prstGeom prst="rect">
@@ -10782,13 +11764,13 @@
       </p:sp>
       <p:sp>
         <p:nvSpPr>
-          <p:cNvPr id="204" name="TextBox 203"/>
-          <p:cNvSpPr txBox="1"/>
-          <p:nvPr/>
-        </p:nvSpPr>
-        <p:spPr>
-          <a:xfrm>
-            <a:off x="1353312" y="5031943"/>
+          <p:cNvPr id="230" name="TextBox 229"/>
+          <p:cNvSpPr txBox="1"/>
+          <p:nvPr/>
+        </p:nvSpPr>
+        <p:spPr>
+          <a:xfrm>
+            <a:off x="1353312" y="5794552"/>
             <a:ext cx="1508760" cy="164592"/>
           </a:xfrm>
           <a:prstGeom prst="rect">
@@ -10818,13 +11800,13 @@
       </p:sp>
       <p:cxnSp>
         <p:nvCxnSpPr>
-          <p:cNvPr id="205" name="Connector 204"/>
+          <p:cNvPr id="231" name="Connector 230"/>
           <p:cNvCxnSpPr/>
           <p:nvPr/>
         </p:nvCxnSpPr>
         <p:spPr>
           <a:xfrm>
-            <a:off x="4085394" y="5114239"/>
+            <a:off x="4085394" y="5876848"/>
             <a:ext cx="1430694" cy="0"/>
           </a:xfrm>
           <a:prstGeom prst="line">
@@ -10854,13 +11836,13 @@
       </p:cxnSp>
       <p:sp>
         <p:nvSpPr>
-          <p:cNvPr id="206" name="Oval 205"/>
+          <p:cNvPr id="232" name="Oval 231"/>
           <p:cNvSpPr/>
           <p:nvPr/>
         </p:nvSpPr>
         <p:spPr>
           <a:xfrm>
-            <a:off x="4759577" y="5090239"/>
+            <a:off x="4759577" y="5852848"/>
             <a:ext cx="48000" cy="48000"/>
           </a:xfrm>
           <a:prstGeom prst="ellipse">
@@ -10900,13 +11882,13 @@
       </p:sp>
       <p:sp>
         <p:nvSpPr>
-          <p:cNvPr id="207" name="TextBox 206"/>
-          <p:cNvSpPr txBox="1"/>
-          <p:nvPr/>
-        </p:nvSpPr>
-        <p:spPr>
-          <a:xfrm>
-            <a:off x="7086600" y="5031943"/>
+          <p:cNvPr id="233" name="TextBox 232"/>
+          <p:cNvSpPr txBox="1"/>
+          <p:nvPr/>
+        </p:nvSpPr>
+        <p:spPr>
+          <a:xfrm>
+            <a:off x="7086600" y="5794552"/>
             <a:ext cx="457200" cy="164592"/>
           </a:xfrm>
           <a:prstGeom prst="rect">
@@ -10936,13 +11918,13 @@
       </p:sp>
       <p:sp>
         <p:nvSpPr>
-          <p:cNvPr id="208" name="TextBox 207"/>
-          <p:cNvSpPr txBox="1"/>
-          <p:nvPr/>
-        </p:nvSpPr>
-        <p:spPr>
-          <a:xfrm>
-            <a:off x="7589520" y="5031943"/>
+          <p:cNvPr id="234" name="TextBox 233"/>
+          <p:cNvSpPr txBox="1"/>
+          <p:nvPr/>
+        </p:nvSpPr>
+        <p:spPr>
+          <a:xfrm>
+            <a:off x="7589520" y="5794552"/>
             <a:ext cx="868680" cy="164592"/>
           </a:xfrm>
           <a:prstGeom prst="rect">
@@ -10972,13 +11954,13 @@
       </p:sp>
       <p:sp>
         <p:nvSpPr>
-          <p:cNvPr id="209" name="TextBox 208"/>
-          <p:cNvSpPr txBox="1"/>
-          <p:nvPr/>
-        </p:nvSpPr>
-        <p:spPr>
-          <a:xfrm>
-            <a:off x="8458200" y="5031943"/>
+          <p:cNvPr id="235" name="TextBox 234"/>
+          <p:cNvSpPr txBox="1"/>
+          <p:nvPr/>
+        </p:nvSpPr>
+        <p:spPr>
+          <a:xfrm>
+            <a:off x="8458200" y="5794552"/>
             <a:ext cx="365760" cy="164592"/>
           </a:xfrm>
           <a:prstGeom prst="rect">
@@ -11008,13 +11990,13 @@
       </p:sp>
       <p:sp>
         <p:nvSpPr>
-          <p:cNvPr id="210" name="TextBox 209"/>
-          <p:cNvSpPr txBox="1"/>
-          <p:nvPr/>
-        </p:nvSpPr>
-        <p:spPr>
-          <a:xfrm>
-            <a:off x="8823959" y="5031943"/>
+          <p:cNvPr id="236" name="TextBox 235"/>
+          <p:cNvSpPr txBox="1"/>
+          <p:nvPr/>
+        </p:nvSpPr>
+        <p:spPr>
+          <a:xfrm>
+            <a:off x="8823959" y="5794552"/>
             <a:ext cx="594360" cy="164592"/>
           </a:xfrm>
           <a:prstGeom prst="rect">
@@ -11044,13 +12026,13 @@
       </p:sp>
       <p:sp>
         <p:nvSpPr>
-          <p:cNvPr id="211" name="TextBox 210"/>
-          <p:cNvSpPr txBox="1"/>
-          <p:nvPr/>
-        </p:nvSpPr>
-        <p:spPr>
-          <a:xfrm>
-            <a:off x="9418320" y="5031943"/>
+          <p:cNvPr id="237" name="TextBox 236"/>
+          <p:cNvSpPr txBox="1"/>
+          <p:nvPr/>
+        </p:nvSpPr>
+        <p:spPr>
+          <a:xfrm>
+            <a:off x="9418320" y="5794552"/>
             <a:ext cx="502920" cy="164592"/>
           </a:xfrm>
           <a:prstGeom prst="rect">
@@ -11080,13 +12062,13 @@
       </p:sp>
       <p:sp>
         <p:nvSpPr>
-          <p:cNvPr id="212" name="Rectangle 211"/>
+          <p:cNvPr id="238" name="Rectangle 237"/>
           <p:cNvSpPr/>
           <p:nvPr/>
         </p:nvSpPr>
         <p:spPr>
           <a:xfrm>
-            <a:off x="164592" y="5313578"/>
+            <a:off x="164592" y="6076188"/>
             <a:ext cx="109728" cy="109728"/>
           </a:xfrm>
           <a:prstGeom prst="rect">
@@ -11124,13 +12106,13 @@
       </p:sp>
       <p:sp>
         <p:nvSpPr>
-          <p:cNvPr id="213" name="TextBox 212"/>
-          <p:cNvSpPr txBox="1"/>
-          <p:nvPr/>
-        </p:nvSpPr>
-        <p:spPr>
-          <a:xfrm>
-            <a:off x="320040" y="5286146"/>
+          <p:cNvPr id="239" name="TextBox 238"/>
+          <p:cNvSpPr txBox="1"/>
+          <p:nvPr/>
+        </p:nvSpPr>
+        <p:spPr>
+          <a:xfrm>
+            <a:off x="320040" y="6048756"/>
             <a:ext cx="1005840" cy="164592"/>
           </a:xfrm>
           <a:prstGeom prst="rect">
@@ -11160,13 +12142,13 @@
       </p:sp>
       <p:sp>
         <p:nvSpPr>
-          <p:cNvPr id="214" name="TextBox 213"/>
-          <p:cNvSpPr txBox="1"/>
-          <p:nvPr/>
-        </p:nvSpPr>
-        <p:spPr>
-          <a:xfrm>
-            <a:off x="1353312" y="5286146"/>
+          <p:cNvPr id="240" name="TextBox 239"/>
+          <p:cNvSpPr txBox="1"/>
+          <p:nvPr/>
+        </p:nvSpPr>
+        <p:spPr>
+          <a:xfrm>
+            <a:off x="1353312" y="6048756"/>
             <a:ext cx="1508760" cy="164592"/>
           </a:xfrm>
           <a:prstGeom prst="rect">
@@ -11196,13 +12178,13 @@
       </p:sp>
       <p:cxnSp>
         <p:nvCxnSpPr>
-          <p:cNvPr id="215" name="Connector 214"/>
+          <p:cNvPr id="241" name="Connector 240"/>
           <p:cNvCxnSpPr/>
           <p:nvPr/>
         </p:nvCxnSpPr>
         <p:spPr>
           <a:xfrm>
-            <a:off x="4670401" y="5368442"/>
+            <a:off x="4670401" y="6131052"/>
             <a:ext cx="1231945" cy="0"/>
           </a:xfrm>
           <a:prstGeom prst="line">
@@ -11232,13 +12214,13 @@
       </p:cxnSp>
       <p:sp>
         <p:nvSpPr>
-          <p:cNvPr id="216" name="Oval 215"/>
+          <p:cNvPr id="242" name="Oval 241"/>
           <p:cNvSpPr/>
           <p:nvPr/>
         </p:nvSpPr>
         <p:spPr>
           <a:xfrm>
-            <a:off x="5244212" y="5344442"/>
+            <a:off x="5244212" y="6107052"/>
             <a:ext cx="48000" cy="48000"/>
           </a:xfrm>
           <a:prstGeom prst="ellipse">
@@ -11278,13 +12260,13 @@
       </p:sp>
       <p:sp>
         <p:nvSpPr>
-          <p:cNvPr id="217" name="TextBox 216"/>
-          <p:cNvSpPr txBox="1"/>
-          <p:nvPr/>
-        </p:nvSpPr>
-        <p:spPr>
-          <a:xfrm>
-            <a:off x="7086600" y="5286146"/>
+          <p:cNvPr id="243" name="TextBox 242"/>
+          <p:cNvSpPr txBox="1"/>
+          <p:nvPr/>
+        </p:nvSpPr>
+        <p:spPr>
+          <a:xfrm>
+            <a:off x="7086600" y="6048756"/>
             <a:ext cx="457200" cy="164592"/>
           </a:xfrm>
           <a:prstGeom prst="rect">
@@ -11314,13 +12296,13 @@
       </p:sp>
       <p:sp>
         <p:nvSpPr>
-          <p:cNvPr id="218" name="TextBox 217"/>
-          <p:cNvSpPr txBox="1"/>
-          <p:nvPr/>
-        </p:nvSpPr>
-        <p:spPr>
-          <a:xfrm>
-            <a:off x="7589520" y="5286146"/>
+          <p:cNvPr id="244" name="TextBox 243"/>
+          <p:cNvSpPr txBox="1"/>
+          <p:nvPr/>
+        </p:nvSpPr>
+        <p:spPr>
+          <a:xfrm>
+            <a:off x="7589520" y="6048756"/>
             <a:ext cx="868680" cy="164592"/>
           </a:xfrm>
           <a:prstGeom prst="rect">
@@ -11350,13 +12332,13 @@
       </p:sp>
       <p:sp>
         <p:nvSpPr>
-          <p:cNvPr id="219" name="TextBox 218"/>
-          <p:cNvSpPr txBox="1"/>
-          <p:nvPr/>
-        </p:nvSpPr>
-        <p:spPr>
-          <a:xfrm>
-            <a:off x="8458200" y="5286146"/>
+          <p:cNvPr id="245" name="TextBox 244"/>
+          <p:cNvSpPr txBox="1"/>
+          <p:nvPr/>
+        </p:nvSpPr>
+        <p:spPr>
+          <a:xfrm>
+            <a:off x="8458200" y="6048756"/>
             <a:ext cx="365760" cy="164592"/>
           </a:xfrm>
           <a:prstGeom prst="rect">
@@ -11386,13 +12368,13 @@
       </p:sp>
       <p:sp>
         <p:nvSpPr>
-          <p:cNvPr id="220" name="TextBox 219"/>
-          <p:cNvSpPr txBox="1"/>
-          <p:nvPr/>
-        </p:nvSpPr>
-        <p:spPr>
-          <a:xfrm>
-            <a:off x="8823959" y="5286146"/>
+          <p:cNvPr id="246" name="TextBox 245"/>
+          <p:cNvSpPr txBox="1"/>
+          <p:nvPr/>
+        </p:nvSpPr>
+        <p:spPr>
+          <a:xfrm>
+            <a:off x="8823959" y="6048756"/>
             <a:ext cx="594360" cy="164592"/>
           </a:xfrm>
           <a:prstGeom prst="rect">
@@ -11422,13 +12404,13 @@
       </p:sp>
       <p:sp>
         <p:nvSpPr>
-          <p:cNvPr id="221" name="TextBox 220"/>
-          <p:cNvSpPr txBox="1"/>
-          <p:nvPr/>
-        </p:nvSpPr>
-        <p:spPr>
-          <a:xfrm>
-            <a:off x="9418320" y="5286146"/>
+          <p:cNvPr id="247" name="TextBox 246"/>
+          <p:cNvSpPr txBox="1"/>
+          <p:nvPr/>
+        </p:nvSpPr>
+        <p:spPr>
+          <a:xfrm>
+            <a:off x="9418320" y="6048756"/>
             <a:ext cx="502920" cy="164592"/>
           </a:xfrm>
           <a:prstGeom prst="rect">
@@ -11458,13 +12440,13 @@
       </p:sp>
       <p:sp>
         <p:nvSpPr>
-          <p:cNvPr id="222" name="Rectangle 221"/>
+          <p:cNvPr id="248" name="Rectangle 247"/>
           <p:cNvSpPr/>
           <p:nvPr/>
         </p:nvSpPr>
         <p:spPr>
           <a:xfrm>
-            <a:off x="164592" y="5567781"/>
+            <a:off x="164592" y="6330391"/>
             <a:ext cx="109728" cy="109728"/>
           </a:xfrm>
           <a:prstGeom prst="rect">
@@ -11502,13 +12484,13 @@
       </p:sp>
       <p:sp>
         <p:nvSpPr>
-          <p:cNvPr id="223" name="TextBox 222"/>
-          <p:cNvSpPr txBox="1"/>
-          <p:nvPr/>
-        </p:nvSpPr>
-        <p:spPr>
-          <a:xfrm>
-            <a:off x="320040" y="5540349"/>
+          <p:cNvPr id="249" name="TextBox 248"/>
+          <p:cNvSpPr txBox="1"/>
+          <p:nvPr/>
+        </p:nvSpPr>
+        <p:spPr>
+          <a:xfrm>
+            <a:off x="320040" y="6302959"/>
             <a:ext cx="1005840" cy="164592"/>
           </a:xfrm>
           <a:prstGeom prst="rect">
@@ -11538,13 +12520,13 @@
       </p:sp>
       <p:sp>
         <p:nvSpPr>
-          <p:cNvPr id="224" name="TextBox 223"/>
-          <p:cNvSpPr txBox="1"/>
-          <p:nvPr/>
-        </p:nvSpPr>
-        <p:spPr>
-          <a:xfrm>
-            <a:off x="1353312" y="5540349"/>
+          <p:cNvPr id="250" name="TextBox 249"/>
+          <p:cNvSpPr txBox="1"/>
+          <p:nvPr/>
+        </p:nvSpPr>
+        <p:spPr>
+          <a:xfrm>
+            <a:off x="1353312" y="6302959"/>
             <a:ext cx="1508760" cy="164592"/>
           </a:xfrm>
           <a:prstGeom prst="rect">
@@ -11574,13 +12556,13 @@
       </p:sp>
       <p:cxnSp>
         <p:nvCxnSpPr>
-          <p:cNvPr id="225" name="Connector 224"/>
+          <p:cNvPr id="251" name="Connector 250"/>
           <p:cNvCxnSpPr/>
           <p:nvPr/>
         </p:nvCxnSpPr>
         <p:spPr>
           <a:xfrm>
-            <a:off x="4880841" y="5622645"/>
+            <a:off x="4880841" y="6385255"/>
             <a:ext cx="723008" cy="0"/>
           </a:xfrm>
           <a:prstGeom prst="line">
@@ -11610,13 +12592,13 @@
       </p:cxnSp>
       <p:sp>
         <p:nvSpPr>
-          <p:cNvPr id="226" name="Oval 225"/>
+          <p:cNvPr id="252" name="Oval 251"/>
           <p:cNvSpPr/>
           <p:nvPr/>
         </p:nvSpPr>
         <p:spPr>
           <a:xfrm>
-            <a:off x="5198594" y="5598645"/>
+            <a:off x="5198594" y="6361255"/>
             <a:ext cx="48000" cy="48000"/>
           </a:xfrm>
           <a:prstGeom prst="ellipse">
@@ -11656,13 +12638,13 @@
       </p:sp>
       <p:sp>
         <p:nvSpPr>
-          <p:cNvPr id="227" name="TextBox 226"/>
-          <p:cNvSpPr txBox="1"/>
-          <p:nvPr/>
-        </p:nvSpPr>
-        <p:spPr>
-          <a:xfrm>
-            <a:off x="7086600" y="5540349"/>
+          <p:cNvPr id="253" name="TextBox 252"/>
+          <p:cNvSpPr txBox="1"/>
+          <p:nvPr/>
+        </p:nvSpPr>
+        <p:spPr>
+          <a:xfrm>
+            <a:off x="7086600" y="6302959"/>
             <a:ext cx="457200" cy="164592"/>
           </a:xfrm>
           <a:prstGeom prst="rect">
@@ -11692,13 +12674,13 @@
       </p:sp>
       <p:sp>
         <p:nvSpPr>
-          <p:cNvPr id="228" name="TextBox 227"/>
-          <p:cNvSpPr txBox="1"/>
-          <p:nvPr/>
-        </p:nvSpPr>
-        <p:spPr>
-          <a:xfrm>
-            <a:off x="7589520" y="5540349"/>
+          <p:cNvPr id="254" name="TextBox 253"/>
+          <p:cNvSpPr txBox="1"/>
+          <p:nvPr/>
+        </p:nvSpPr>
+        <p:spPr>
+          <a:xfrm>
+            <a:off x="7589520" y="6302959"/>
             <a:ext cx="868680" cy="164592"/>
           </a:xfrm>
           <a:prstGeom prst="rect">
@@ -11728,13 +12710,13 @@
       </p:sp>
       <p:sp>
         <p:nvSpPr>
-          <p:cNvPr id="229" name="TextBox 228"/>
-          <p:cNvSpPr txBox="1"/>
-          <p:nvPr/>
-        </p:nvSpPr>
-        <p:spPr>
-          <a:xfrm>
-            <a:off x="8458200" y="5540349"/>
+          <p:cNvPr id="255" name="TextBox 254"/>
+          <p:cNvSpPr txBox="1"/>
+          <p:nvPr/>
+        </p:nvSpPr>
+        <p:spPr>
+          <a:xfrm>
+            <a:off x="8458200" y="6302959"/>
             <a:ext cx="365760" cy="164592"/>
           </a:xfrm>
           <a:prstGeom prst="rect">
@@ -11764,13 +12746,13 @@
       </p:sp>
       <p:sp>
         <p:nvSpPr>
-          <p:cNvPr id="230" name="TextBox 229"/>
-          <p:cNvSpPr txBox="1"/>
-          <p:nvPr/>
-        </p:nvSpPr>
-        <p:spPr>
-          <a:xfrm>
-            <a:off x="8823959" y="5540349"/>
+          <p:cNvPr id="256" name="TextBox 255"/>
+          <p:cNvSpPr txBox="1"/>
+          <p:nvPr/>
+        </p:nvSpPr>
+        <p:spPr>
+          <a:xfrm>
+            <a:off x="8823959" y="6302959"/>
             <a:ext cx="594360" cy="164592"/>
           </a:xfrm>
           <a:prstGeom prst="rect">
@@ -11800,13 +12782,13 @@
       </p:sp>
       <p:sp>
         <p:nvSpPr>
-          <p:cNvPr id="231" name="TextBox 230"/>
-          <p:cNvSpPr txBox="1"/>
-          <p:nvPr/>
-        </p:nvSpPr>
-        <p:spPr>
-          <a:xfrm>
-            <a:off x="9418320" y="5540349"/>
+          <p:cNvPr id="257" name="TextBox 256"/>
+          <p:cNvSpPr txBox="1"/>
+          <p:nvPr/>
+        </p:nvSpPr>
+        <p:spPr>
+          <a:xfrm>
+            <a:off x="9418320" y="6302959"/>
             <a:ext cx="502920" cy="164592"/>
           </a:xfrm>
           <a:prstGeom prst="rect">
@@ -11836,13 +12818,13 @@
       </p:sp>
       <p:sp>
         <p:nvSpPr>
-          <p:cNvPr id="232" name="Rectangle 231"/>
+          <p:cNvPr id="258" name="Rectangle 257"/>
           <p:cNvSpPr/>
           <p:nvPr/>
         </p:nvSpPr>
         <p:spPr>
           <a:xfrm>
-            <a:off x="164592" y="5821984"/>
+            <a:off x="164592" y="6584594"/>
             <a:ext cx="109728" cy="109728"/>
           </a:xfrm>
           <a:prstGeom prst="rect">
@@ -11880,13 +12862,13 @@
       </p:sp>
       <p:sp>
         <p:nvSpPr>
-          <p:cNvPr id="233" name="TextBox 232"/>
-          <p:cNvSpPr txBox="1"/>
-          <p:nvPr/>
-        </p:nvSpPr>
-        <p:spPr>
-          <a:xfrm>
-            <a:off x="1353312" y="5794552"/>
+          <p:cNvPr id="259" name="TextBox 258"/>
+          <p:cNvSpPr txBox="1"/>
+          <p:nvPr/>
+        </p:nvSpPr>
+        <p:spPr>
+          <a:xfrm>
+            <a:off x="1353312" y="6557162"/>
             <a:ext cx="1508760" cy="164592"/>
           </a:xfrm>
           <a:prstGeom prst="rect">
@@ -11916,13 +12898,13 @@
       </p:sp>
       <p:cxnSp>
         <p:nvCxnSpPr>
-          <p:cNvPr id="234" name="Connector 233"/>
+          <p:cNvPr id="260" name="Connector 259"/>
           <p:cNvCxnSpPr/>
           <p:nvPr/>
         </p:nvCxnSpPr>
         <p:spPr>
           <a:xfrm>
-            <a:off x="4508515" y="5876848"/>
+            <a:off x="4508515" y="6639458"/>
             <a:ext cx="1735323" cy="0"/>
           </a:xfrm>
           <a:prstGeom prst="line">
@@ -11952,13 +12934,13 @@
       </p:cxnSp>
       <p:sp>
         <p:nvSpPr>
-          <p:cNvPr id="235" name="Oval 234"/>
+          <p:cNvPr id="261" name="Oval 260"/>
           <p:cNvSpPr/>
           <p:nvPr/>
         </p:nvSpPr>
         <p:spPr>
           <a:xfrm>
-            <a:off x="5328273" y="5852848"/>
+            <a:off x="5328273" y="6615458"/>
             <a:ext cx="48000" cy="48000"/>
           </a:xfrm>
           <a:prstGeom prst="ellipse">
@@ -11998,1069 +12980,7 @@
       </p:sp>
       <p:sp>
         <p:nvSpPr>
-          <p:cNvPr id="236" name="TextBox 235"/>
-          <p:cNvSpPr txBox="1"/>
-          <p:nvPr/>
-        </p:nvSpPr>
-        <p:spPr>
-          <a:xfrm>
-            <a:off x="7086600" y="5794552"/>
-            <a:ext cx="457200" cy="164592"/>
-          </a:xfrm>
-          <a:prstGeom prst="rect">
-            <a:avLst/>
-          </a:prstGeom>
-          <a:noFill/>
-          <a:effectLst/>
-        </p:spPr>
-        <p:txBody>
-          <a:bodyPr wrap="square" lIns="0" rIns="0" tIns="0" bIns="0" anchor="ctr">
-            <a:spAutoFit/>
-          </a:bodyPr>
-          <a:lstStyle/>
-          <a:p>
-            <a:pPr algn="ctr"/>
-            <a:r>
-              <a:rPr sz="700" b="0" i="0">
-                <a:solidFill>
-                  <a:srgbClr val="222222"/>
-                </a:solidFill>
-                <a:latin typeface="Arial"/>
-              </a:rPr>
-              <a:t>+0.25</a:t>
-            </a:r>
-          </a:p>
-        </p:txBody>
-      </p:sp>
-      <p:sp>
-        <p:nvSpPr>
-          <p:cNvPr id="237" name="TextBox 236"/>
-          <p:cNvSpPr txBox="1"/>
-          <p:nvPr/>
-        </p:nvSpPr>
-        <p:spPr>
-          <a:xfrm>
-            <a:off x="7589520" y="5794552"/>
-            <a:ext cx="868680" cy="164592"/>
-          </a:xfrm>
-          <a:prstGeom prst="rect">
-            <a:avLst/>
-          </a:prstGeom>
-          <a:noFill/>
-          <a:effectLst/>
-        </p:spPr>
-        <p:txBody>
-          <a:bodyPr wrap="square" lIns="0" rIns="0" tIns="0" bIns="0" anchor="ctr">
-            <a:spAutoFit/>
-          </a:bodyPr>
-          <a:lstStyle/>
-          <a:p>
-            <a:pPr algn="ctr"/>
-            <a:r>
-              <a:rPr sz="700" b="0" i="0">
-                <a:solidFill>
-                  <a:srgbClr val="222222"/>
-                </a:solidFill>
-                <a:latin typeface="Arial"/>
-              </a:rPr>
-              <a:t>[-0.23, +0.77]</a:t>
-            </a:r>
-          </a:p>
-        </p:txBody>
-      </p:sp>
-      <p:sp>
-        <p:nvSpPr>
-          <p:cNvPr id="238" name="TextBox 237"/>
-          <p:cNvSpPr txBox="1"/>
-          <p:nvPr/>
-        </p:nvSpPr>
-        <p:spPr>
-          <a:xfrm>
-            <a:off x="8458200" y="5794552"/>
-            <a:ext cx="365760" cy="164592"/>
-          </a:xfrm>
-          <a:prstGeom prst="rect">
-            <a:avLst/>
-          </a:prstGeom>
-          <a:noFill/>
-          <a:effectLst/>
-        </p:spPr>
-        <p:txBody>
-          <a:bodyPr wrap="square" lIns="0" rIns="0" tIns="0" bIns="0" anchor="ctr">
-            <a:spAutoFit/>
-          </a:bodyPr>
-          <a:lstStyle/>
-          <a:p>
-            <a:pPr algn="ctr"/>
-            <a:r>
-              <a:rPr sz="700" b="0" i="0">
-                <a:solidFill>
-                  <a:srgbClr val="222222"/>
-                </a:solidFill>
-                <a:latin typeface="Arial"/>
-              </a:rPr>
-              <a:t>159</a:t>
-            </a:r>
-          </a:p>
-        </p:txBody>
-      </p:sp>
-      <p:sp>
-        <p:nvSpPr>
-          <p:cNvPr id="239" name="TextBox 238"/>
-          <p:cNvSpPr txBox="1"/>
-          <p:nvPr/>
-        </p:nvSpPr>
-        <p:spPr>
-          <a:xfrm>
-            <a:off x="8823959" y="5794552"/>
-            <a:ext cx="594360" cy="164592"/>
-          </a:xfrm>
-          <a:prstGeom prst="rect">
-            <a:avLst/>
-          </a:prstGeom>
-          <a:noFill/>
-          <a:effectLst/>
-        </p:spPr>
-        <p:txBody>
-          <a:bodyPr wrap="square" lIns="0" rIns="0" tIns="0" bIns="0" anchor="ctr">
-            <a:spAutoFit/>
-          </a:bodyPr>
-          <a:lstStyle/>
-          <a:p>
-            <a:pPr algn="ctr"/>
-            <a:r>
-              <a:rPr sz="700" b="0" i="0">
-                <a:solidFill>
-                  <a:srgbClr val="222222"/>
-                </a:solidFill>
-                <a:latin typeface="Arial"/>
-              </a:rPr>
-              <a:t>0.418</a:t>
-            </a:r>
-          </a:p>
-        </p:txBody>
-      </p:sp>
-      <p:sp>
-        <p:nvSpPr>
-          <p:cNvPr id="240" name="TextBox 239"/>
-          <p:cNvSpPr txBox="1"/>
-          <p:nvPr/>
-        </p:nvSpPr>
-        <p:spPr>
-          <a:xfrm>
-            <a:off x="9418320" y="5794552"/>
-            <a:ext cx="502920" cy="164592"/>
-          </a:xfrm>
-          <a:prstGeom prst="rect">
-            <a:avLst/>
-          </a:prstGeom>
-          <a:noFill/>
-          <a:effectLst/>
-        </p:spPr>
-        <p:txBody>
-          <a:bodyPr wrap="square" lIns="0" rIns="0" tIns="0" bIns="0" anchor="ctr">
-            <a:spAutoFit/>
-          </a:bodyPr>
-          <a:lstStyle/>
-          <a:p>
-            <a:pPr algn="ctr"/>
-            <a:r>
-              <a:rPr sz="700" b="0" i="0">
-                <a:solidFill>
-                  <a:srgbClr val="222222"/>
-                </a:solidFill>
-                <a:latin typeface="Arial"/>
-              </a:rPr>
-              <a:t>0.87</a:t>
-            </a:r>
-          </a:p>
-        </p:txBody>
-      </p:sp>
-      <p:sp>
-        <p:nvSpPr>
-          <p:cNvPr id="241" name="Rectangle 240"/>
-          <p:cNvSpPr/>
-          <p:nvPr/>
-        </p:nvSpPr>
-        <p:spPr>
-          <a:xfrm>
-            <a:off x="164592" y="6076188"/>
-            <a:ext cx="109728" cy="109728"/>
-          </a:xfrm>
-          <a:prstGeom prst="rect">
-            <a:avLst/>
-          </a:prstGeom>
-          <a:solidFill>
-            <a:srgbClr val="B58900"/>
-          </a:solidFill>
-          <a:ln>
-            <a:noFill/>
-          </a:ln>
-          <a:effectLst/>
-        </p:spPr>
-        <p:style>
-          <a:lnRef idx="1">
-            <a:schemeClr val="accent1"/>
-          </a:lnRef>
-          <a:fillRef idx="3">
-            <a:schemeClr val="accent1"/>
-          </a:fillRef>
-          <a:effectRef idx="2">
-            <a:schemeClr val="accent1"/>
-          </a:effectRef>
-          <a:fontRef idx="minor">
-            <a:schemeClr val="lt1"/>
-          </a:fontRef>
-        </p:style>
-        <p:txBody>
-          <a:bodyPr rtlCol="0" anchor="ctr"/>
-          <a:lstStyle/>
-          <a:p>
-            <a:pPr algn="ctr"/>
-          </a:p>
-        </p:txBody>
-      </p:sp>
-      <p:sp>
-        <p:nvSpPr>
-          <p:cNvPr id="242" name="TextBox 241"/>
-          <p:cNvSpPr txBox="1"/>
-          <p:nvPr/>
-        </p:nvSpPr>
-        <p:spPr>
-          <a:xfrm>
-            <a:off x="320040" y="6048756"/>
-            <a:ext cx="1005840" cy="164592"/>
-          </a:xfrm>
-          <a:prstGeom prst="rect">
-            <a:avLst/>
-          </a:prstGeom>
-          <a:noFill/>
-          <a:effectLst/>
-        </p:spPr>
-        <p:txBody>
-          <a:bodyPr wrap="square" lIns="0" rIns="0" tIns="0" bIns="0" anchor="ctr">
-            <a:spAutoFit/>
-          </a:bodyPr>
-          <a:lstStyle/>
-          <a:p>
-            <a:pPr algn="l"/>
-            <a:r>
-              <a:rPr sz="700" b="1" i="1">
-                <a:solidFill>
-                  <a:srgbClr val="B58900"/>
-                </a:solidFill>
-                <a:latin typeface="Arial"/>
-              </a:rPr>
-              <a:t>Purified immune</a:t>
-            </a:r>
-          </a:p>
-        </p:txBody>
-      </p:sp>
-      <p:sp>
-        <p:nvSpPr>
-          <p:cNvPr id="243" name="TextBox 242"/>
-          <p:cNvSpPr txBox="1"/>
-          <p:nvPr/>
-        </p:nvSpPr>
-        <p:spPr>
-          <a:xfrm>
-            <a:off x="1353312" y="6048756"/>
-            <a:ext cx="1508760" cy="164592"/>
-          </a:xfrm>
-          <a:prstGeom prst="rect">
-            <a:avLst/>
-          </a:prstGeom>
-          <a:noFill/>
-          <a:effectLst/>
-        </p:spPr>
-        <p:txBody>
-          <a:bodyPr wrap="square" lIns="0" rIns="0" tIns="0" bIns="0" anchor="ctr">
-            <a:spAutoFit/>
-          </a:bodyPr>
-          <a:lstStyle/>
-          <a:p>
-            <a:pPr algn="r"/>
-            <a:r>
-              <a:rPr sz="800" b="1" i="0">
-                <a:solidFill>
-                  <a:srgbClr val="B58900"/>
-                </a:solidFill>
-                <a:latin typeface="Arial"/>
-              </a:rPr>
-              <a:t>B-cell infiltration ★</a:t>
-            </a:r>
-          </a:p>
-        </p:txBody>
-      </p:sp>
-      <p:cxnSp>
-        <p:nvCxnSpPr>
-          <p:cNvPr id="244" name="Connector 243"/>
-          <p:cNvCxnSpPr/>
-          <p:nvPr/>
-        </p:nvCxnSpPr>
-        <p:spPr>
-          <a:xfrm>
-            <a:off x="4093107" y="6131052"/>
-            <a:ext cx="2282269" cy="0"/>
-          </a:xfrm>
-          <a:prstGeom prst="line">
-            <a:avLst/>
-          </a:prstGeom>
-          <a:ln w="22860">
-            <a:solidFill>
-              <a:srgbClr val="B58900"/>
-            </a:solidFill>
-          </a:ln>
-          <a:effectLst/>
-        </p:spPr>
-        <p:style>
-          <a:lnRef idx="2">
-            <a:schemeClr val="accent1"/>
-          </a:lnRef>
-          <a:fillRef idx="0">
-            <a:schemeClr val="accent1"/>
-          </a:fillRef>
-          <a:effectRef idx="1">
-            <a:schemeClr val="accent1"/>
-          </a:effectRef>
-          <a:fontRef idx="minor">
-            <a:schemeClr val="tx1"/>
-          </a:fontRef>
-        </p:style>
-      </p:cxnSp>
-      <p:sp>
-        <p:nvSpPr>
-          <p:cNvPr id="245" name="Oval 244"/>
-          <p:cNvSpPr/>
-          <p:nvPr/>
-        </p:nvSpPr>
-        <p:spPr>
-          <a:xfrm>
-            <a:off x="5204257" y="6107052"/>
-            <a:ext cx="48000" cy="48000"/>
-          </a:xfrm>
-          <a:prstGeom prst="ellipse">
-            <a:avLst/>
-          </a:prstGeom>
-          <a:solidFill>
-            <a:srgbClr val="B58900"/>
-          </a:solidFill>
-          <a:ln w="16510">
-            <a:solidFill>
-              <a:srgbClr val="B58900"/>
-            </a:solidFill>
-          </a:ln>
-          <a:effectLst/>
-        </p:spPr>
-        <p:style>
-          <a:lnRef idx="1">
-            <a:schemeClr val="accent1"/>
-          </a:lnRef>
-          <a:fillRef idx="3">
-            <a:schemeClr val="accent1"/>
-          </a:fillRef>
-          <a:effectRef idx="2">
-            <a:schemeClr val="accent1"/>
-          </a:effectRef>
-          <a:fontRef idx="minor">
-            <a:schemeClr val="lt1"/>
-          </a:fontRef>
-        </p:style>
-        <p:txBody>
-          <a:bodyPr rtlCol="0" anchor="ctr"/>
-          <a:lstStyle/>
-          <a:p>
-            <a:pPr algn="ctr"/>
-          </a:p>
-        </p:txBody>
-      </p:sp>
-      <p:sp>
-        <p:nvSpPr>
-          <p:cNvPr id="246" name="TextBox 245"/>
-          <p:cNvSpPr txBox="1"/>
-          <p:nvPr/>
-        </p:nvSpPr>
-        <p:spPr>
-          <a:xfrm>
-            <a:off x="7086600" y="6048756"/>
-            <a:ext cx="457200" cy="164592"/>
-          </a:xfrm>
-          <a:prstGeom prst="rect">
-            <a:avLst/>
-          </a:prstGeom>
-          <a:noFill/>
-          <a:effectLst/>
-        </p:spPr>
-        <p:txBody>
-          <a:bodyPr wrap="square" lIns="0" rIns="0" tIns="0" bIns="0" anchor="ctr">
-            <a:spAutoFit/>
-          </a:bodyPr>
-          <a:lstStyle/>
-          <a:p>
-            <a:pPr algn="ctr"/>
-            <a:r>
-              <a:rPr sz="700" b="0" i="0">
-                <a:solidFill>
-                  <a:srgbClr val="222222"/>
-                </a:solidFill>
-                <a:latin typeface="Arial"/>
-              </a:rPr>
-              <a:t>+0.18</a:t>
-            </a:r>
-          </a:p>
-        </p:txBody>
-      </p:sp>
-      <p:sp>
-        <p:nvSpPr>
-          <p:cNvPr id="247" name="TextBox 246"/>
-          <p:cNvSpPr txBox="1"/>
-          <p:nvPr/>
-        </p:nvSpPr>
-        <p:spPr>
-          <a:xfrm>
-            <a:off x="7589520" y="6048756"/>
-            <a:ext cx="868680" cy="164592"/>
-          </a:xfrm>
-          <a:prstGeom prst="rect">
-            <a:avLst/>
-          </a:prstGeom>
-          <a:noFill/>
-          <a:effectLst/>
-        </p:spPr>
-        <p:txBody>
-          <a:bodyPr wrap="square" lIns="0" rIns="0" tIns="0" bIns="0" anchor="ctr">
-            <a:spAutoFit/>
-          </a:bodyPr>
-          <a:lstStyle/>
-          <a:p>
-            <a:pPr algn="ctr"/>
-            <a:r>
-              <a:rPr sz="700" b="0" i="0">
-                <a:solidFill>
-                  <a:srgbClr val="222222"/>
-                </a:solidFill>
-                <a:latin typeface="Arial"/>
-              </a:rPr>
-              <a:t>[-0.47, +0.84]</a:t>
-            </a:r>
-          </a:p>
-        </p:txBody>
-      </p:sp>
-      <p:sp>
-        <p:nvSpPr>
-          <p:cNvPr id="248" name="TextBox 247"/>
-          <p:cNvSpPr txBox="1"/>
-          <p:nvPr/>
-        </p:nvSpPr>
-        <p:spPr>
-          <a:xfrm>
-            <a:off x="8458200" y="6048756"/>
-            <a:ext cx="365760" cy="164592"/>
-          </a:xfrm>
-          <a:prstGeom prst="rect">
-            <a:avLst/>
-          </a:prstGeom>
-          <a:noFill/>
-          <a:effectLst/>
-        </p:spPr>
-        <p:txBody>
-          <a:bodyPr wrap="square" lIns="0" rIns="0" tIns="0" bIns="0" anchor="ctr">
-            <a:spAutoFit/>
-          </a:bodyPr>
-          <a:lstStyle/>
-          <a:p>
-            <a:pPr algn="ctr"/>
-            <a:r>
-              <a:rPr sz="700" b="0" i="0">
-                <a:solidFill>
-                  <a:srgbClr val="222222"/>
-                </a:solidFill>
-                <a:latin typeface="Arial"/>
-              </a:rPr>
-              <a:t>155</a:t>
-            </a:r>
-          </a:p>
-        </p:txBody>
-      </p:sp>
-      <p:sp>
-        <p:nvSpPr>
-          <p:cNvPr id="249" name="TextBox 248"/>
-          <p:cNvSpPr txBox="1"/>
-          <p:nvPr/>
-        </p:nvSpPr>
-        <p:spPr>
-          <a:xfrm>
-            <a:off x="8823959" y="6048756"/>
-            <a:ext cx="594360" cy="164592"/>
-          </a:xfrm>
-          <a:prstGeom prst="rect">
-            <a:avLst/>
-          </a:prstGeom>
-          <a:noFill/>
-          <a:effectLst/>
-        </p:spPr>
-        <p:txBody>
-          <a:bodyPr wrap="square" lIns="0" rIns="0" tIns="0" bIns="0" anchor="ctr">
-            <a:spAutoFit/>
-          </a:bodyPr>
-          <a:lstStyle/>
-          <a:p>
-            <a:pPr algn="ctr"/>
-            <a:r>
-              <a:rPr sz="700" b="0" i="0">
-                <a:solidFill>
-                  <a:srgbClr val="222222"/>
-                </a:solidFill>
-                <a:latin typeface="Arial"/>
-              </a:rPr>
-              <a:t>0.505</a:t>
-            </a:r>
-          </a:p>
-        </p:txBody>
-      </p:sp>
-      <p:sp>
-        <p:nvSpPr>
-          <p:cNvPr id="250" name="TextBox 249"/>
-          <p:cNvSpPr txBox="1"/>
-          <p:nvPr/>
-        </p:nvSpPr>
-        <p:spPr>
-          <a:xfrm>
-            <a:off x="9418320" y="6048756"/>
-            <a:ext cx="502920" cy="164592"/>
-          </a:xfrm>
-          <a:prstGeom prst="rect">
-            <a:avLst/>
-          </a:prstGeom>
-          <a:noFill/>
-          <a:effectLst/>
-        </p:spPr>
-        <p:txBody>
-          <a:bodyPr wrap="square" lIns="0" rIns="0" tIns="0" bIns="0" anchor="ctr">
-            <a:spAutoFit/>
-          </a:bodyPr>
-          <a:lstStyle/>
-          <a:p>
-            <a:pPr algn="ctr"/>
-            <a:r>
-              <a:rPr sz="700" b="0" i="0">
-                <a:solidFill>
-                  <a:srgbClr val="222222"/>
-                </a:solidFill>
-                <a:latin typeface="Arial"/>
-              </a:rPr>
-              <a:t>0.902</a:t>
-            </a:r>
-          </a:p>
-        </p:txBody>
-      </p:sp>
-      <p:sp>
-        <p:nvSpPr>
-          <p:cNvPr id="251" name="Rectangle 250"/>
-          <p:cNvSpPr/>
-          <p:nvPr/>
-        </p:nvSpPr>
-        <p:spPr>
-          <a:xfrm>
-            <a:off x="164592" y="6330391"/>
-            <a:ext cx="109728" cy="109728"/>
-          </a:xfrm>
-          <a:prstGeom prst="rect">
-            <a:avLst/>
-          </a:prstGeom>
-          <a:solidFill>
-            <a:srgbClr val="B58900"/>
-          </a:solidFill>
-          <a:ln>
-            <a:noFill/>
-          </a:ln>
-          <a:effectLst/>
-        </p:spPr>
-        <p:style>
-          <a:lnRef idx="1">
-            <a:schemeClr val="accent1"/>
-          </a:lnRef>
-          <a:fillRef idx="3">
-            <a:schemeClr val="accent1"/>
-          </a:fillRef>
-          <a:effectRef idx="2">
-            <a:schemeClr val="accent1"/>
-          </a:effectRef>
-          <a:fontRef idx="minor">
-            <a:schemeClr val="lt1"/>
-          </a:fontRef>
-        </p:style>
-        <p:txBody>
-          <a:bodyPr rtlCol="0" anchor="ctr"/>
-          <a:lstStyle/>
-          <a:p>
-            <a:pPr algn="ctr"/>
-          </a:p>
-        </p:txBody>
-      </p:sp>
-      <p:sp>
-        <p:nvSpPr>
-          <p:cNvPr id="252" name="TextBox 251"/>
-          <p:cNvSpPr txBox="1"/>
-          <p:nvPr/>
-        </p:nvSpPr>
-        <p:spPr>
-          <a:xfrm>
-            <a:off x="1353312" y="6302959"/>
-            <a:ext cx="1508760" cy="164592"/>
-          </a:xfrm>
-          <a:prstGeom prst="rect">
-            <a:avLst/>
-          </a:prstGeom>
-          <a:noFill/>
-          <a:effectLst/>
-        </p:spPr>
-        <p:txBody>
-          <a:bodyPr wrap="square" lIns="0" rIns="0" tIns="0" bIns="0" anchor="ctr">
-            <a:spAutoFit/>
-          </a:bodyPr>
-          <a:lstStyle/>
-          <a:p>
-            <a:pPr algn="r"/>
-            <a:r>
-              <a:rPr sz="800" b="1" i="0">
-                <a:solidFill>
-                  <a:srgbClr val="B58900"/>
-                </a:solidFill>
-                <a:latin typeface="Arial"/>
-              </a:rPr>
-              <a:t>CD8 cytotoxic ★</a:t>
-            </a:r>
-          </a:p>
-        </p:txBody>
-      </p:sp>
-      <p:cxnSp>
-        <p:nvCxnSpPr>
-          <p:cNvPr id="253" name="Connector 252"/>
-          <p:cNvCxnSpPr/>
-          <p:nvPr/>
-        </p:nvCxnSpPr>
-        <p:spPr>
-          <a:xfrm>
-            <a:off x="3643146" y="6385255"/>
-            <a:ext cx="2598347" cy="0"/>
-          </a:xfrm>
-          <a:prstGeom prst="line">
-            <a:avLst/>
-          </a:prstGeom>
-          <a:ln w="22860">
-            <a:solidFill>
-              <a:srgbClr val="B58900"/>
-            </a:solidFill>
-          </a:ln>
-          <a:effectLst/>
-        </p:spPr>
-        <p:style>
-          <a:lnRef idx="2">
-            <a:schemeClr val="accent1"/>
-          </a:lnRef>
-          <a:fillRef idx="0">
-            <a:schemeClr val="accent1"/>
-          </a:fillRef>
-          <a:effectRef idx="1">
-            <a:schemeClr val="accent1"/>
-          </a:effectRef>
-          <a:fontRef idx="minor">
-            <a:schemeClr val="tx1"/>
-          </a:fontRef>
-        </p:style>
-      </p:cxnSp>
-      <p:sp>
-        <p:nvSpPr>
-          <p:cNvPr id="254" name="Oval 253"/>
-          <p:cNvSpPr/>
-          <p:nvPr/>
-        </p:nvSpPr>
-        <p:spPr>
-          <a:xfrm>
-            <a:off x="4863825" y="6361255"/>
-            <a:ext cx="48000" cy="48000"/>
-          </a:xfrm>
-          <a:prstGeom prst="ellipse">
-            <a:avLst/>
-          </a:prstGeom>
-          <a:solidFill>
-            <a:srgbClr val="B58900"/>
-          </a:solidFill>
-          <a:ln w="16510">
-            <a:solidFill>
-              <a:srgbClr val="B58900"/>
-            </a:solidFill>
-          </a:ln>
-          <a:effectLst/>
-        </p:spPr>
-        <p:style>
-          <a:lnRef idx="1">
-            <a:schemeClr val="accent1"/>
-          </a:lnRef>
-          <a:fillRef idx="3">
-            <a:schemeClr val="accent1"/>
-          </a:fillRef>
-          <a:effectRef idx="2">
-            <a:schemeClr val="accent1"/>
-          </a:effectRef>
-          <a:fontRef idx="minor">
-            <a:schemeClr val="lt1"/>
-          </a:fontRef>
-        </p:style>
-        <p:txBody>
-          <a:bodyPr rtlCol="0" anchor="ctr"/>
-          <a:lstStyle/>
-          <a:p>
-            <a:pPr algn="ctr"/>
-          </a:p>
-        </p:txBody>
-      </p:sp>
-      <p:sp>
-        <p:nvSpPr>
-          <p:cNvPr id="255" name="TextBox 254"/>
-          <p:cNvSpPr txBox="1"/>
-          <p:nvPr/>
-        </p:nvSpPr>
-        <p:spPr>
-          <a:xfrm>
-            <a:off x="7086600" y="6302959"/>
-            <a:ext cx="457200" cy="164592"/>
-          </a:xfrm>
-          <a:prstGeom prst="rect">
-            <a:avLst/>
-          </a:prstGeom>
-          <a:noFill/>
-          <a:effectLst/>
-        </p:spPr>
-        <p:txBody>
-          <a:bodyPr wrap="square" lIns="0" rIns="0" tIns="0" bIns="0" anchor="ctr">
-            <a:spAutoFit/>
-          </a:bodyPr>
-          <a:lstStyle/>
-          <a:p>
-            <a:pPr algn="ctr"/>
-            <a:r>
-              <a:rPr sz="700" b="0" i="0">
-                <a:solidFill>
-                  <a:srgbClr val="222222"/>
-                </a:solidFill>
-                <a:latin typeface="Arial"/>
-              </a:rPr>
-              <a:t>-0.01</a:t>
-            </a:r>
-          </a:p>
-        </p:txBody>
-      </p:sp>
-      <p:sp>
-        <p:nvSpPr>
-          <p:cNvPr id="256" name="TextBox 255"/>
-          <p:cNvSpPr txBox="1"/>
-          <p:nvPr/>
-        </p:nvSpPr>
-        <p:spPr>
-          <a:xfrm>
-            <a:off x="7589520" y="6302959"/>
-            <a:ext cx="868680" cy="164592"/>
-          </a:xfrm>
-          <a:prstGeom prst="rect">
-            <a:avLst/>
-          </a:prstGeom>
-          <a:noFill/>
-          <a:effectLst/>
-        </p:spPr>
-        <p:txBody>
-          <a:bodyPr wrap="square" lIns="0" rIns="0" tIns="0" bIns="0" anchor="ctr">
-            <a:spAutoFit/>
-          </a:bodyPr>
-          <a:lstStyle/>
-          <a:p>
-            <a:pPr algn="ctr"/>
-            <a:r>
-              <a:rPr sz="700" b="0" i="0">
-                <a:solidFill>
-                  <a:srgbClr val="222222"/>
-                </a:solidFill>
-                <a:latin typeface="Arial"/>
-              </a:rPr>
-              <a:t>[-0.73, +0.77]</a:t>
-            </a:r>
-          </a:p>
-        </p:txBody>
-      </p:sp>
-      <p:sp>
-        <p:nvSpPr>
-          <p:cNvPr id="257" name="TextBox 256"/>
-          <p:cNvSpPr txBox="1"/>
-          <p:nvPr/>
-        </p:nvSpPr>
-        <p:spPr>
-          <a:xfrm>
-            <a:off x="8458200" y="6302959"/>
-            <a:ext cx="365760" cy="164592"/>
-          </a:xfrm>
-          <a:prstGeom prst="rect">
-            <a:avLst/>
-          </a:prstGeom>
-          <a:noFill/>
-          <a:effectLst/>
-        </p:spPr>
-        <p:txBody>
-          <a:bodyPr wrap="square" lIns="0" rIns="0" tIns="0" bIns="0" anchor="ctr">
-            <a:spAutoFit/>
-          </a:bodyPr>
-          <a:lstStyle/>
-          <a:p>
-            <a:pPr algn="ctr"/>
-            <a:r>
-              <a:rPr sz="700" b="0" i="0">
-                <a:solidFill>
-                  <a:srgbClr val="222222"/>
-                </a:solidFill>
-                <a:latin typeface="Arial"/>
-              </a:rPr>
-              <a:t>142</a:t>
-            </a:r>
-          </a:p>
-        </p:txBody>
-      </p:sp>
-      <p:sp>
-        <p:nvSpPr>
-          <p:cNvPr id="258" name="TextBox 257"/>
-          <p:cNvSpPr txBox="1"/>
-          <p:nvPr/>
-        </p:nvSpPr>
-        <p:spPr>
-          <a:xfrm>
-            <a:off x="8823959" y="6302959"/>
-            <a:ext cx="594360" cy="164592"/>
-          </a:xfrm>
-          <a:prstGeom prst="rect">
-            <a:avLst/>
-          </a:prstGeom>
-          <a:noFill/>
-          <a:effectLst/>
-        </p:spPr>
-        <p:txBody>
-          <a:bodyPr wrap="square" lIns="0" rIns="0" tIns="0" bIns="0" anchor="ctr">
-            <a:spAutoFit/>
-          </a:bodyPr>
-          <a:lstStyle/>
-          <a:p>
-            <a:pPr algn="ctr"/>
-            <a:r>
-              <a:rPr sz="700" b="0" i="0">
-                <a:solidFill>
-                  <a:srgbClr val="222222"/>
-                </a:solidFill>
-                <a:latin typeface="Arial"/>
-              </a:rPr>
-              <a:t>0.843</a:t>
-            </a:r>
-          </a:p>
-        </p:txBody>
-      </p:sp>
-      <p:sp>
-        <p:nvSpPr>
-          <p:cNvPr id="259" name="TextBox 258"/>
-          <p:cNvSpPr txBox="1"/>
-          <p:nvPr/>
-        </p:nvSpPr>
-        <p:spPr>
-          <a:xfrm>
-            <a:off x="9418320" y="6302959"/>
-            <a:ext cx="502920" cy="164592"/>
-          </a:xfrm>
-          <a:prstGeom prst="rect">
-            <a:avLst/>
-          </a:prstGeom>
-          <a:noFill/>
-          <a:effectLst/>
-        </p:spPr>
-        <p:txBody>
-          <a:bodyPr wrap="square" lIns="0" rIns="0" tIns="0" bIns="0" anchor="ctr">
-            <a:spAutoFit/>
-          </a:bodyPr>
-          <a:lstStyle/>
-          <a:p>
-            <a:pPr algn="ctr"/>
-            <a:r>
-              <a:rPr sz="700" b="0" i="0">
-                <a:solidFill>
-                  <a:srgbClr val="222222"/>
-                </a:solidFill>
-                <a:latin typeface="Arial"/>
-              </a:rPr>
-              <a:t>0.957</a:t>
-            </a:r>
-          </a:p>
-        </p:txBody>
-      </p:sp>
-      <p:sp>
-        <p:nvSpPr>
-          <p:cNvPr id="260" name="Rectangle 259"/>
-          <p:cNvSpPr/>
-          <p:nvPr/>
-        </p:nvSpPr>
-        <p:spPr>
-          <a:xfrm>
-            <a:off x="164592" y="6584594"/>
-            <a:ext cx="109728" cy="109728"/>
-          </a:xfrm>
-          <a:prstGeom prst="rect">
-            <a:avLst/>
-          </a:prstGeom>
-          <a:solidFill>
-            <a:srgbClr val="B58900"/>
-          </a:solidFill>
-          <a:ln>
-            <a:noFill/>
-          </a:ln>
-          <a:effectLst/>
-        </p:spPr>
-        <p:style>
-          <a:lnRef idx="1">
-            <a:schemeClr val="accent1"/>
-          </a:lnRef>
-          <a:fillRef idx="3">
-            <a:schemeClr val="accent1"/>
-          </a:fillRef>
-          <a:effectRef idx="2">
-            <a:schemeClr val="accent1"/>
-          </a:effectRef>
-          <a:fontRef idx="minor">
-            <a:schemeClr val="lt1"/>
-          </a:fontRef>
-        </p:style>
-        <p:txBody>
-          <a:bodyPr rtlCol="0" anchor="ctr"/>
-          <a:lstStyle/>
-          <a:p>
-            <a:pPr algn="ctr"/>
-          </a:p>
-        </p:txBody>
-      </p:sp>
-      <p:sp>
-        <p:nvSpPr>
-          <p:cNvPr id="261" name="TextBox 260"/>
-          <p:cNvSpPr txBox="1"/>
-          <p:nvPr/>
-        </p:nvSpPr>
-        <p:spPr>
-          <a:xfrm>
-            <a:off x="1353312" y="6557162"/>
-            <a:ext cx="1508760" cy="164592"/>
-          </a:xfrm>
-          <a:prstGeom prst="rect">
-            <a:avLst/>
-          </a:prstGeom>
-          <a:noFill/>
-          <a:effectLst/>
-        </p:spPr>
-        <p:txBody>
-          <a:bodyPr wrap="square" lIns="0" rIns="0" tIns="0" bIns="0" anchor="ctr">
-            <a:spAutoFit/>
-          </a:bodyPr>
-          <a:lstStyle/>
-          <a:p>
-            <a:pPr algn="r"/>
-            <a:r>
-              <a:rPr sz="800" b="1" i="0">
-                <a:solidFill>
-                  <a:srgbClr val="B58900"/>
-                </a:solidFill>
-                <a:latin typeface="Arial"/>
-              </a:rPr>
-              <a:t>T-cell infiltration ★</a:t>
-            </a:r>
-          </a:p>
-        </p:txBody>
-      </p:sp>
-      <p:cxnSp>
-        <p:nvCxnSpPr>
-          <p:cNvPr id="262" name="Connector 261"/>
-          <p:cNvCxnSpPr/>
-          <p:nvPr/>
-        </p:nvCxnSpPr>
-        <p:spPr>
-          <a:xfrm>
-            <a:off x="3843771" y="6639458"/>
-            <a:ext cx="2212471" cy="0"/>
-          </a:xfrm>
-          <a:prstGeom prst="line">
-            <a:avLst/>
-          </a:prstGeom>
-          <a:ln w="22860">
-            <a:solidFill>
-              <a:srgbClr val="B58900"/>
-            </a:solidFill>
-          </a:ln>
-          <a:effectLst/>
-        </p:spPr>
-        <p:style>
-          <a:lnRef idx="2">
-            <a:schemeClr val="accent1"/>
-          </a:lnRef>
-          <a:fillRef idx="0">
-            <a:schemeClr val="accent1"/>
-          </a:fillRef>
-          <a:effectRef idx="1">
-            <a:schemeClr val="accent1"/>
-          </a:effectRef>
-          <a:fontRef idx="minor">
-            <a:schemeClr val="tx1"/>
-          </a:fontRef>
-        </p:style>
-      </p:cxnSp>
-      <p:sp>
-        <p:nvSpPr>
-          <p:cNvPr id="263" name="Oval 262"/>
-          <p:cNvSpPr/>
-          <p:nvPr/>
-        </p:nvSpPr>
-        <p:spPr>
-          <a:xfrm>
-            <a:off x="4893669" y="6615458"/>
-            <a:ext cx="48000" cy="48000"/>
-          </a:xfrm>
-          <a:prstGeom prst="ellipse">
-            <a:avLst/>
-          </a:prstGeom>
-          <a:solidFill>
-            <a:srgbClr val="B58900"/>
-          </a:solidFill>
-          <a:ln w="16510">
-            <a:solidFill>
-              <a:srgbClr val="B58900"/>
-            </a:solidFill>
-          </a:ln>
-          <a:effectLst/>
-        </p:spPr>
-        <p:style>
-          <a:lnRef idx="1">
-            <a:schemeClr val="accent1"/>
-          </a:lnRef>
-          <a:fillRef idx="3">
-            <a:schemeClr val="accent1"/>
-          </a:fillRef>
-          <a:effectRef idx="2">
-            <a:schemeClr val="accent1"/>
-          </a:effectRef>
-          <a:fontRef idx="minor">
-            <a:schemeClr val="lt1"/>
-          </a:fontRef>
-        </p:style>
-        <p:txBody>
-          <a:bodyPr rtlCol="0" anchor="ctr"/>
-          <a:lstStyle/>
-          <a:p>
-            <a:pPr algn="ctr"/>
-          </a:p>
-        </p:txBody>
-      </p:sp>
-      <p:sp>
-        <p:nvSpPr>
-          <p:cNvPr id="264" name="TextBox 263"/>
+          <p:cNvPr id="262" name="TextBox 261"/>
           <p:cNvSpPr txBox="1"/>
           <p:nvPr/>
         </p:nvSpPr>
@@ -13089,14 +13009,14 @@
                 </a:solidFill>
                 <a:latin typeface="Arial"/>
               </a:rPr>
-              <a:t>+0.00</a:t>
-            </a:r>
-          </a:p>
-        </p:txBody>
-      </p:sp>
-      <p:sp>
-        <p:nvSpPr>
-          <p:cNvPr id="265" name="TextBox 264"/>
+              <a:t>+0.25</a:t>
+            </a:r>
+          </a:p>
+        </p:txBody>
+      </p:sp>
+      <p:sp>
+        <p:nvSpPr>
+          <p:cNvPr id="263" name="TextBox 262"/>
           <p:cNvSpPr txBox="1"/>
           <p:nvPr/>
         </p:nvSpPr>
@@ -13125,14 +13045,14 @@
                 </a:solidFill>
                 <a:latin typeface="Arial"/>
               </a:rPr>
-              <a:t>[-0.61, +0.66]</a:t>
-            </a:r>
-          </a:p>
-        </p:txBody>
-      </p:sp>
-      <p:sp>
-        <p:nvSpPr>
-          <p:cNvPr id="266" name="TextBox 265"/>
+              <a:t>[-0.23, +0.77]</a:t>
+            </a:r>
+          </a:p>
+        </p:txBody>
+      </p:sp>
+      <p:sp>
+        <p:nvSpPr>
+          <p:cNvPr id="264" name="TextBox 263"/>
           <p:cNvSpPr txBox="1"/>
           <p:nvPr/>
         </p:nvSpPr>
@@ -13161,14 +13081,14 @@
                 </a:solidFill>
                 <a:latin typeface="Arial"/>
               </a:rPr>
-              <a:t>134</a:t>
-            </a:r>
-          </a:p>
-        </p:txBody>
-      </p:sp>
-      <p:sp>
-        <p:nvSpPr>
-          <p:cNvPr id="267" name="TextBox 266"/>
+              <a:t>159</a:t>
+            </a:r>
+          </a:p>
+        </p:txBody>
+      </p:sp>
+      <p:sp>
+        <p:nvSpPr>
+          <p:cNvPr id="265" name="TextBox 264"/>
           <p:cNvSpPr txBox="1"/>
           <p:nvPr/>
         </p:nvSpPr>
@@ -13197,14 +13117,14 @@
                 </a:solidFill>
                 <a:latin typeface="Arial"/>
               </a:rPr>
-              <a:t>0.957</a:t>
-            </a:r>
-          </a:p>
-        </p:txBody>
-      </p:sp>
-      <p:sp>
-        <p:nvSpPr>
-          <p:cNvPr id="268" name="TextBox 267"/>
+              <a:t>0.418</a:t>
+            </a:r>
+          </a:p>
+        </p:txBody>
+      </p:sp>
+      <p:sp>
+        <p:nvSpPr>
+          <p:cNvPr id="266" name="TextBox 265"/>
           <p:cNvSpPr txBox="1"/>
           <p:nvPr/>
         </p:nvSpPr>
@@ -13233,102 +13153,20 @@
                 </a:solidFill>
                 <a:latin typeface="Arial"/>
               </a:rPr>
-              <a:t>0.957</a:t>
-            </a:r>
-          </a:p>
-        </p:txBody>
-      </p:sp>
-      <p:sp>
-        <p:nvSpPr>
-          <p:cNvPr id="269" name="Oval 268"/>
+              <a:t>0.87</a:t>
+            </a:r>
+          </a:p>
+        </p:txBody>
+      </p:sp>
+      <p:sp>
+        <p:nvSpPr>
+          <p:cNvPr id="267" name="Rectangle 266"/>
           <p:cNvSpPr/>
           <p:nvPr/>
         </p:nvSpPr>
         <p:spPr>
           <a:xfrm>
-            <a:off x="3078960" y="7440648"/>
-            <a:ext cx="60000" cy="60000"/>
-          </a:xfrm>
-          <a:prstGeom prst="ellipse">
-            <a:avLst/>
-          </a:prstGeom>
-          <a:solidFill>
-            <a:srgbClr val="B58900"/>
-          </a:solidFill>
-          <a:ln w="12700">
-            <a:solidFill>
-              <a:srgbClr val="FFFFFF"/>
-            </a:solidFill>
-          </a:ln>
-          <a:effectLst/>
-        </p:spPr>
-        <p:style>
-          <a:lnRef idx="1">
-            <a:schemeClr val="accent1"/>
-          </a:lnRef>
-          <a:fillRef idx="3">
-            <a:schemeClr val="accent1"/>
-          </a:fillRef>
-          <a:effectRef idx="2">
-            <a:schemeClr val="accent1"/>
-          </a:effectRef>
-          <a:fontRef idx="minor">
-            <a:schemeClr val="lt1"/>
-          </a:fontRef>
-        </p:style>
-        <p:txBody>
-          <a:bodyPr rtlCol="0" anchor="ctr"/>
-          <a:lstStyle/>
-          <a:p>
-            <a:pPr algn="ctr"/>
-          </a:p>
-        </p:txBody>
-      </p:sp>
-      <p:sp>
-        <p:nvSpPr>
-          <p:cNvPr id="270" name="TextBox 269"/>
-          <p:cNvSpPr txBox="1"/>
-          <p:nvPr/>
-        </p:nvSpPr>
-        <p:spPr>
-          <a:xfrm>
-            <a:off x="3246120" y="7406640"/>
-            <a:ext cx="5486400" cy="182880"/>
-          </a:xfrm>
-          <a:prstGeom prst="rect">
-            <a:avLst/>
-          </a:prstGeom>
-          <a:noFill/>
-          <a:effectLst/>
-        </p:spPr>
-        <p:txBody>
-          <a:bodyPr wrap="square" lIns="0" rIns="0" tIns="0" bIns="0" anchor="ctr">
-            <a:spAutoFit/>
-          </a:bodyPr>
-          <a:lstStyle/>
-          <a:p>
-            <a:pPr algn="l"/>
-            <a:r>
-              <a:rPr sz="800" b="0" i="1">
-                <a:solidFill>
-                  <a:srgbClr val="B58900"/>
-                </a:solidFill>
-                <a:latin typeface="Arial"/>
-              </a:rPr>
-              <a:t>★ purified immune signatures — CD8 cytotoxic / T-cell infiltration / B-cell infiltration, externally validated in §3.12</a:t>
-            </a:r>
-          </a:p>
-        </p:txBody>
-      </p:sp>
-      <p:sp>
-        <p:nvSpPr>
-          <p:cNvPr id="271" name="Rectangle 270"/>
-          <p:cNvSpPr/>
-          <p:nvPr/>
-        </p:nvSpPr>
-        <p:spPr>
-          <a:xfrm>
-            <a:off x="3108960" y="7662672"/>
+            <a:off x="3108960" y="7424928"/>
             <a:ext cx="128016" cy="91440"/>
           </a:xfrm>
           <a:prstGeom prst="rect">
@@ -13366,13 +13204,13 @@
       </p:sp>
       <p:sp>
         <p:nvSpPr>
-          <p:cNvPr id="272" name="TextBox 271"/>
-          <p:cNvSpPr txBox="1"/>
-          <p:nvPr/>
-        </p:nvSpPr>
-        <p:spPr>
-          <a:xfrm>
-            <a:off x="3291840" y="7635240"/>
+          <p:cNvPr id="268" name="TextBox 267"/>
+          <p:cNvSpPr txBox="1"/>
+          <p:nvPr/>
+        </p:nvSpPr>
+        <p:spPr>
+          <a:xfrm>
+            <a:off x="3291840" y="7406640"/>
             <a:ext cx="1828800" cy="164592"/>
           </a:xfrm>
           <a:prstGeom prst="rect">
@@ -13402,13 +13240,13 @@
       </p:sp>
       <p:sp>
         <p:nvSpPr>
-          <p:cNvPr id="273" name="Rectangle 272"/>
+          <p:cNvPr id="269" name="Rectangle 268"/>
           <p:cNvSpPr/>
           <p:nvPr/>
         </p:nvSpPr>
         <p:spPr>
           <a:xfrm>
-            <a:off x="5074920" y="7662672"/>
+            <a:off x="5074920" y="7424928"/>
             <a:ext cx="128016" cy="91440"/>
           </a:xfrm>
           <a:prstGeom prst="rect">
@@ -13446,13 +13284,13 @@
       </p:sp>
       <p:sp>
         <p:nvSpPr>
-          <p:cNvPr id="274" name="TextBox 273"/>
-          <p:cNvSpPr txBox="1"/>
-          <p:nvPr/>
-        </p:nvSpPr>
-        <p:spPr>
-          <a:xfrm>
-            <a:off x="5257800" y="7635240"/>
+          <p:cNvPr id="270" name="TextBox 269"/>
+          <p:cNvSpPr txBox="1"/>
+          <p:nvPr/>
+        </p:nvSpPr>
+        <p:spPr>
+          <a:xfrm>
+            <a:off x="5257800" y="7406640"/>
             <a:ext cx="1828800" cy="164592"/>
           </a:xfrm>
           <a:prstGeom prst="rect">
@@ -13482,13 +13320,13 @@
       </p:sp>
       <p:sp>
         <p:nvSpPr>
-          <p:cNvPr id="275" name="Rectangle 274"/>
+          <p:cNvPr id="271" name="Rectangle 270"/>
           <p:cNvSpPr/>
           <p:nvPr/>
         </p:nvSpPr>
         <p:spPr>
           <a:xfrm>
-            <a:off x="6949440" y="7662672"/>
+            <a:off x="6949440" y="7424928"/>
             <a:ext cx="182880" cy="91440"/>
           </a:xfrm>
           <a:prstGeom prst="rect">
@@ -13528,13 +13366,13 @@
       </p:sp>
       <p:sp>
         <p:nvSpPr>
-          <p:cNvPr id="276" name="TextBox 275"/>
-          <p:cNvSpPr txBox="1"/>
-          <p:nvPr/>
-        </p:nvSpPr>
-        <p:spPr>
-          <a:xfrm>
-            <a:off x="7178040" y="7635240"/>
+          <p:cNvPr id="272" name="TextBox 271"/>
+          <p:cNvSpPr txBox="1"/>
+          <p:nvPr/>
+        </p:nvSpPr>
+        <p:spPr>
+          <a:xfrm>
+            <a:off x="7178040" y="7406640"/>
             <a:ext cx="2286000" cy="164592"/>
           </a:xfrm>
           <a:prstGeom prst="rect">
@@ -13564,13 +13402,13 @@
       </p:sp>
       <p:sp>
         <p:nvSpPr>
-          <p:cNvPr id="277" name="TextBox 276"/>
-          <p:cNvSpPr txBox="1"/>
-          <p:nvPr/>
-        </p:nvSpPr>
-        <p:spPr>
-          <a:xfrm>
-            <a:off x="3108960" y="7845552"/>
+          <p:cNvPr id="273" name="TextBox 272"/>
+          <p:cNvSpPr txBox="1"/>
+          <p:nvPr/>
+        </p:nvSpPr>
+        <p:spPr>
+          <a:xfrm>
+            <a:off x="3108960" y="7607808"/>
             <a:ext cx="6675120" cy="164592"/>
           </a:xfrm>
           <a:prstGeom prst="rect">
